--- a/docs/submission/UMS_Presentation_v2.4.1.pptx
+++ b/docs/submission/UMS_Presentation_v2.4.1.pptx
@@ -16,6 +16,7 @@
     <p:sldId id="264" r:id="rId16"/>
     <p:sldId id="265" r:id="rId17"/>
     <p:sldId id="266" r:id="rId18"/>
+    <p:sldId id="278" r:id="rId30"/>
     <p:sldId id="267" r:id="rId19"/>
     <p:sldId id="268" r:id="rId20"/>
     <p:sldId id="269" r:id="rId21"/>
@@ -1504,6 +1505,76 @@
           <a:p>
             <a:r>
               <a:t>That brings me to the end of the presentation — thank you for your attention. I'm ready to take any questions. If a question touches on something I've deliberately left out of scope, like the CGPA aggregate or the messaging module, I've documented exactly why on the Future Scope and Limitations slides, so I'm happy to go into more depth on the reasoning behind any of those decisions as well.</a:t>
+            </a:r>
+          </a:p>
+        </p:txBody>
+      </p:sp>
+      <p:sp>
+        <p:nvSpPr>
+          <p:cNvPr id="4" name="Slide Number Placeholder 3"/>
+          <p:cNvSpPr>
+            <a:spLocks noGrp="1"/>
+          </p:cNvSpPr>
+          <p:nvPr>
+            <p:ph type="sldNum" idx="5" sz="quarter"/>
+          </p:nvPr>
+        </p:nvSpPr>
+        <p:spPr/>
+      </p:sp>
+    </p:spTree>
+  </p:cSld>
+  <p:clrMapOvr>
+    <a:masterClrMapping/>
+  </p:clrMapOvr>
+</p:notes>
+</file>
+
+<file path=ppt/notesSlides/notesSlide23.xml><?xml version="1.0" encoding="utf-8"?>
+<p:notes xmlns:a="http://schemas.openxmlformats.org/drawingml/2006/main" xmlns:p="http://schemas.openxmlformats.org/presentationml/2006/main" xmlns:r="http://schemas.openxmlformats.org/officeDocument/2006/relationships">
+  <p:cSld>
+    <p:spTree>
+      <p:nvGrpSpPr>
+        <p:cNvPr id="1" name=""/>
+        <p:cNvGrpSpPr/>
+        <p:nvPr/>
+      </p:nvGrpSpPr>
+      <p:grpSpPr>
+        <a:xfrm>
+          <a:off x="0" y="0"/>
+          <a:ext cx="0" cy="0"/>
+          <a:chOff x="0" y="0"/>
+          <a:chExt cx="0" cy="0"/>
+        </a:xfrm>
+      </p:grpSpPr>
+      <p:sp>
+        <p:nvSpPr>
+          <p:cNvPr id="2" name="Slide Image Placeholder 1"/>
+          <p:cNvSpPr>
+            <a:spLocks noGrp="1"/>
+          </p:cNvSpPr>
+          <p:nvPr>
+            <p:ph type="sldImg" idx="2"/>
+          </p:nvPr>
+        </p:nvSpPr>
+        <p:spPr/>
+      </p:sp>
+      <p:sp>
+        <p:nvSpPr>
+          <p:cNvPr id="3" name="Notes Placeholder 2"/>
+          <p:cNvSpPr>
+            <a:spLocks noGrp="1"/>
+          </p:cNvSpPr>
+          <p:nvPr>
+            <p:ph type="body" idx="3" sz="quarter"/>
+          </p:nvPr>
+        </p:nvSpPr>
+        <p:spPr/>
+        <p:txBody>
+          <a:bodyPr/>
+          <a:lstStyle/>
+          <a:p>
+            <a:r>
+              <a:t>This slide ties the previous feature list together into one concrete, end-to-end record: an Admin creates the semester, a Teacher builds and publishes an exam against it, a Student attempts it, the Teacher grades the submission, an Admin approves the result before it publishes, the Student sees it on their dashboard, and their linked Parent is notified — the same ownership and workflow-state rules covered on the Authentication and Major Features slides apply at every arrow in this chain.</a:t>
             </a:r>
           </a:p>
         </p:txBody>
@@ -5256,7 +5327,7 @@
               </a:defRPr>
             </a:pPr>
             <a:r>
-              <a:t>1 / 22</a:t>
+              <a:t>1 / 23</a:t>
             </a:r>
           </a:p>
         </p:txBody>
@@ -5603,83 +5674,513 @@
                 </a:solidFill>
               </a:defRPr>
             </a:pPr>
-            <a:r>
-              <a:t>📷  Recommended Screenshot</a:t>
-            </a:r>
-          </a:p>
-          <a:p>
-            <a:pPr>
-              <a:spcAft>
-                <a:spcPts val="200"/>
-              </a:spcAft>
-              <a:defRPr sz="1250">
-                <a:solidFill>
-                  <a:srgbClr val="5A4A1E"/>
-                </a:solidFill>
-              </a:defRPr>
-            </a:pPr>
-            <a:r>
-              <a:t>Two side-by-side browser tabs: a Parent viewing their own linked child's data, and the same request manually altered to a different student_id returning 403 Forbidden.</a:t>
-            </a:r>
-          </a:p>
-          <a:p>
-            <a:pPr>
-              <a:spcBef>
-                <a:spcPts val="1400"/>
-              </a:spcBef>
-              <a:defRPr b="1" sz="1300">
+          </a:p>
+        </p:txBody>
+      </p:sp>
+      <p:pic>
+        <p:nvPicPr>
+          <p:cNvPr id="7" name="Picture 6" descr="01_Login_Page.jpg"/>
+          <p:cNvPicPr>
+            <a:picLocks noChangeAspect="1"/>
+          </p:cNvPicPr>
+          <p:nvPr/>
+        </p:nvPicPr>
+        <p:blipFill>
+          <a:blip r:embed="rId3"/>
+          <a:stretch>
+            <a:fillRect/>
+          </a:stretch>
+        </p:blipFill>
+        <p:spPr>
+          <a:xfrm>
+            <a:off x="8636374" y="1577320"/>
+            <a:ext cx="1883932" cy="1804846"/>
+          </a:xfrm>
+          <a:prstGeom prst="rect">
+            <a:avLst/>
+          </a:prstGeom>
+          <a:ln w="9525">
+            <a:solidFill>
+              <a:srgbClr val="D8CEA8"/>
+            </a:solidFill>
+          </a:ln>
+        </p:spPr>
+      </p:pic>
+      <p:sp>
+        <p:nvSpPr>
+          <p:cNvPr id="8" name="TextBox 7"/>
+          <p:cNvSpPr txBox="1"/>
+          <p:nvPr/>
+        </p:nvSpPr>
+        <p:spPr>
+          <a:xfrm>
+            <a:off x="7612360" y="3418166"/>
+            <a:ext cx="3931960" cy="210000"/>
+          </a:xfrm>
+          <a:prstGeom prst="rect">
+            <a:avLst/>
+          </a:prstGeom>
+          <a:noFill/>
+        </p:spPr>
+        <p:txBody>
+          <a:bodyPr wrap="square" lIns="0" rIns="0" tIns="0" bIns="0">
+            <a:spAutoFit/>
+          </a:bodyPr>
+          <a:lstStyle/>
+          <a:p>
+            <a:pPr algn="ctr"/>
+            <a:r>
+              <a:rPr sz="900" b="1" i="0">
                 <a:solidFill>
                   <a:srgbClr val="0E7C86"/>
                 </a:solidFill>
-              </a:defRPr>
-            </a:pPr>
-            <a:r>
-              <a:t>🗺  Diagram Suggestion</a:t>
-            </a:r>
-          </a:p>
-          <a:p>
-            <a:pPr>
-              <a:spcAft>
-                <a:spcPts val="200"/>
-              </a:spcAft>
-              <a:defRPr sz="1250">
-                <a:solidFill>
-                  <a:srgbClr val="5A4A1E"/>
-                </a:solidFill>
-              </a:defRPr>
-            </a:pPr>
-            <a:r>
-              <a:t>Sequence diagram: Client → POST /auth/login → JWT issued → subsequent request with Authorization header → RBAC dependency checks role → Ownership check verifies parent_student_link → 200 or 403.</a:t>
-            </a:r>
-          </a:p>
-          <a:p>
-            <a:pPr>
-              <a:spcBef>
-                <a:spcPts val="1400"/>
-              </a:spcBef>
-              <a:defRPr b="1" sz="1300">
+                <a:latin typeface="Calibri"/>
+              </a:rPr>
+              <a:t>Login Screen Screenshot</a:t>
+            </a:r>
+          </a:p>
+        </p:txBody>
+      </p:sp>
+      <p:sp>
+        <p:nvSpPr>
+          <p:cNvPr id="9" name="TextBox 8"/>
+          <p:cNvSpPr txBox="1"/>
+          <p:nvPr/>
+        </p:nvSpPr>
+        <p:spPr>
+          <a:xfrm>
+            <a:off x="7612360" y="3768166"/>
+            <a:ext cx="3931960" cy="220000"/>
+          </a:xfrm>
+          <a:prstGeom prst="rect">
+            <a:avLst/>
+          </a:prstGeom>
+          <a:noFill/>
+        </p:spPr>
+        <p:txBody>
+          <a:bodyPr wrap="square" anchor="ctr" lIns="0" rIns="0" tIns="0" bIns="0">
+            <a:spAutoFit/>
+          </a:bodyPr>
+          <a:lstStyle/>
+          <a:p>
+            <a:pPr algn="ctr"/>
+            <a:r>
+              <a:rPr sz="1050" b="1">
                 <a:solidFill>
                   <a:srgbClr val="0E7C86"/>
                 </a:solidFill>
-              </a:defRPr>
-            </a:pPr>
-            <a:r>
-              <a:t>✨  Animation</a:t>
-            </a:r>
-          </a:p>
-          <a:p>
-            <a:pPr>
-              <a:spcAft>
-                <a:spcPts val="200"/>
-              </a:spcAft>
-              <a:defRPr sz="1250">
-                <a:solidFill>
-                  <a:srgbClr val="5A4A1E"/>
-                </a:solidFill>
-              </a:defRPr>
-            </a:pPr>
-            <a:r>
-              <a:t>Step through the sequence diagram arrow-by-arrow (Wipe, left-to-right) synced with each spoken step — login, token issue, request, role check, ownership check, response.</a:t>
+                <a:latin typeface="Calibri"/>
+              </a:rPr>
+              <a:t>Role-Based Access Control Flow</a:t>
+            </a:r>
+          </a:p>
+        </p:txBody>
+      </p:sp>
+      <p:sp>
+        <p:nvSpPr>
+          <p:cNvPr id="10" name="Rounded Rectangle 9"/>
+          <p:cNvSpPr/>
+          <p:nvPr/>
+        </p:nvSpPr>
+        <p:spPr>
+          <a:xfrm>
+            <a:off x="7612360" y="4068166"/>
+            <a:ext cx="746392" cy="2035473"/>
+          </a:xfrm>
+          <a:prstGeom prst="roundRect">
+            <a:avLst/>
+          </a:prstGeom>
+          <a:solidFill>
+            <a:srgbClr val="0E7C86"/>
+          </a:solidFill>
+          <a:ln>
+            <a:noFill/>
+          </a:ln>
+          <a:effectLst/>
+        </p:spPr>
+        <p:style>
+          <a:lnRef idx="1">
+            <a:schemeClr val="accent1"/>
+          </a:lnRef>
+          <a:fillRef idx="3">
+            <a:schemeClr val="accent1"/>
+          </a:fillRef>
+          <a:effectRef idx="2">
+            <a:schemeClr val="accent1"/>
+          </a:effectRef>
+          <a:fontRef idx="minor">
+            <a:schemeClr val="lt1"/>
+          </a:fontRef>
+        </p:style>
+        <p:txBody>
+          <a:bodyPr rtlCol="0" anchor="ctr" wrap="square" lIns="45720" rIns="45720" tIns="18000" bIns="18000"/>
+          <a:lstStyle/>
+          <a:p>
+            <a:pPr algn="ctr"/>
+            <a:r>
+              <a:rPr sz="850" b="1">
+                <a:solidFill>
+                  <a:srgbClr val="FFFFFF"/>
+                </a:solidFill>
+                <a:latin typeface="Calibri"/>
+              </a:rPr>
+              <a:t>Login</a:t>
+            </a:r>
+          </a:p>
+        </p:txBody>
+      </p:sp>
+      <p:cxnSp>
+        <p:nvCxnSpPr>
+          <p:cNvPr id="11" name="Connector 10"/>
+          <p:cNvCxnSpPr/>
+          <p:nvPr/>
+        </p:nvCxnSpPr>
+        <p:spPr>
+          <a:xfrm>
+            <a:off x="8358752" y="5085902"/>
+            <a:ext cx="50000" cy="0"/>
+          </a:xfrm>
+          <a:prstGeom prst="line">
+            <a:avLst/>
+          </a:prstGeom>
+          <a:ln w="15875">
+            <a:solidFill>
+              <a:srgbClr val="5A4A1E"/>
+            </a:solidFill>
+            <a:tailEnd type="triangle" w="med" len="med"/>
+          </a:ln>
+        </p:spPr>
+        <p:style>
+          <a:lnRef idx="2">
+            <a:schemeClr val="accent1"/>
+          </a:lnRef>
+          <a:fillRef idx="0">
+            <a:schemeClr val="accent1"/>
+          </a:fillRef>
+          <a:effectRef idx="1">
+            <a:schemeClr val="accent1"/>
+          </a:effectRef>
+          <a:fontRef idx="minor">
+            <a:schemeClr val="tx1"/>
+          </a:fontRef>
+        </p:style>
+      </p:cxnSp>
+      <p:sp>
+        <p:nvSpPr>
+          <p:cNvPr id="12" name="Rounded Rectangle 11"/>
+          <p:cNvSpPr/>
+          <p:nvPr/>
+        </p:nvSpPr>
+        <p:spPr>
+          <a:xfrm>
+            <a:off x="8408752" y="4068166"/>
+            <a:ext cx="746392" cy="2035473"/>
+          </a:xfrm>
+          <a:prstGeom prst="roundRect">
+            <a:avLst/>
+          </a:prstGeom>
+          <a:solidFill>
+            <a:srgbClr val="0F2442"/>
+          </a:solidFill>
+          <a:ln>
+            <a:noFill/>
+          </a:ln>
+          <a:effectLst/>
+        </p:spPr>
+        <p:style>
+          <a:lnRef idx="1">
+            <a:schemeClr val="accent1"/>
+          </a:lnRef>
+          <a:fillRef idx="3">
+            <a:schemeClr val="accent1"/>
+          </a:fillRef>
+          <a:effectRef idx="2">
+            <a:schemeClr val="accent1"/>
+          </a:effectRef>
+          <a:fontRef idx="minor">
+            <a:schemeClr val="lt1"/>
+          </a:fontRef>
+        </p:style>
+        <p:txBody>
+          <a:bodyPr rtlCol="0" anchor="ctr" wrap="square" lIns="45720" rIns="45720" tIns="18000" bIns="18000"/>
+          <a:lstStyle/>
+          <a:p>
+            <a:pPr algn="ctr"/>
+            <a:r>
+              <a:rPr sz="850" b="1">
+                <a:solidFill>
+                  <a:srgbClr val="FFFFFF"/>
+                </a:solidFill>
+                <a:latin typeface="Calibri"/>
+              </a:rPr>
+              <a:t>JWT Issued</a:t>
+            </a:r>
+          </a:p>
+        </p:txBody>
+      </p:sp>
+      <p:cxnSp>
+        <p:nvCxnSpPr>
+          <p:cNvPr id="13" name="Connector 12"/>
+          <p:cNvCxnSpPr/>
+          <p:nvPr/>
+        </p:nvCxnSpPr>
+        <p:spPr>
+          <a:xfrm>
+            <a:off x="9155144" y="5085902"/>
+            <a:ext cx="50000" cy="0"/>
+          </a:xfrm>
+          <a:prstGeom prst="line">
+            <a:avLst/>
+          </a:prstGeom>
+          <a:ln w="15875">
+            <a:solidFill>
+              <a:srgbClr val="5A4A1E"/>
+            </a:solidFill>
+            <a:tailEnd type="triangle" w="med" len="med"/>
+          </a:ln>
+        </p:spPr>
+        <p:style>
+          <a:lnRef idx="2">
+            <a:schemeClr val="accent1"/>
+          </a:lnRef>
+          <a:fillRef idx="0">
+            <a:schemeClr val="accent1"/>
+          </a:fillRef>
+          <a:effectRef idx="1">
+            <a:schemeClr val="accent1"/>
+          </a:effectRef>
+          <a:fontRef idx="minor">
+            <a:schemeClr val="tx1"/>
+          </a:fontRef>
+        </p:style>
+      </p:cxnSp>
+      <p:sp>
+        <p:nvSpPr>
+          <p:cNvPr id="14" name="Rounded Rectangle 13"/>
+          <p:cNvSpPr/>
+          <p:nvPr/>
+        </p:nvSpPr>
+        <p:spPr>
+          <a:xfrm>
+            <a:off x="9205144" y="4068166"/>
+            <a:ext cx="746392" cy="2035473"/>
+          </a:xfrm>
+          <a:prstGeom prst="roundRect">
+            <a:avLst/>
+          </a:prstGeom>
+          <a:solidFill>
+            <a:srgbClr val="0E7C86"/>
+          </a:solidFill>
+          <a:ln>
+            <a:noFill/>
+          </a:ln>
+          <a:effectLst/>
+        </p:spPr>
+        <p:style>
+          <a:lnRef idx="1">
+            <a:schemeClr val="accent1"/>
+          </a:lnRef>
+          <a:fillRef idx="3">
+            <a:schemeClr val="accent1"/>
+          </a:fillRef>
+          <a:effectRef idx="2">
+            <a:schemeClr val="accent1"/>
+          </a:effectRef>
+          <a:fontRef idx="minor">
+            <a:schemeClr val="lt1"/>
+          </a:fontRef>
+        </p:style>
+        <p:txBody>
+          <a:bodyPr rtlCol="0" anchor="ctr" wrap="square" lIns="45720" rIns="45720" tIns="18000" bIns="18000"/>
+          <a:lstStyle/>
+          <a:p>
+            <a:pPr algn="ctr"/>
+            <a:r>
+              <a:rPr sz="850" b="1">
+                <a:solidFill>
+                  <a:srgbClr val="FFFFFF"/>
+                </a:solidFill>
+                <a:latin typeface="Calibri"/>
+              </a:rPr>
+              <a:t>Role Check</a:t>
+            </a:r>
+          </a:p>
+        </p:txBody>
+      </p:sp>
+      <p:cxnSp>
+        <p:nvCxnSpPr>
+          <p:cNvPr id="15" name="Connector 14"/>
+          <p:cNvCxnSpPr/>
+          <p:nvPr/>
+        </p:nvCxnSpPr>
+        <p:spPr>
+          <a:xfrm>
+            <a:off x="9951536" y="5085902"/>
+            <a:ext cx="50000" cy="0"/>
+          </a:xfrm>
+          <a:prstGeom prst="line">
+            <a:avLst/>
+          </a:prstGeom>
+          <a:ln w="15875">
+            <a:solidFill>
+              <a:srgbClr val="5A4A1E"/>
+            </a:solidFill>
+            <a:tailEnd type="triangle" w="med" len="med"/>
+          </a:ln>
+        </p:spPr>
+        <p:style>
+          <a:lnRef idx="2">
+            <a:schemeClr val="accent1"/>
+          </a:lnRef>
+          <a:fillRef idx="0">
+            <a:schemeClr val="accent1"/>
+          </a:fillRef>
+          <a:effectRef idx="1">
+            <a:schemeClr val="accent1"/>
+          </a:effectRef>
+          <a:fontRef idx="minor">
+            <a:schemeClr val="tx1"/>
+          </a:fontRef>
+        </p:style>
+      </p:cxnSp>
+      <p:sp>
+        <p:nvSpPr>
+          <p:cNvPr id="16" name="Rounded Rectangle 15"/>
+          <p:cNvSpPr/>
+          <p:nvPr/>
+        </p:nvSpPr>
+        <p:spPr>
+          <a:xfrm>
+            <a:off x="10001536" y="4068166"/>
+            <a:ext cx="746392" cy="2035473"/>
+          </a:xfrm>
+          <a:prstGeom prst="roundRect">
+            <a:avLst/>
+          </a:prstGeom>
+          <a:solidFill>
+            <a:srgbClr val="0F2442"/>
+          </a:solidFill>
+          <a:ln>
+            <a:noFill/>
+          </a:ln>
+          <a:effectLst/>
+        </p:spPr>
+        <p:style>
+          <a:lnRef idx="1">
+            <a:schemeClr val="accent1"/>
+          </a:lnRef>
+          <a:fillRef idx="3">
+            <a:schemeClr val="accent1"/>
+          </a:fillRef>
+          <a:effectRef idx="2">
+            <a:schemeClr val="accent1"/>
+          </a:effectRef>
+          <a:fontRef idx="minor">
+            <a:schemeClr val="lt1"/>
+          </a:fontRef>
+        </p:style>
+        <p:txBody>
+          <a:bodyPr rtlCol="0" anchor="ctr" wrap="square" lIns="45720" rIns="45720" tIns="18000" bIns="18000"/>
+          <a:lstStyle/>
+          <a:p>
+            <a:pPr algn="ctr"/>
+            <a:r>
+              <a:rPr sz="850" b="1">
+                <a:solidFill>
+                  <a:srgbClr val="FFFFFF"/>
+                </a:solidFill>
+                <a:latin typeface="Calibri"/>
+              </a:rPr>
+              <a:t>Ownership Check</a:t>
+            </a:r>
+          </a:p>
+        </p:txBody>
+      </p:sp>
+      <p:cxnSp>
+        <p:nvCxnSpPr>
+          <p:cNvPr id="17" name="Connector 16"/>
+          <p:cNvCxnSpPr/>
+          <p:nvPr/>
+        </p:nvCxnSpPr>
+        <p:spPr>
+          <a:xfrm>
+            <a:off x="10747928" y="5085902"/>
+            <a:ext cx="50000" cy="0"/>
+          </a:xfrm>
+          <a:prstGeom prst="line">
+            <a:avLst/>
+          </a:prstGeom>
+          <a:ln w="15875">
+            <a:solidFill>
+              <a:srgbClr val="5A4A1E"/>
+            </a:solidFill>
+            <a:tailEnd type="triangle" w="med" len="med"/>
+          </a:ln>
+        </p:spPr>
+        <p:style>
+          <a:lnRef idx="2">
+            <a:schemeClr val="accent1"/>
+          </a:lnRef>
+          <a:fillRef idx="0">
+            <a:schemeClr val="accent1"/>
+          </a:fillRef>
+          <a:effectRef idx="1">
+            <a:schemeClr val="accent1"/>
+          </a:effectRef>
+          <a:fontRef idx="minor">
+            <a:schemeClr val="tx1"/>
+          </a:fontRef>
+        </p:style>
+      </p:cxnSp>
+      <p:sp>
+        <p:nvSpPr>
+          <p:cNvPr id="18" name="Rounded Rectangle 17"/>
+          <p:cNvSpPr/>
+          <p:nvPr/>
+        </p:nvSpPr>
+        <p:spPr>
+          <a:xfrm>
+            <a:off x="10797928" y="4068166"/>
+            <a:ext cx="746392" cy="2035473"/>
+          </a:xfrm>
+          <a:prstGeom prst="roundRect">
+            <a:avLst/>
+          </a:prstGeom>
+          <a:solidFill>
+            <a:srgbClr val="0E7C86"/>
+          </a:solidFill>
+          <a:ln>
+            <a:noFill/>
+          </a:ln>
+          <a:effectLst/>
+        </p:spPr>
+        <p:style>
+          <a:lnRef idx="1">
+            <a:schemeClr val="accent1"/>
+          </a:lnRef>
+          <a:fillRef idx="3">
+            <a:schemeClr val="accent1"/>
+          </a:fillRef>
+          <a:effectRef idx="2">
+            <a:schemeClr val="accent1"/>
+          </a:effectRef>
+          <a:fontRef idx="minor">
+            <a:schemeClr val="lt1"/>
+          </a:fontRef>
+        </p:style>
+        <p:txBody>
+          <a:bodyPr rtlCol="0" anchor="ctr" wrap="square" lIns="45720" rIns="45720" tIns="18000" bIns="18000"/>
+          <a:lstStyle/>
+          <a:p>
+            <a:pPr algn="ctr"/>
+            <a:r>
+              <a:rPr sz="850" b="1">
+                <a:solidFill>
+                  <a:srgbClr val="FFFFFF"/>
+                </a:solidFill>
+                <a:latin typeface="Calibri"/>
+              </a:rPr>
+              <a:t>200 / 403</a:t>
             </a:r>
           </a:p>
         </p:txBody>
@@ -6041,83 +6542,197 @@
                 </a:solidFill>
               </a:defRPr>
             </a:pPr>
-            <a:r>
-              <a:t>📷  Recommended Screenshot</a:t>
-            </a:r>
-          </a:p>
-          <a:p>
-            <a:pPr>
-              <a:spcAft>
-                <a:spcPts val="200"/>
-              </a:spcAft>
-              <a:defRPr sz="1250">
-                <a:solidFill>
-                  <a:srgbClr val="5A4A1E"/>
-                </a:solidFill>
-              </a:defRPr>
-            </a:pPr>
-            <a:r>
-              <a:t>A montage or single collage image combining small crops of the Admin, Teacher, Student, and Parent dashboards.</a:t>
-            </a:r>
-          </a:p>
-          <a:p>
-            <a:pPr>
-              <a:spcBef>
-                <a:spcPts val="1400"/>
-              </a:spcBef>
-              <a:defRPr b="1" sz="1300">
+          </a:p>
+        </p:txBody>
+      </p:sp>
+      <p:pic>
+        <p:nvPicPr>
+          <p:cNvPr id="7" name="Picture 6" descr="21_Teacher_Mark_Attendance.jpg"/>
+          <p:cNvPicPr>
+            <a:picLocks noChangeAspect="1"/>
+          </p:cNvPicPr>
+          <p:nvPr/>
+        </p:nvPicPr>
+        <p:blipFill>
+          <a:blip r:embed="rId3"/>
+          <a:stretch>
+            <a:fillRect/>
+          </a:stretch>
+        </p:blipFill>
+        <p:spPr>
+          <a:xfrm>
+            <a:off x="7718390" y="1577320"/>
+            <a:ext cx="3719900" cy="1209440"/>
+          </a:xfrm>
+          <a:prstGeom prst="rect">
+            <a:avLst/>
+          </a:prstGeom>
+          <a:ln w="9525">
+            <a:solidFill>
+              <a:srgbClr val="D8CEA8"/>
+            </a:solidFill>
+          </a:ln>
+        </p:spPr>
+      </p:pic>
+      <p:sp>
+        <p:nvSpPr>
+          <p:cNvPr id="8" name="TextBox 7"/>
+          <p:cNvSpPr txBox="1"/>
+          <p:nvPr/>
+        </p:nvSpPr>
+        <p:spPr>
+          <a:xfrm>
+            <a:off x="7612360" y="2822760"/>
+            <a:ext cx="3931960" cy="210000"/>
+          </a:xfrm>
+          <a:prstGeom prst="rect">
+            <a:avLst/>
+          </a:prstGeom>
+          <a:noFill/>
+        </p:spPr>
+        <p:txBody>
+          <a:bodyPr wrap="square" lIns="0" rIns="0" tIns="0" bIns="0">
+            <a:spAutoFit/>
+          </a:bodyPr>
+          <a:lstStyle/>
+          <a:p>
+            <a:pPr algn="ctr"/>
+            <a:r>
+              <a:rPr sz="900" b="1" i="0">
                 <a:solidFill>
                   <a:srgbClr val="0E7C86"/>
                 </a:solidFill>
-              </a:defRPr>
-            </a:pPr>
-            <a:r>
-              <a:t>🗺  Diagram Suggestion</a:t>
-            </a:r>
-          </a:p>
-          <a:p>
-            <a:pPr>
-              <a:spcAft>
-                <a:spcPts val="200"/>
-              </a:spcAft>
-              <a:defRPr sz="1250">
-                <a:solidFill>
-                  <a:srgbClr val="5A4A1E"/>
-                </a:solidFill>
-              </a:defRPr>
-            </a:pPr>
-            <a:r>
-              <a:t>Feature map / mind-map: 'University Management System' at center, five branches (Scheduling, Attendance, Exams &amp; Results, Fees, Notifications), each with 2–3 sub-features.</a:t>
-            </a:r>
-          </a:p>
-          <a:p>
-            <a:pPr>
-              <a:spcBef>
-                <a:spcPts val="1400"/>
-              </a:spcBef>
-              <a:defRPr b="1" sz="1300">
+                <a:latin typeface="Calibri"/>
+              </a:rPr>
+              <a:t>Attendance Module Screenshot</a:t>
+            </a:r>
+          </a:p>
+        </p:txBody>
+      </p:sp>
+      <p:pic>
+        <p:nvPicPr>
+          <p:cNvPr id="9" name="Picture 8" descr="09_Admin_Timetable.jpg"/>
+          <p:cNvPicPr>
+            <a:picLocks noChangeAspect="1"/>
+          </p:cNvPicPr>
+          <p:nvPr/>
+        </p:nvPicPr>
+        <p:blipFill>
+          <a:blip r:embed="rId4"/>
+          <a:stretch>
+            <a:fillRect/>
+          </a:stretch>
+        </p:blipFill>
+        <p:spPr>
+          <a:xfrm>
+            <a:off x="8322760" y="3122760"/>
+            <a:ext cx="2511159" cy="1209440"/>
+          </a:xfrm>
+          <a:prstGeom prst="rect">
+            <a:avLst/>
+          </a:prstGeom>
+          <a:ln w="9525">
+            <a:solidFill>
+              <a:srgbClr val="D8CEA8"/>
+            </a:solidFill>
+          </a:ln>
+        </p:spPr>
+      </p:pic>
+      <p:sp>
+        <p:nvSpPr>
+          <p:cNvPr id="10" name="TextBox 9"/>
+          <p:cNvSpPr txBox="1"/>
+          <p:nvPr/>
+        </p:nvSpPr>
+        <p:spPr>
+          <a:xfrm>
+            <a:off x="7612360" y="4368200"/>
+            <a:ext cx="3931960" cy="210000"/>
+          </a:xfrm>
+          <a:prstGeom prst="rect">
+            <a:avLst/>
+          </a:prstGeom>
+          <a:noFill/>
+        </p:spPr>
+        <p:txBody>
+          <a:bodyPr wrap="square" lIns="0" rIns="0" tIns="0" bIns="0">
+            <a:spAutoFit/>
+          </a:bodyPr>
+          <a:lstStyle/>
+          <a:p>
+            <a:pPr algn="ctr"/>
+            <a:r>
+              <a:rPr sz="900" b="1" i="0">
                 <a:solidFill>
                   <a:srgbClr val="0E7C86"/>
                 </a:solidFill>
-              </a:defRPr>
-            </a:pPr>
-            <a:r>
-              <a:t>✨  Animation</a:t>
-            </a:r>
-          </a:p>
-          <a:p>
-            <a:pPr>
-              <a:spcAft>
-                <a:spcPts val="200"/>
-              </a:spcAft>
-              <a:defRPr sz="1250">
-                <a:solidFill>
-                  <a:srgbClr val="5A4A1E"/>
-                </a:solidFill>
-              </a:defRPr>
-            </a:pPr>
-            <a:r>
-              <a:t>Radial 'Grow' animation for the mind-map — center node first, then each of the five branches expands outward on click.</a:t>
+                <a:latin typeface="Calibri"/>
+              </a:rPr>
+              <a:t>Schedule Management Screenshot</a:t>
+            </a:r>
+          </a:p>
+        </p:txBody>
+      </p:sp>
+      <p:pic>
+        <p:nvPicPr>
+          <p:cNvPr id="11" name="Picture 10" descr="17_Admin_Notifications.jpg"/>
+          <p:cNvPicPr>
+            <a:picLocks noChangeAspect="1"/>
+          </p:cNvPicPr>
+          <p:nvPr/>
+        </p:nvPicPr>
+        <p:blipFill>
+          <a:blip r:embed="rId5"/>
+          <a:stretch>
+            <a:fillRect/>
+          </a:stretch>
+        </p:blipFill>
+        <p:spPr>
+          <a:xfrm>
+            <a:off x="7612360" y="5008638"/>
+            <a:ext cx="3931960" cy="528564"/>
+          </a:xfrm>
+          <a:prstGeom prst="rect">
+            <a:avLst/>
+          </a:prstGeom>
+          <a:ln w="9525">
+            <a:solidFill>
+              <a:srgbClr val="D8CEA8"/>
+            </a:solidFill>
+          </a:ln>
+        </p:spPr>
+      </p:pic>
+      <p:sp>
+        <p:nvSpPr>
+          <p:cNvPr id="12" name="TextBox 11"/>
+          <p:cNvSpPr txBox="1"/>
+          <p:nvPr/>
+        </p:nvSpPr>
+        <p:spPr>
+          <a:xfrm>
+            <a:off x="7612360" y="5913640"/>
+            <a:ext cx="3931960" cy="210000"/>
+          </a:xfrm>
+          <a:prstGeom prst="rect">
+            <a:avLst/>
+          </a:prstGeom>
+          <a:noFill/>
+        </p:spPr>
+        <p:txBody>
+          <a:bodyPr wrap="square" lIns="0" rIns="0" tIns="0" bIns="0">
+            <a:spAutoFit/>
+          </a:bodyPr>
+          <a:lstStyle/>
+          <a:p>
+            <a:pPr algn="ctr"/>
+            <a:r>
+              <a:rPr sz="900" b="1" i="0">
+                <a:solidFill>
+                  <a:srgbClr val="0E7C86"/>
+                </a:solidFill>
+                <a:latin typeface="Calibri"/>
+              </a:rPr>
+              <a:t>Notification Center Screenshot</a:t>
             </a:r>
           </a:p>
         </p:txBody>
@@ -6133,14 +6748,6 @@
 <file path=ppt/slides/slide12.xml><?xml version="1.0" encoding="utf-8"?>
 <p:sld xmlns:a="http://schemas.openxmlformats.org/drawingml/2006/main" xmlns:p="http://schemas.openxmlformats.org/presentationml/2006/main" xmlns:r="http://schemas.openxmlformats.org/officeDocument/2006/relationships">
   <p:cSld>
-    <p:bg>
-      <p:bgPr>
-        <a:solidFill>
-          <a:srgbClr val="FFFFFF"/>
-        </a:solidFill>
-        <a:effectLst/>
-      </p:bgPr>
-    </p:bg>
     <p:spTree>
       <p:nvGrpSpPr>
         <p:cNvPr id="1" name=""/>
@@ -6168,6 +6775,7 @@
           <a:ln>
             <a:noFill/>
           </a:ln>
+          <a:effectLst/>
         </p:spPr>
         <p:style>
           <a:lnRef idx="1">
@@ -6211,6 +6819,7 @@
           <a:ln>
             <a:noFill/>
           </a:ln>
+          <a:effectLst/>
         </p:spPr>
         <p:style>
           <a:lnRef idx="1">
@@ -6251,20 +6860,19 @@
           <a:noFill/>
         </p:spPr>
         <p:txBody>
-          <a:bodyPr wrap="square">
+          <a:bodyPr wrap="none" lIns="0" tIns="0">
             <a:spAutoFit/>
           </a:bodyPr>
           <a:lstStyle/>
           <a:p>
-            <a:pPr>
-              <a:defRPr sz="3000" b="1">
+            <a:r>
+              <a:rPr sz="3000" b="1">
                 <a:solidFill>
                   <a:srgbClr val="FFFFFF"/>
                 </a:solidFill>
-              </a:defRPr>
-            </a:pPr>
-            <a:r>
-              <a:t>Admin Portal</a:t>
+                <a:latin typeface="Calibri"/>
+              </a:rPr>
+              <a:t>Typical Academic Workflow</a:t>
             </a:r>
           </a:p>
         </p:txBody>
@@ -6278,7 +6886,7 @@
         <p:spPr>
           <a:xfrm>
             <a:off x="502920" y="1417320"/>
-            <a:ext cx="6766560" cy="4846320"/>
+            <a:ext cx="11185855" cy="260000"/>
           </a:xfrm>
           <a:prstGeom prst="rect">
             <a:avLst/>
@@ -6286,128 +6894,20 @@
           <a:noFill/>
         </p:spPr>
         <p:txBody>
-          <a:bodyPr wrap="square">
+          <a:bodyPr wrap="square" anchor="ctr" lIns="0" rIns="0" tIns="0" bIns="0">
             <a:spAutoFit/>
           </a:bodyPr>
           <a:lstStyle/>
           <a:p>
-            <a:pPr>
-              <a:spcAft>
-                <a:spcPts val="1000"/>
-              </a:spcAft>
-              <a:defRPr sz="1700" b="0">
-                <a:solidFill>
-                  <a:srgbClr val="333333"/>
-                </a:solidFill>
-              </a:defRPr>
-            </a:pPr>
-            <a:r>
-              <a:t>•  Dashboard: system-wide summary — user counts, pending approvals, health status</a:t>
-            </a:r>
-          </a:p>
-          <a:p>
-            <a:pPr>
-              <a:spcAft>
-                <a:spcPts val="1000"/>
-              </a:spcAft>
-              <a:defRPr sz="1700" b="0">
-                <a:solidFill>
-                  <a:srgbClr val="333333"/>
-                </a:solidFill>
-              </a:defRPr>
-            </a:pPr>
-            <a:r>
-              <a:t>•  User Management: create, edit, deactivate Students/Teachers/Parents/Admins</a:t>
-            </a:r>
-          </a:p>
-          <a:p>
-            <a:pPr>
-              <a:spcAft>
-                <a:spcPts val="1000"/>
-              </a:spcAft>
-              <a:defRPr sz="1700" b="0">
-                <a:solidFill>
-                  <a:srgbClr val="333333"/>
-                </a:solidFill>
-              </a:defRPr>
-            </a:pPr>
-            <a:r>
-              <a:t>•  Academic Setup: manage Departments, Courses, Rooms, Semesters (reference/catalog data)</a:t>
-            </a:r>
-          </a:p>
-          <a:p>
-            <a:pPr>
-              <a:spcAft>
-                <a:spcPts val="1000"/>
-              </a:spcAft>
-              <a:defRPr sz="1700" b="0">
-                <a:solidFill>
-                  <a:srgbClr val="333333"/>
-                </a:solidFill>
-              </a:defRPr>
-            </a:pPr>
-            <a:r>
-              <a:t>•  Timetable: create class sessions with conflict detection; approve/reject Teacher change requests</a:t>
-            </a:r>
-          </a:p>
-          <a:p>
-            <a:pPr>
-              <a:spcAft>
-                <a:spcPts val="1000"/>
-              </a:spcAft>
-              <a:defRPr sz="1700" b="0">
-                <a:solidFill>
-                  <a:srgbClr val="333333"/>
-                </a:solidFill>
-              </a:defRPr>
-            </a:pPr>
-            <a:r>
-              <a:t>•  Result Approval: review and approve/reject submitted results before publication</a:t>
-            </a:r>
-          </a:p>
-          <a:p>
-            <a:pPr>
-              <a:spcAft>
-                <a:spcPts val="1000"/>
-              </a:spcAft>
-              <a:defRPr sz="1700" b="0">
-                <a:solidFill>
-                  <a:srgbClr val="333333"/>
-                </a:solidFill>
-              </a:defRPr>
-            </a:pPr>
-            <a:r>
-              <a:t>•  Fee Dashboard: define fee structures, record payments, view balances</a:t>
-            </a:r>
-          </a:p>
-          <a:p>
-            <a:pPr>
-              <a:spcAft>
-                <a:spcPts val="1000"/>
-              </a:spcAft>
-              <a:defRPr sz="1700" b="0">
-                <a:solidFill>
-                  <a:srgbClr val="333333"/>
-                </a:solidFill>
-              </a:defRPr>
-            </a:pPr>
-            <a:r>
-              <a:t>•  Reports: generate attendance, result, and fee reports, filterable by department/semester/student</a:t>
-            </a:r>
-          </a:p>
-          <a:p>
-            <a:pPr>
-              <a:spcAft>
-                <a:spcPts val="1000"/>
-              </a:spcAft>
-              <a:defRPr sz="1700" b="0">
-                <a:solidFill>
-                  <a:srgbClr val="333333"/>
-                </a:solidFill>
-              </a:defRPr>
-            </a:pPr>
-            <a:r>
-              <a:t>•  Notifications: system-wide audit trail of key events</a:t>
+            <a:pPr algn="ctr"/>
+            <a:r>
+              <a:rPr sz="1200" b="1">
+                <a:solidFill>
+                  <a:srgbClr val="0E7C86"/>
+                </a:solidFill>
+                <a:latin typeface="Calibri"/>
+              </a:rPr>
+              <a:t>One record, one workflow — from semester creation to parent notification</a:t>
             </a:r>
           </a:p>
         </p:txBody>
@@ -6420,19 +6920,17 @@
         </p:nvSpPr>
         <p:spPr>
           <a:xfrm>
-            <a:off x="7452360" y="1417320"/>
-            <a:ext cx="4251960" cy="4846320"/>
+            <a:off x="502920" y="2367320"/>
+            <a:ext cx="1336981" cy="1650000"/>
           </a:xfrm>
           <a:prstGeom prst="roundRect">
             <a:avLst/>
           </a:prstGeom>
           <a:solidFill>
-            <a:srgbClr val="F3F0E7"/>
+            <a:srgbClr val="0F2442"/>
           </a:solidFill>
-          <a:ln w="9525">
-            <a:solidFill>
-              <a:srgbClr val="D8CEA8"/>
-            </a:solidFill>
+          <a:ln>
+            <a:noFill/>
           </a:ln>
           <a:effectLst/>
         </p:spPr>
@@ -6451,96 +6949,964 @@
           </a:fontRef>
         </p:style>
         <p:txBody>
-          <a:bodyPr rtlCol="0" anchor="ctr" wrap="square" lIns="182880" rIns="182880" tIns="164592"/>
-          <a:lstStyle/>
-          <a:p>
-            <a:pPr algn="ctr">
-              <a:spcBef>
-                <a:spcPts val="0"/>
-              </a:spcBef>
-              <a:defRPr b="1" sz="1300">
-                <a:solidFill>
-                  <a:srgbClr val="0E7C86"/>
-                </a:solidFill>
-              </a:defRPr>
-            </a:pPr>
-            <a:r>
-              <a:t>📷  Recommended Screenshot</a:t>
-            </a:r>
-          </a:p>
-          <a:p>
-            <a:pPr>
-              <a:spcAft>
-                <a:spcPts val="200"/>
-              </a:spcAft>
-              <a:defRPr sz="1250">
-                <a:solidFill>
-                  <a:srgbClr val="5A4A1E"/>
-                </a:solidFill>
-              </a:defRPr>
-            </a:pPr>
-            <a:r>
-              <a:t>Admin Dashboard (/dashboard) with summary widgets populated, and the Schedule Change Approval Queue on /timetable.</a:t>
-            </a:r>
-          </a:p>
-          <a:p>
-            <a:pPr>
-              <a:spcBef>
-                <a:spcPts val="1400"/>
-              </a:spcBef>
-              <a:defRPr b="1" sz="1300">
-                <a:solidFill>
-                  <a:srgbClr val="0E7C86"/>
-                </a:solidFill>
-              </a:defRPr>
-            </a:pPr>
-            <a:r>
-              <a:t>🗺  Diagram Suggestion</a:t>
-            </a:r>
-          </a:p>
-          <a:p>
-            <a:pPr>
-              <a:spcAft>
-                <a:spcPts val="200"/>
-              </a:spcAft>
-              <a:defRPr sz="1250">
-                <a:solidFill>
-                  <a:srgbClr val="5A4A1E"/>
-                </a:solidFill>
-              </a:defRPr>
-            </a:pPr>
-            <a:r>
-              <a:t>None — use two real screenshots side by side instead of a diagram for this slide.</a:t>
-            </a:r>
-          </a:p>
-          <a:p>
-            <a:pPr>
-              <a:spcBef>
-                <a:spcPts val="1400"/>
-              </a:spcBef>
-              <a:defRPr b="1" sz="1300">
-                <a:solidFill>
-                  <a:srgbClr val="0E7C86"/>
-                </a:solidFill>
-              </a:defRPr>
-            </a:pPr>
-            <a:r>
-              <a:t>✨  Animation</a:t>
-            </a:r>
-          </a:p>
-          <a:p>
-            <a:pPr>
-              <a:spcAft>
-                <a:spcPts val="200"/>
-              </a:spcAft>
-              <a:defRPr sz="1250">
-                <a:solidFill>
-                  <a:srgbClr val="5A4A1E"/>
-                </a:solidFill>
-              </a:defRPr>
-            </a:pPr>
-            <a:r>
-              <a:t>Two-image 'Split' entrance — Dashboard screenshot slides in from the left, Approval Queue screenshot from the right.</a:t>
+          <a:bodyPr rtlCol="0" anchor="ctr" wrap="square" lIns="45720" rIns="45720" tIns="18000" bIns="18000"/>
+          <a:lstStyle/>
+          <a:p>
+            <a:pPr algn="ctr"/>
+            <a:r>
+              <a:rPr sz="950" b="1">
+                <a:solidFill>
+                  <a:srgbClr val="FFFFFF"/>
+                </a:solidFill>
+                <a:latin typeface="Calibri"/>
+              </a:rPr>
+              <a:t>Admin</a:t>
+            </a:r>
+          </a:p>
+        </p:txBody>
+      </p:sp>
+      <p:cxnSp>
+        <p:nvCxnSpPr>
+          <p:cNvPr id="7" name="Connector 6"/>
+          <p:cNvCxnSpPr/>
+          <p:nvPr/>
+        </p:nvCxnSpPr>
+        <p:spPr>
+          <a:xfrm>
+            <a:off x="1839901" y="3192320"/>
+            <a:ext cx="70000" cy="0"/>
+          </a:xfrm>
+          <a:prstGeom prst="line">
+            <a:avLst/>
+          </a:prstGeom>
+          <a:ln w="19050">
+            <a:solidFill>
+              <a:srgbClr val="5A4A1E"/>
+            </a:solidFill>
+            <a:tailEnd type="triangle" w="med" len="med"/>
+          </a:ln>
+        </p:spPr>
+        <p:style>
+          <a:lnRef idx="2">
+            <a:schemeClr val="accent1"/>
+          </a:lnRef>
+          <a:fillRef idx="0">
+            <a:schemeClr val="accent1"/>
+          </a:fillRef>
+          <a:effectRef idx="1">
+            <a:schemeClr val="accent1"/>
+          </a:effectRef>
+          <a:fontRef idx="minor">
+            <a:schemeClr val="tx1"/>
+          </a:fontRef>
+        </p:style>
+      </p:cxnSp>
+      <p:sp>
+        <p:nvSpPr>
+          <p:cNvPr id="8" name="Rounded Rectangle 7"/>
+          <p:cNvSpPr/>
+          <p:nvPr/>
+        </p:nvSpPr>
+        <p:spPr>
+          <a:xfrm>
+            <a:off x="1909901" y="2367320"/>
+            <a:ext cx="1336981" cy="1650000"/>
+          </a:xfrm>
+          <a:prstGeom prst="roundRect">
+            <a:avLst/>
+          </a:prstGeom>
+          <a:solidFill>
+            <a:srgbClr val="0F2442"/>
+          </a:solidFill>
+          <a:ln>
+            <a:noFill/>
+          </a:ln>
+          <a:effectLst/>
+        </p:spPr>
+        <p:style>
+          <a:lnRef idx="1">
+            <a:schemeClr val="accent1"/>
+          </a:lnRef>
+          <a:fillRef idx="3">
+            <a:schemeClr val="accent1"/>
+          </a:fillRef>
+          <a:effectRef idx="2">
+            <a:schemeClr val="accent1"/>
+          </a:effectRef>
+          <a:fontRef idx="minor">
+            <a:schemeClr val="lt1"/>
+          </a:fontRef>
+        </p:style>
+        <p:txBody>
+          <a:bodyPr rtlCol="0" anchor="ctr" wrap="square" lIns="45720" rIns="45720" tIns="18000" bIns="18000"/>
+          <a:lstStyle/>
+          <a:p>
+            <a:pPr algn="ctr"/>
+            <a:r>
+              <a:rPr sz="950" b="1">
+                <a:solidFill>
+                  <a:srgbClr val="FFFFFF"/>
+                </a:solidFill>
+                <a:latin typeface="Calibri"/>
+              </a:rPr>
+              <a:t>Creates
+Semester</a:t>
+            </a:r>
+          </a:p>
+        </p:txBody>
+      </p:sp>
+      <p:cxnSp>
+        <p:nvCxnSpPr>
+          <p:cNvPr id="9" name="Connector 8"/>
+          <p:cNvCxnSpPr/>
+          <p:nvPr/>
+        </p:nvCxnSpPr>
+        <p:spPr>
+          <a:xfrm>
+            <a:off x="3246882" y="3192320"/>
+            <a:ext cx="70000" cy="0"/>
+          </a:xfrm>
+          <a:prstGeom prst="line">
+            <a:avLst/>
+          </a:prstGeom>
+          <a:ln w="19050">
+            <a:solidFill>
+              <a:srgbClr val="5A4A1E"/>
+            </a:solidFill>
+            <a:tailEnd type="triangle" w="med" len="med"/>
+          </a:ln>
+        </p:spPr>
+        <p:style>
+          <a:lnRef idx="2">
+            <a:schemeClr val="accent1"/>
+          </a:lnRef>
+          <a:fillRef idx="0">
+            <a:schemeClr val="accent1"/>
+          </a:fillRef>
+          <a:effectRef idx="1">
+            <a:schemeClr val="accent1"/>
+          </a:effectRef>
+          <a:fontRef idx="minor">
+            <a:schemeClr val="tx1"/>
+          </a:fontRef>
+        </p:style>
+      </p:cxnSp>
+      <p:sp>
+        <p:nvSpPr>
+          <p:cNvPr id="10" name="Rounded Rectangle 9"/>
+          <p:cNvSpPr/>
+          <p:nvPr/>
+        </p:nvSpPr>
+        <p:spPr>
+          <a:xfrm>
+            <a:off x="3316882" y="2367320"/>
+            <a:ext cx="1336981" cy="1650000"/>
+          </a:xfrm>
+          <a:prstGeom prst="roundRect">
+            <a:avLst/>
+          </a:prstGeom>
+          <a:solidFill>
+            <a:srgbClr val="0E7C86"/>
+          </a:solidFill>
+          <a:ln>
+            <a:noFill/>
+          </a:ln>
+          <a:effectLst/>
+        </p:spPr>
+        <p:style>
+          <a:lnRef idx="1">
+            <a:schemeClr val="accent1"/>
+          </a:lnRef>
+          <a:fillRef idx="3">
+            <a:schemeClr val="accent1"/>
+          </a:fillRef>
+          <a:effectRef idx="2">
+            <a:schemeClr val="accent1"/>
+          </a:effectRef>
+          <a:fontRef idx="minor">
+            <a:schemeClr val="lt1"/>
+          </a:fontRef>
+        </p:style>
+        <p:txBody>
+          <a:bodyPr rtlCol="0" anchor="ctr" wrap="square" lIns="45720" rIns="45720" tIns="18000" bIns="18000"/>
+          <a:lstStyle/>
+          <a:p>
+            <a:pPr algn="ctr"/>
+            <a:r>
+              <a:rPr sz="950" b="1">
+                <a:solidFill>
+                  <a:srgbClr val="FFFFFF"/>
+                </a:solidFill>
+                <a:latin typeface="Calibri"/>
+              </a:rPr>
+              <a:t>Teacher Creates
+Exam</a:t>
+            </a:r>
+          </a:p>
+        </p:txBody>
+      </p:sp>
+      <p:cxnSp>
+        <p:nvCxnSpPr>
+          <p:cNvPr id="11" name="Connector 10"/>
+          <p:cNvCxnSpPr/>
+          <p:nvPr/>
+        </p:nvCxnSpPr>
+        <p:spPr>
+          <a:xfrm>
+            <a:off x="4653863" y="3192320"/>
+            <a:ext cx="70000" cy="0"/>
+          </a:xfrm>
+          <a:prstGeom prst="line">
+            <a:avLst/>
+          </a:prstGeom>
+          <a:ln w="19050">
+            <a:solidFill>
+              <a:srgbClr val="5A4A1E"/>
+            </a:solidFill>
+            <a:tailEnd type="triangle" w="med" len="med"/>
+          </a:ln>
+        </p:spPr>
+        <p:style>
+          <a:lnRef idx="2">
+            <a:schemeClr val="accent1"/>
+          </a:lnRef>
+          <a:fillRef idx="0">
+            <a:schemeClr val="accent1"/>
+          </a:fillRef>
+          <a:effectRef idx="1">
+            <a:schemeClr val="accent1"/>
+          </a:effectRef>
+          <a:fontRef idx="minor">
+            <a:schemeClr val="tx1"/>
+          </a:fontRef>
+        </p:style>
+      </p:cxnSp>
+      <p:sp>
+        <p:nvSpPr>
+          <p:cNvPr id="12" name="Rounded Rectangle 11"/>
+          <p:cNvSpPr/>
+          <p:nvPr/>
+        </p:nvSpPr>
+        <p:spPr>
+          <a:xfrm>
+            <a:off x="4723863" y="2367320"/>
+            <a:ext cx="1336981" cy="1650000"/>
+          </a:xfrm>
+          <a:prstGeom prst="roundRect">
+            <a:avLst/>
+          </a:prstGeom>
+          <a:solidFill>
+            <a:srgbClr val="5A4A1E"/>
+          </a:solidFill>
+          <a:ln>
+            <a:noFill/>
+          </a:ln>
+          <a:effectLst/>
+        </p:spPr>
+        <p:style>
+          <a:lnRef idx="1">
+            <a:schemeClr val="accent1"/>
+          </a:lnRef>
+          <a:fillRef idx="3">
+            <a:schemeClr val="accent1"/>
+          </a:fillRef>
+          <a:effectRef idx="2">
+            <a:schemeClr val="accent1"/>
+          </a:effectRef>
+          <a:fontRef idx="minor">
+            <a:schemeClr val="lt1"/>
+          </a:fontRef>
+        </p:style>
+        <p:txBody>
+          <a:bodyPr rtlCol="0" anchor="ctr" wrap="square" lIns="45720" rIns="45720" tIns="18000" bIns="18000"/>
+          <a:lstStyle/>
+          <a:p>
+            <a:pPr algn="ctr"/>
+            <a:r>
+              <a:rPr sz="950" b="1">
+                <a:solidFill>
+                  <a:srgbClr val="FFFFFF"/>
+                </a:solidFill>
+                <a:latin typeface="Calibri"/>
+              </a:rPr>
+              <a:t>Student Takes
+Exam</a:t>
+            </a:r>
+          </a:p>
+        </p:txBody>
+      </p:sp>
+      <p:cxnSp>
+        <p:nvCxnSpPr>
+          <p:cNvPr id="13" name="Connector 12"/>
+          <p:cNvCxnSpPr/>
+          <p:nvPr/>
+        </p:nvCxnSpPr>
+        <p:spPr>
+          <a:xfrm>
+            <a:off x="6060844" y="3192320"/>
+            <a:ext cx="70000" cy="0"/>
+          </a:xfrm>
+          <a:prstGeom prst="line">
+            <a:avLst/>
+          </a:prstGeom>
+          <a:ln w="19050">
+            <a:solidFill>
+              <a:srgbClr val="5A4A1E"/>
+            </a:solidFill>
+            <a:tailEnd type="triangle" w="med" len="med"/>
+          </a:ln>
+        </p:spPr>
+        <p:style>
+          <a:lnRef idx="2">
+            <a:schemeClr val="accent1"/>
+          </a:lnRef>
+          <a:fillRef idx="0">
+            <a:schemeClr val="accent1"/>
+          </a:fillRef>
+          <a:effectRef idx="1">
+            <a:schemeClr val="accent1"/>
+          </a:effectRef>
+          <a:fontRef idx="minor">
+            <a:schemeClr val="tx1"/>
+          </a:fontRef>
+        </p:style>
+      </p:cxnSp>
+      <p:sp>
+        <p:nvSpPr>
+          <p:cNvPr id="14" name="Rounded Rectangle 13"/>
+          <p:cNvSpPr/>
+          <p:nvPr/>
+        </p:nvSpPr>
+        <p:spPr>
+          <a:xfrm>
+            <a:off x="6130844" y="2367320"/>
+            <a:ext cx="1336981" cy="1650000"/>
+          </a:xfrm>
+          <a:prstGeom prst="roundRect">
+            <a:avLst/>
+          </a:prstGeom>
+          <a:solidFill>
+            <a:srgbClr val="0E7C86"/>
+          </a:solidFill>
+          <a:ln>
+            <a:noFill/>
+          </a:ln>
+          <a:effectLst/>
+        </p:spPr>
+        <p:style>
+          <a:lnRef idx="1">
+            <a:schemeClr val="accent1"/>
+          </a:lnRef>
+          <a:fillRef idx="3">
+            <a:schemeClr val="accent1"/>
+          </a:fillRef>
+          <a:effectRef idx="2">
+            <a:schemeClr val="accent1"/>
+          </a:effectRef>
+          <a:fontRef idx="minor">
+            <a:schemeClr val="lt1"/>
+          </a:fontRef>
+        </p:style>
+        <p:txBody>
+          <a:bodyPr rtlCol="0" anchor="ctr" wrap="square" lIns="45720" rIns="45720" tIns="18000" bIns="18000"/>
+          <a:lstStyle/>
+          <a:p>
+            <a:pPr algn="ctr"/>
+            <a:r>
+              <a:rPr sz="950" b="1">
+                <a:solidFill>
+                  <a:srgbClr val="FFFFFF"/>
+                </a:solidFill>
+                <a:latin typeface="Calibri"/>
+              </a:rPr>
+              <a:t>Teacher
+Grades</a:t>
+            </a:r>
+          </a:p>
+        </p:txBody>
+      </p:sp>
+      <p:cxnSp>
+        <p:nvCxnSpPr>
+          <p:cNvPr id="15" name="Connector 14"/>
+          <p:cNvCxnSpPr/>
+          <p:nvPr/>
+        </p:nvCxnSpPr>
+        <p:spPr>
+          <a:xfrm>
+            <a:off x="7467825" y="3192320"/>
+            <a:ext cx="70000" cy="0"/>
+          </a:xfrm>
+          <a:prstGeom prst="line">
+            <a:avLst/>
+          </a:prstGeom>
+          <a:ln w="19050">
+            <a:solidFill>
+              <a:srgbClr val="5A4A1E"/>
+            </a:solidFill>
+            <a:tailEnd type="triangle" w="med" len="med"/>
+          </a:ln>
+        </p:spPr>
+        <p:style>
+          <a:lnRef idx="2">
+            <a:schemeClr val="accent1"/>
+          </a:lnRef>
+          <a:fillRef idx="0">
+            <a:schemeClr val="accent1"/>
+          </a:fillRef>
+          <a:effectRef idx="1">
+            <a:schemeClr val="accent1"/>
+          </a:effectRef>
+          <a:fontRef idx="minor">
+            <a:schemeClr val="tx1"/>
+          </a:fontRef>
+        </p:style>
+      </p:cxnSp>
+      <p:sp>
+        <p:nvSpPr>
+          <p:cNvPr id="16" name="Rounded Rectangle 15"/>
+          <p:cNvSpPr/>
+          <p:nvPr/>
+        </p:nvSpPr>
+        <p:spPr>
+          <a:xfrm>
+            <a:off x="7537825" y="2367320"/>
+            <a:ext cx="1336981" cy="1650000"/>
+          </a:xfrm>
+          <a:prstGeom prst="roundRect">
+            <a:avLst/>
+          </a:prstGeom>
+          <a:solidFill>
+            <a:srgbClr val="0F2442"/>
+          </a:solidFill>
+          <a:ln>
+            <a:noFill/>
+          </a:ln>
+          <a:effectLst/>
+        </p:spPr>
+        <p:style>
+          <a:lnRef idx="1">
+            <a:schemeClr val="accent1"/>
+          </a:lnRef>
+          <a:fillRef idx="3">
+            <a:schemeClr val="accent1"/>
+          </a:fillRef>
+          <a:effectRef idx="2">
+            <a:schemeClr val="accent1"/>
+          </a:effectRef>
+          <a:fontRef idx="minor">
+            <a:schemeClr val="lt1"/>
+          </a:fontRef>
+        </p:style>
+        <p:txBody>
+          <a:bodyPr rtlCol="0" anchor="ctr" wrap="square" lIns="45720" rIns="45720" tIns="18000" bIns="18000"/>
+          <a:lstStyle/>
+          <a:p>
+            <a:pPr algn="ctr"/>
+            <a:r>
+              <a:rPr sz="950" b="1">
+                <a:solidFill>
+                  <a:srgbClr val="FFFFFF"/>
+                </a:solidFill>
+                <a:latin typeface="Calibri"/>
+              </a:rPr>
+              <a:t>Admin Approves
+Results</a:t>
+            </a:r>
+          </a:p>
+        </p:txBody>
+      </p:sp>
+      <p:cxnSp>
+        <p:nvCxnSpPr>
+          <p:cNvPr id="17" name="Connector 16"/>
+          <p:cNvCxnSpPr/>
+          <p:nvPr/>
+        </p:nvCxnSpPr>
+        <p:spPr>
+          <a:xfrm>
+            <a:off x="8874806" y="3192320"/>
+            <a:ext cx="70000" cy="0"/>
+          </a:xfrm>
+          <a:prstGeom prst="line">
+            <a:avLst/>
+          </a:prstGeom>
+          <a:ln w="19050">
+            <a:solidFill>
+              <a:srgbClr val="5A4A1E"/>
+            </a:solidFill>
+            <a:tailEnd type="triangle" w="med" len="med"/>
+          </a:ln>
+        </p:spPr>
+        <p:style>
+          <a:lnRef idx="2">
+            <a:schemeClr val="accent1"/>
+          </a:lnRef>
+          <a:fillRef idx="0">
+            <a:schemeClr val="accent1"/>
+          </a:fillRef>
+          <a:effectRef idx="1">
+            <a:schemeClr val="accent1"/>
+          </a:effectRef>
+          <a:fontRef idx="minor">
+            <a:schemeClr val="tx1"/>
+          </a:fontRef>
+        </p:style>
+      </p:cxnSp>
+      <p:sp>
+        <p:nvSpPr>
+          <p:cNvPr id="18" name="Rounded Rectangle 17"/>
+          <p:cNvSpPr/>
+          <p:nvPr/>
+        </p:nvSpPr>
+        <p:spPr>
+          <a:xfrm>
+            <a:off x="8944806" y="2367320"/>
+            <a:ext cx="1336981" cy="1650000"/>
+          </a:xfrm>
+          <a:prstGeom prst="roundRect">
+            <a:avLst/>
+          </a:prstGeom>
+          <a:solidFill>
+            <a:srgbClr val="5A4A1E"/>
+          </a:solidFill>
+          <a:ln>
+            <a:noFill/>
+          </a:ln>
+          <a:effectLst/>
+        </p:spPr>
+        <p:style>
+          <a:lnRef idx="1">
+            <a:schemeClr val="accent1"/>
+          </a:lnRef>
+          <a:fillRef idx="3">
+            <a:schemeClr val="accent1"/>
+          </a:fillRef>
+          <a:effectRef idx="2">
+            <a:schemeClr val="accent1"/>
+          </a:effectRef>
+          <a:fontRef idx="minor">
+            <a:schemeClr val="lt1"/>
+          </a:fontRef>
+        </p:style>
+        <p:txBody>
+          <a:bodyPr rtlCol="0" anchor="ctr" wrap="square" lIns="45720" rIns="45720" tIns="18000" bIns="18000"/>
+          <a:lstStyle/>
+          <a:p>
+            <a:pPr algn="ctr"/>
+            <a:r>
+              <a:rPr sz="950" b="1">
+                <a:solidFill>
+                  <a:srgbClr val="FFFFFF"/>
+                </a:solidFill>
+                <a:latin typeface="Calibri"/>
+              </a:rPr>
+              <a:t>Student Views
+Results</a:t>
+            </a:r>
+          </a:p>
+        </p:txBody>
+      </p:sp>
+      <p:cxnSp>
+        <p:nvCxnSpPr>
+          <p:cNvPr id="19" name="Connector 18"/>
+          <p:cNvCxnSpPr/>
+          <p:nvPr/>
+        </p:nvCxnSpPr>
+        <p:spPr>
+          <a:xfrm>
+            <a:off x="10281787" y="3192320"/>
+            <a:ext cx="70000" cy="0"/>
+          </a:xfrm>
+          <a:prstGeom prst="line">
+            <a:avLst/>
+          </a:prstGeom>
+          <a:ln w="19050">
+            <a:solidFill>
+              <a:srgbClr val="5A4A1E"/>
+            </a:solidFill>
+            <a:tailEnd type="triangle" w="med" len="med"/>
+          </a:ln>
+        </p:spPr>
+        <p:style>
+          <a:lnRef idx="2">
+            <a:schemeClr val="accent1"/>
+          </a:lnRef>
+          <a:fillRef idx="0">
+            <a:schemeClr val="accent1"/>
+          </a:fillRef>
+          <a:effectRef idx="1">
+            <a:schemeClr val="accent1"/>
+          </a:effectRef>
+          <a:fontRef idx="minor">
+            <a:schemeClr val="tx1"/>
+          </a:fontRef>
+        </p:style>
+      </p:cxnSp>
+      <p:sp>
+        <p:nvSpPr>
+          <p:cNvPr id="20" name="Rounded Rectangle 19"/>
+          <p:cNvSpPr/>
+          <p:nvPr/>
+        </p:nvSpPr>
+        <p:spPr>
+          <a:xfrm>
+            <a:off x="10351787" y="2367320"/>
+            <a:ext cx="1336981" cy="1650000"/>
+          </a:xfrm>
+          <a:prstGeom prst="roundRect">
+            <a:avLst/>
+          </a:prstGeom>
+          <a:solidFill>
+            <a:srgbClr val="D8CEA8"/>
+          </a:solidFill>
+          <a:ln>
+            <a:noFill/>
+          </a:ln>
+          <a:effectLst/>
+        </p:spPr>
+        <p:style>
+          <a:lnRef idx="1">
+            <a:schemeClr val="accent1"/>
+          </a:lnRef>
+          <a:fillRef idx="3">
+            <a:schemeClr val="accent1"/>
+          </a:fillRef>
+          <a:effectRef idx="2">
+            <a:schemeClr val="accent1"/>
+          </a:effectRef>
+          <a:fontRef idx="minor">
+            <a:schemeClr val="lt1"/>
+          </a:fontRef>
+        </p:style>
+        <p:txBody>
+          <a:bodyPr rtlCol="0" anchor="ctr" wrap="square" lIns="45720" rIns="45720" tIns="18000" bIns="18000"/>
+          <a:lstStyle/>
+          <a:p>
+            <a:pPr algn="ctr"/>
+            <a:r>
+              <a:rPr sz="950" b="1">
+                <a:solidFill>
+                  <a:srgbClr val="0F2442"/>
+                </a:solidFill>
+                <a:latin typeface="Calibri"/>
+              </a:rPr>
+              <a:t>Parent Receives
+Notification</a:t>
+            </a:r>
+          </a:p>
+        </p:txBody>
+      </p:sp>
+      <p:sp>
+        <p:nvSpPr>
+          <p:cNvPr id="21" name="Oval 20"/>
+          <p:cNvSpPr/>
+          <p:nvPr/>
+        </p:nvSpPr>
+        <p:spPr>
+          <a:xfrm>
+            <a:off x="3095847" y="4337320"/>
+            <a:ext cx="180000" cy="180000"/>
+          </a:xfrm>
+          <a:prstGeom prst="ellipse">
+            <a:avLst/>
+          </a:prstGeom>
+          <a:solidFill>
+            <a:srgbClr val="0F2442"/>
+          </a:solidFill>
+          <a:ln>
+            <a:noFill/>
+          </a:ln>
+          <a:effectLst/>
+        </p:spPr>
+        <p:style>
+          <a:lnRef idx="1">
+            <a:schemeClr val="accent1"/>
+          </a:lnRef>
+          <a:fillRef idx="3">
+            <a:schemeClr val="accent1"/>
+          </a:fillRef>
+          <a:effectRef idx="2">
+            <a:schemeClr val="accent1"/>
+          </a:effectRef>
+          <a:fontRef idx="minor">
+            <a:schemeClr val="lt1"/>
+          </a:fontRef>
+        </p:style>
+        <p:txBody>
+          <a:bodyPr rtlCol="0" anchor="ctr"/>
+          <a:lstStyle/>
+          <a:p>
+            <a:pPr algn="ctr"/>
+          </a:p>
+        </p:txBody>
+      </p:sp>
+      <p:sp>
+        <p:nvSpPr>
+          <p:cNvPr id="22" name="TextBox 21"/>
+          <p:cNvSpPr txBox="1"/>
+          <p:nvPr/>
+        </p:nvSpPr>
+        <p:spPr>
+          <a:xfrm>
+            <a:off x="3321567" y="4292320"/>
+            <a:ext cx="1320000" cy="270000"/>
+          </a:xfrm>
+          <a:prstGeom prst="rect">
+            <a:avLst/>
+          </a:prstGeom>
+          <a:noFill/>
+        </p:spPr>
+        <p:txBody>
+          <a:bodyPr wrap="square" anchor="ctr" lIns="0" rIns="0" tIns="0" bIns="0">
+            <a:spAutoFit/>
+          </a:bodyPr>
+          <a:lstStyle/>
+          <a:p>
+            <a:pPr algn="l"/>
+            <a:r>
+              <a:rPr sz="950" b="1">
+                <a:solidFill>
+                  <a:srgbClr val="333333"/>
+                </a:solidFill>
+                <a:latin typeface="Calibri"/>
+              </a:rPr>
+              <a:t>Admin</a:t>
+            </a:r>
+          </a:p>
+        </p:txBody>
+      </p:sp>
+      <p:sp>
+        <p:nvSpPr>
+          <p:cNvPr id="23" name="Oval 22"/>
+          <p:cNvSpPr/>
+          <p:nvPr/>
+        </p:nvSpPr>
+        <p:spPr>
+          <a:xfrm>
+            <a:off x="4595847" y="4337320"/>
+            <a:ext cx="180000" cy="180000"/>
+          </a:xfrm>
+          <a:prstGeom prst="ellipse">
+            <a:avLst/>
+          </a:prstGeom>
+          <a:solidFill>
+            <a:srgbClr val="0E7C86"/>
+          </a:solidFill>
+          <a:ln>
+            <a:noFill/>
+          </a:ln>
+          <a:effectLst/>
+        </p:spPr>
+        <p:style>
+          <a:lnRef idx="1">
+            <a:schemeClr val="accent1"/>
+          </a:lnRef>
+          <a:fillRef idx="3">
+            <a:schemeClr val="accent1"/>
+          </a:fillRef>
+          <a:effectRef idx="2">
+            <a:schemeClr val="accent1"/>
+          </a:effectRef>
+          <a:fontRef idx="minor">
+            <a:schemeClr val="lt1"/>
+          </a:fontRef>
+        </p:style>
+        <p:txBody>
+          <a:bodyPr rtlCol="0" anchor="ctr"/>
+          <a:lstStyle/>
+          <a:p>
+            <a:pPr algn="ctr"/>
+          </a:p>
+        </p:txBody>
+      </p:sp>
+      <p:sp>
+        <p:nvSpPr>
+          <p:cNvPr id="24" name="TextBox 23"/>
+          <p:cNvSpPr txBox="1"/>
+          <p:nvPr/>
+        </p:nvSpPr>
+        <p:spPr>
+          <a:xfrm>
+            <a:off x="4821567" y="4292320"/>
+            <a:ext cx="1320000" cy="270000"/>
+          </a:xfrm>
+          <a:prstGeom prst="rect">
+            <a:avLst/>
+          </a:prstGeom>
+          <a:noFill/>
+        </p:spPr>
+        <p:txBody>
+          <a:bodyPr wrap="square" anchor="ctr" lIns="0" rIns="0" tIns="0" bIns="0">
+            <a:spAutoFit/>
+          </a:bodyPr>
+          <a:lstStyle/>
+          <a:p>
+            <a:pPr algn="l"/>
+            <a:r>
+              <a:rPr sz="950" b="1">
+                <a:solidFill>
+                  <a:srgbClr val="333333"/>
+                </a:solidFill>
+                <a:latin typeface="Calibri"/>
+              </a:rPr>
+              <a:t>Teacher</a:t>
+            </a:r>
+          </a:p>
+        </p:txBody>
+      </p:sp>
+      <p:sp>
+        <p:nvSpPr>
+          <p:cNvPr id="25" name="Oval 24"/>
+          <p:cNvSpPr/>
+          <p:nvPr/>
+        </p:nvSpPr>
+        <p:spPr>
+          <a:xfrm>
+            <a:off x="6095847" y="4337320"/>
+            <a:ext cx="180000" cy="180000"/>
+          </a:xfrm>
+          <a:prstGeom prst="ellipse">
+            <a:avLst/>
+          </a:prstGeom>
+          <a:solidFill>
+            <a:srgbClr val="5A4A1E"/>
+          </a:solidFill>
+          <a:ln>
+            <a:noFill/>
+          </a:ln>
+          <a:effectLst/>
+        </p:spPr>
+        <p:style>
+          <a:lnRef idx="1">
+            <a:schemeClr val="accent1"/>
+          </a:lnRef>
+          <a:fillRef idx="3">
+            <a:schemeClr val="accent1"/>
+          </a:fillRef>
+          <a:effectRef idx="2">
+            <a:schemeClr val="accent1"/>
+          </a:effectRef>
+          <a:fontRef idx="minor">
+            <a:schemeClr val="lt1"/>
+          </a:fontRef>
+        </p:style>
+        <p:txBody>
+          <a:bodyPr rtlCol="0" anchor="ctr"/>
+          <a:lstStyle/>
+          <a:p>
+            <a:pPr algn="ctr"/>
+          </a:p>
+        </p:txBody>
+      </p:sp>
+      <p:sp>
+        <p:nvSpPr>
+          <p:cNvPr id="26" name="TextBox 25"/>
+          <p:cNvSpPr txBox="1"/>
+          <p:nvPr/>
+        </p:nvSpPr>
+        <p:spPr>
+          <a:xfrm>
+            <a:off x="6321567" y="4292320"/>
+            <a:ext cx="1320000" cy="270000"/>
+          </a:xfrm>
+          <a:prstGeom prst="rect">
+            <a:avLst/>
+          </a:prstGeom>
+          <a:noFill/>
+        </p:spPr>
+        <p:txBody>
+          <a:bodyPr wrap="square" anchor="ctr" lIns="0" rIns="0" tIns="0" bIns="0">
+            <a:spAutoFit/>
+          </a:bodyPr>
+          <a:lstStyle/>
+          <a:p>
+            <a:pPr algn="l"/>
+            <a:r>
+              <a:rPr sz="950" b="1">
+                <a:solidFill>
+                  <a:srgbClr val="333333"/>
+                </a:solidFill>
+                <a:latin typeface="Calibri"/>
+              </a:rPr>
+              <a:t>Student</a:t>
+            </a:r>
+          </a:p>
+        </p:txBody>
+      </p:sp>
+      <p:sp>
+        <p:nvSpPr>
+          <p:cNvPr id="27" name="Oval 26"/>
+          <p:cNvSpPr/>
+          <p:nvPr/>
+        </p:nvSpPr>
+        <p:spPr>
+          <a:xfrm>
+            <a:off x="7595847" y="4337320"/>
+            <a:ext cx="180000" cy="180000"/>
+          </a:xfrm>
+          <a:prstGeom prst="ellipse">
+            <a:avLst/>
+          </a:prstGeom>
+          <a:solidFill>
+            <a:srgbClr val="D8CEA8"/>
+          </a:solidFill>
+          <a:ln>
+            <a:noFill/>
+          </a:ln>
+          <a:effectLst/>
+        </p:spPr>
+        <p:style>
+          <a:lnRef idx="1">
+            <a:schemeClr val="accent1"/>
+          </a:lnRef>
+          <a:fillRef idx="3">
+            <a:schemeClr val="accent1"/>
+          </a:fillRef>
+          <a:effectRef idx="2">
+            <a:schemeClr val="accent1"/>
+          </a:effectRef>
+          <a:fontRef idx="minor">
+            <a:schemeClr val="lt1"/>
+          </a:fontRef>
+        </p:style>
+        <p:txBody>
+          <a:bodyPr rtlCol="0" anchor="ctr"/>
+          <a:lstStyle/>
+          <a:p>
+            <a:pPr algn="ctr"/>
+          </a:p>
+        </p:txBody>
+      </p:sp>
+      <p:sp>
+        <p:nvSpPr>
+          <p:cNvPr id="28" name="TextBox 27"/>
+          <p:cNvSpPr txBox="1"/>
+          <p:nvPr/>
+        </p:nvSpPr>
+        <p:spPr>
+          <a:xfrm>
+            <a:off x="7821567" y="4292320"/>
+            <a:ext cx="1320000" cy="270000"/>
+          </a:xfrm>
+          <a:prstGeom prst="rect">
+            <a:avLst/>
+          </a:prstGeom>
+          <a:noFill/>
+        </p:spPr>
+        <p:txBody>
+          <a:bodyPr wrap="square" anchor="ctr" lIns="0" rIns="0" tIns="0" bIns="0">
+            <a:spAutoFit/>
+          </a:bodyPr>
+          <a:lstStyle/>
+          <a:p>
+            <a:pPr algn="l"/>
+            <a:r>
+              <a:rPr sz="950" b="1">
+                <a:solidFill>
+                  <a:srgbClr val="333333"/>
+                </a:solidFill>
+                <a:latin typeface="Calibri"/>
+              </a:rPr>
+              <a:t>Parent</a:t>
             </a:r>
           </a:p>
         </p:txBody>
@@ -6687,7 +8053,7 @@
               </a:defRPr>
             </a:pPr>
             <a:r>
-              <a:t>Teacher Portal</a:t>
+              <a:t>Admin Portal</a:t>
             </a:r>
           </a:p>
         </p:txBody>
@@ -6725,7 +8091,7 @@
               </a:defRPr>
             </a:pPr>
             <a:r>
-              <a:t>•  Dashboard: assigned classes and pending-grading summary</a:t>
+              <a:t>•  Dashboard: system-wide summary — user counts, pending approvals, health status</a:t>
             </a:r>
           </a:p>
           <a:p>
@@ -6740,7 +8106,7 @@
               </a:defRPr>
             </a:pPr>
             <a:r>
-              <a:t>•  Profile: full Teaching History across all semesters (not just the current one)</a:t>
+              <a:t>•  User Management: create, edit, deactivate Students/Teachers/Parents/Admins</a:t>
             </a:r>
           </a:p>
           <a:p>
@@ -6755,7 +8121,7 @@
               </a:defRPr>
             </a:pPr>
             <a:r>
-              <a:t>•  Timetable: own class schedule, with a Request Change action (room/time)</a:t>
+              <a:t>•  Academic Setup: manage Departments, Courses, Rooms, Semesters (reference/catalog data)</a:t>
             </a:r>
           </a:p>
           <a:p>
@@ -6770,7 +8136,7 @@
               </a:defRPr>
             </a:pPr>
             <a:r>
-              <a:t>•  Attendance Marker: mark present/absent per class session</a:t>
+              <a:t>•  Timetable: create class sessions with conflict detection; approve/reject Teacher change requests</a:t>
             </a:r>
           </a:p>
           <a:p>
@@ -6785,7 +8151,7 @@
               </a:defRPr>
             </a:pPr>
             <a:r>
-              <a:t>•  Exam Builder: author exams — title, type, time limit, questions across four types</a:t>
+              <a:t>•  Result Approval: review and approve/reject submitted results before publication</a:t>
             </a:r>
           </a:p>
           <a:p>
@@ -6800,7 +8166,7 @@
               </a:defRPr>
             </a:pPr>
             <a:r>
-              <a:t>•  Exam List: manage exam status lifecycle — draft → scheduled → open → closed → published</a:t>
+              <a:t>•  Fee Dashboard: define fee structures, record payments, view balances</a:t>
             </a:r>
           </a:p>
           <a:p>
@@ -6815,7 +8181,7 @@
               </a:defRPr>
             </a:pPr>
             <a:r>
-              <a:t>•  Grading Interface: award marks and feedback per question for submitted answers</a:t>
+              <a:t>•  Reports: generate attendance, result, and fee reports, filterable by department/semester/student</a:t>
             </a:r>
           </a:p>
           <a:p>
@@ -6830,7 +8196,7 @@
               </a:defRPr>
             </a:pPr>
             <a:r>
-              <a:t>•  Results: view own course-level results before Admin approval</a:t>
+              <a:t>•  Notifications: system-wide audit trail of key events</a:t>
             </a:r>
           </a:p>
         </p:txBody>
@@ -6887,83 +8253,261 @@
                 </a:solidFill>
               </a:defRPr>
             </a:pPr>
-            <a:r>
-              <a:t>📷  Recommended Screenshot</a:t>
-            </a:r>
-          </a:p>
-          <a:p>
-            <a:pPr>
-              <a:spcAft>
-                <a:spcPts val="200"/>
-              </a:spcAft>
-              <a:defRPr sz="1250">
-                <a:solidFill>
-                  <a:srgbClr val="5A4A1E"/>
-                </a:solidFill>
-              </a:defRPr>
-            </a:pPr>
-            <a:r>
-              <a:t>Exam Builder mid-authoring (a question with options being added) and the Grading Interface with a submitted answer.</a:t>
-            </a:r>
-          </a:p>
-          <a:p>
-            <a:pPr>
-              <a:spcBef>
-                <a:spcPts val="1400"/>
-              </a:spcBef>
-              <a:defRPr b="1" sz="1300">
+          </a:p>
+        </p:txBody>
+      </p:sp>
+      <p:pic>
+        <p:nvPicPr>
+          <p:cNvPr id="7" name="Picture 6" descr="02_Admin_Dashboard.jpg"/>
+          <p:cNvPicPr>
+            <a:picLocks noChangeAspect="1"/>
+          </p:cNvPicPr>
+          <p:nvPr/>
+        </p:nvPicPr>
+        <p:blipFill>
+          <a:blip r:embed="rId3"/>
+          <a:stretch>
+            <a:fillRect/>
+          </a:stretch>
+        </p:blipFill>
+        <p:spPr>
+          <a:xfrm>
+            <a:off x="7612360" y="2216582"/>
+            <a:ext cx="1905980" cy="698636"/>
+          </a:xfrm>
+          <a:prstGeom prst="rect">
+            <a:avLst/>
+          </a:prstGeom>
+          <a:ln w="9525">
+            <a:solidFill>
+              <a:srgbClr val="D8CEA8"/>
+            </a:solidFill>
+          </a:ln>
+        </p:spPr>
+      </p:pic>
+      <p:sp>
+        <p:nvSpPr>
+          <p:cNvPr id="8" name="TextBox 7"/>
+          <p:cNvSpPr txBox="1"/>
+          <p:nvPr/>
+        </p:nvSpPr>
+        <p:spPr>
+          <a:xfrm>
+            <a:off x="7612360" y="3590480"/>
+            <a:ext cx="1905980" cy="210000"/>
+          </a:xfrm>
+          <a:prstGeom prst="rect">
+            <a:avLst/>
+          </a:prstGeom>
+          <a:noFill/>
+        </p:spPr>
+        <p:txBody>
+          <a:bodyPr wrap="square" lIns="0" rIns="0" tIns="0" bIns="0">
+            <a:spAutoFit/>
+          </a:bodyPr>
+          <a:lstStyle/>
+          <a:p>
+            <a:pPr algn="ctr"/>
+            <a:r>
+              <a:rPr sz="900" b="1" i="0">
                 <a:solidFill>
                   <a:srgbClr val="0E7C86"/>
                 </a:solidFill>
-              </a:defRPr>
-            </a:pPr>
-            <a:r>
-              <a:t>🗺  Diagram Suggestion</a:t>
-            </a:r>
-          </a:p>
-          <a:p>
-            <a:pPr>
-              <a:spcAft>
-                <a:spcPts val="200"/>
-              </a:spcAft>
-              <a:defRPr sz="1250">
-                <a:solidFill>
-                  <a:srgbClr val="5A4A1E"/>
-                </a:solidFill>
-              </a:defRPr>
-            </a:pPr>
-            <a:r>
-              <a:t>None — use real product screenshots for this and the following role slides; diagrams are better reserved for architecture slides.</a:t>
-            </a:r>
-          </a:p>
-          <a:p>
-            <a:pPr>
-              <a:spcBef>
-                <a:spcPts val="1400"/>
-              </a:spcBef>
-              <a:defRPr b="1" sz="1300">
+                <a:latin typeface="Calibri"/>
+              </a:rPr>
+              <a:t>Admin Dashboard Screenshot</a:t>
+            </a:r>
+          </a:p>
+        </p:txBody>
+      </p:sp>
+      <p:pic>
+        <p:nvPicPr>
+          <p:cNvPr id="9" name="Picture 8" descr="06_Admin_Courses.jpg"/>
+          <p:cNvPicPr>
+            <a:picLocks noChangeAspect="1"/>
+          </p:cNvPicPr>
+          <p:nvPr/>
+        </p:nvPicPr>
+        <p:blipFill>
+          <a:blip r:embed="rId4"/>
+          <a:stretch>
+            <a:fillRect/>
+          </a:stretch>
+        </p:blipFill>
+        <p:spPr>
+          <a:xfrm>
+            <a:off x="9638340" y="2245257"/>
+            <a:ext cx="1905980" cy="641285"/>
+          </a:xfrm>
+          <a:prstGeom prst="rect">
+            <a:avLst/>
+          </a:prstGeom>
+          <a:ln w="9525">
+            <a:solidFill>
+              <a:srgbClr val="D8CEA8"/>
+            </a:solidFill>
+          </a:ln>
+        </p:spPr>
+      </p:pic>
+      <p:sp>
+        <p:nvSpPr>
+          <p:cNvPr id="10" name="TextBox 9"/>
+          <p:cNvSpPr txBox="1"/>
+          <p:nvPr/>
+        </p:nvSpPr>
+        <p:spPr>
+          <a:xfrm>
+            <a:off x="9638340" y="3590480"/>
+            <a:ext cx="1905980" cy="210000"/>
+          </a:xfrm>
+          <a:prstGeom prst="rect">
+            <a:avLst/>
+          </a:prstGeom>
+          <a:noFill/>
+        </p:spPr>
+        <p:txBody>
+          <a:bodyPr wrap="square" lIns="0" rIns="0" tIns="0" bIns="0">
+            <a:spAutoFit/>
+          </a:bodyPr>
+          <a:lstStyle/>
+          <a:p>
+            <a:pPr algn="ctr"/>
+            <a:r>
+              <a:rPr sz="900" b="1" i="0">
                 <a:solidFill>
                   <a:srgbClr val="0E7C86"/>
                 </a:solidFill>
-              </a:defRPr>
-            </a:pPr>
-            <a:r>
-              <a:t>✨  Animation</a:t>
-            </a:r>
-          </a:p>
-          <a:p>
-            <a:pPr>
-              <a:spcAft>
-                <a:spcPts val="200"/>
-              </a:spcAft>
-              <a:defRPr sz="1250">
-                <a:solidFill>
-                  <a:srgbClr val="5A4A1E"/>
-                </a:solidFill>
-              </a:defRPr>
-            </a:pPr>
-            <a:r>
-              <a:t>Appear on click, one feature bullet at a time, so each can be narrated against the matching screenshot if presenting live.</a:t>
+                <a:latin typeface="Calibri"/>
+              </a:rPr>
+              <a:t>Course Management Screenshot</a:t>
+            </a:r>
+          </a:p>
+        </p:txBody>
+      </p:sp>
+      <p:pic>
+        <p:nvPicPr>
+          <p:cNvPr id="11" name="Picture 10" descr="11_Admin_Result_Approval.jpg"/>
+          <p:cNvPicPr>
+            <a:picLocks noChangeAspect="1"/>
+          </p:cNvPicPr>
+          <p:nvPr/>
+        </p:nvPicPr>
+        <p:blipFill>
+          <a:blip r:embed="rId5"/>
+          <a:stretch>
+            <a:fillRect/>
+          </a:stretch>
+        </p:blipFill>
+        <p:spPr>
+          <a:xfrm>
+            <a:off x="7612360" y="4699877"/>
+            <a:ext cx="1905980" cy="378366"/>
+          </a:xfrm>
+          <a:prstGeom prst="rect">
+            <a:avLst/>
+          </a:prstGeom>
+          <a:ln w="9525">
+            <a:solidFill>
+              <a:srgbClr val="D8CEA8"/>
+            </a:solidFill>
+          </a:ln>
+        </p:spPr>
+      </p:pic>
+      <p:sp>
+        <p:nvSpPr>
+          <p:cNvPr id="12" name="TextBox 11"/>
+          <p:cNvSpPr txBox="1"/>
+          <p:nvPr/>
+        </p:nvSpPr>
+        <p:spPr>
+          <a:xfrm>
+            <a:off x="7612360" y="5913640"/>
+            <a:ext cx="1905980" cy="210000"/>
+          </a:xfrm>
+          <a:prstGeom prst="rect">
+            <a:avLst/>
+          </a:prstGeom>
+          <a:noFill/>
+        </p:spPr>
+        <p:txBody>
+          <a:bodyPr wrap="square" lIns="0" rIns="0" tIns="0" bIns="0">
+            <a:spAutoFit/>
+          </a:bodyPr>
+          <a:lstStyle/>
+          <a:p>
+            <a:pPr algn="ctr"/>
+            <a:r>
+              <a:rPr sz="900" b="1" i="0">
+                <a:solidFill>
+                  <a:srgbClr val="0E7C86"/>
+                </a:solidFill>
+                <a:latin typeface="Calibri"/>
+              </a:rPr>
+              <a:t>Result Approval Workflow</a:t>
+            </a:r>
+          </a:p>
+        </p:txBody>
+      </p:sp>
+      <p:pic>
+        <p:nvPicPr>
+          <p:cNvPr id="13" name="Picture 12" descr="12_Admin_Fee_Dashboard.jpg"/>
+          <p:cNvPicPr>
+            <a:picLocks noChangeAspect="1"/>
+          </p:cNvPicPr>
+          <p:nvPr/>
+        </p:nvPicPr>
+        <p:blipFill>
+          <a:blip r:embed="rId6"/>
+          <a:stretch>
+            <a:fillRect/>
+          </a:stretch>
+        </p:blipFill>
+        <p:spPr>
+          <a:xfrm>
+            <a:off x="9638340" y="4415730"/>
+            <a:ext cx="1905980" cy="946659"/>
+          </a:xfrm>
+          <a:prstGeom prst="rect">
+            <a:avLst/>
+          </a:prstGeom>
+          <a:ln w="9525">
+            <a:solidFill>
+              <a:srgbClr val="D8CEA8"/>
+            </a:solidFill>
+          </a:ln>
+        </p:spPr>
+      </p:pic>
+      <p:sp>
+        <p:nvSpPr>
+          <p:cNvPr id="14" name="TextBox 13"/>
+          <p:cNvSpPr txBox="1"/>
+          <p:nvPr/>
+        </p:nvSpPr>
+        <p:spPr>
+          <a:xfrm>
+            <a:off x="9638340" y="5913640"/>
+            <a:ext cx="1905980" cy="210000"/>
+          </a:xfrm>
+          <a:prstGeom prst="rect">
+            <a:avLst/>
+          </a:prstGeom>
+          <a:noFill/>
+        </p:spPr>
+        <p:txBody>
+          <a:bodyPr wrap="square" lIns="0" rIns="0" tIns="0" bIns="0">
+            <a:spAutoFit/>
+          </a:bodyPr>
+          <a:lstStyle/>
+          <a:p>
+            <a:pPr algn="ctr"/>
+            <a:r>
+              <a:rPr sz="900" b="1" i="0">
+                <a:solidFill>
+                  <a:srgbClr val="0E7C86"/>
+                </a:solidFill>
+                <a:latin typeface="Calibri"/>
+              </a:rPr>
+              <a:t>Fee Management Screenshot</a:t>
             </a:r>
           </a:p>
         </p:txBody>
@@ -7110,7 +8654,7 @@
               </a:defRPr>
             </a:pPr>
             <a:r>
-              <a:t>Student Portal</a:t>
+              <a:t>Teacher Portal</a:t>
             </a:r>
           </a:p>
         </p:txBody>
@@ -7148,7 +8692,7 @@
               </a:defRPr>
             </a:pPr>
             <a:r>
-              <a:t>•  Dashboard: attendance %, upcoming exams, and recent results at a glance</a:t>
+              <a:t>•  Dashboard: assigned classes and pending-grading summary</a:t>
             </a:r>
           </a:p>
           <a:p>
@@ -7163,7 +8707,7 @@
               </a:defRPr>
             </a:pPr>
             <a:r>
-              <a:t>•  Profile: academic history alongside profile data</a:t>
+              <a:t>•  Profile: full Teaching History across all semesters (not just the current one)</a:t>
             </a:r>
           </a:p>
           <a:p>
@@ -7178,7 +8722,7 @@
               </a:defRPr>
             </a:pPr>
             <a:r>
-              <a:t>•  Timetable: class schedule, table or calendar view</a:t>
+              <a:t>•  Timetable: own class schedule, with a Request Change action (room/time)</a:t>
             </a:r>
           </a:p>
           <a:p>
@@ -7193,7 +8737,7 @@
               </a:defRPr>
             </a:pPr>
             <a:r>
-              <a:t>•  Attendance: table and calendar views of own attendance record</a:t>
+              <a:t>•  Attendance Marker: mark present/absent per class session</a:t>
             </a:r>
           </a:p>
           <a:p>
@@ -7208,7 +8752,7 @@
               </a:defRPr>
             </a:pPr>
             <a:r>
-              <a:t>•  Exams: list of available (non-draft) exams; live timed exam-taking interface</a:t>
+              <a:t>•  Exam Builder: author exams — title, type, time limit, questions across four types</a:t>
             </a:r>
           </a:p>
           <a:p>
@@ -7223,7 +8767,7 @@
               </a:defRPr>
             </a:pPr>
             <a:r>
-              <a:t>•  Results: published results with grade letters and per-semester GPA</a:t>
+              <a:t>•  Exam List: manage exam status lifecycle — draft → scheduled → open → closed → published</a:t>
             </a:r>
           </a:p>
           <a:p>
@@ -7238,7 +8782,22 @@
               </a:defRPr>
             </a:pPr>
             <a:r>
-              <a:t>•  Fee Centre: outstanding balance, invoice history, downloadable invoice/receipt PDF</a:t>
+              <a:t>•  Grading Interface: award marks and feedback per question for submitted answers</a:t>
+            </a:r>
+          </a:p>
+          <a:p>
+            <a:pPr>
+              <a:spcAft>
+                <a:spcPts val="1000"/>
+              </a:spcAft>
+              <a:defRPr sz="1700" b="0">
+                <a:solidFill>
+                  <a:srgbClr val="333333"/>
+                </a:solidFill>
+              </a:defRPr>
+            </a:pPr>
+            <a:r>
+              <a:t>•  Results: view own course-level results before Admin approval</a:t>
             </a:r>
           </a:p>
         </p:txBody>
@@ -7295,83 +8854,133 @@
                 </a:solidFill>
               </a:defRPr>
             </a:pPr>
-            <a:r>
-              <a:t>📷  Recommended Screenshot</a:t>
-            </a:r>
-          </a:p>
-          <a:p>
-            <a:pPr>
-              <a:spcAft>
-                <a:spcPts val="200"/>
-              </a:spcAft>
-              <a:defRPr sz="1250">
-                <a:solidFill>
-                  <a:srgbClr val="5A4A1E"/>
-                </a:solidFill>
-              </a:defRPr>
-            </a:pPr>
-            <a:r>
-              <a:t>Student Dashboard with all three summary widgets populated, and the Exam Room mid-attempt with the timer visible.</a:t>
-            </a:r>
-          </a:p>
-          <a:p>
-            <a:pPr>
-              <a:spcBef>
-                <a:spcPts val="1400"/>
-              </a:spcBef>
-              <a:defRPr b="1" sz="1300">
+          </a:p>
+        </p:txBody>
+      </p:sp>
+      <p:pic>
+        <p:nvPicPr>
+          <p:cNvPr id="7" name="Picture 6" descr="18_Teacher_Dashboard.jpg"/>
+          <p:cNvPicPr>
+            <a:picLocks noChangeAspect="1"/>
+          </p:cNvPicPr>
+          <p:nvPr/>
+        </p:nvPicPr>
+        <p:blipFill>
+          <a:blip r:embed="rId3"/>
+          <a:stretch>
+            <a:fillRect/>
+          </a:stretch>
+        </p:blipFill>
+        <p:spPr>
+          <a:xfrm>
+            <a:off x="7612360" y="2232670"/>
+            <a:ext cx="3931960" cy="671460"/>
+          </a:xfrm>
+          <a:prstGeom prst="rect">
+            <a:avLst/>
+          </a:prstGeom>
+          <a:ln w="9525">
+            <a:solidFill>
+              <a:srgbClr val="D8CEA8"/>
+            </a:solidFill>
+          </a:ln>
+        </p:spPr>
+      </p:pic>
+      <p:sp>
+        <p:nvSpPr>
+          <p:cNvPr id="8" name="TextBox 7"/>
+          <p:cNvSpPr txBox="1"/>
+          <p:nvPr/>
+        </p:nvSpPr>
+        <p:spPr>
+          <a:xfrm>
+            <a:off x="7612360" y="3595480"/>
+            <a:ext cx="3931960" cy="210000"/>
+          </a:xfrm>
+          <a:prstGeom prst="rect">
+            <a:avLst/>
+          </a:prstGeom>
+          <a:noFill/>
+        </p:spPr>
+        <p:txBody>
+          <a:bodyPr wrap="square" lIns="0" rIns="0" tIns="0" bIns="0">
+            <a:spAutoFit/>
+          </a:bodyPr>
+          <a:lstStyle/>
+          <a:p>
+            <a:pPr algn="ctr"/>
+            <a:r>
+              <a:rPr sz="900" b="1" i="0">
                 <a:solidFill>
                   <a:srgbClr val="0E7C86"/>
                 </a:solidFill>
-              </a:defRPr>
-            </a:pPr>
-            <a:r>
-              <a:t>🗺  Diagram Suggestion</a:t>
-            </a:r>
-          </a:p>
-          <a:p>
-            <a:pPr>
-              <a:spcAft>
-                <a:spcPts val="200"/>
-              </a:spcAft>
-              <a:defRPr sz="1250">
-                <a:solidFill>
-                  <a:srgbClr val="5A4A1E"/>
-                </a:solidFill>
-              </a:defRPr>
-            </a:pPr>
-            <a:r>
-              <a:t>None — real product screenshots.</a:t>
-            </a:r>
-          </a:p>
-          <a:p>
-            <a:pPr>
-              <a:spcBef>
-                <a:spcPts val="1400"/>
-              </a:spcBef>
-              <a:defRPr b="1" sz="1300">
+                <a:latin typeface="Calibri"/>
+              </a:rPr>
+              <a:t>Teacher Dashboard Screenshot</a:t>
+            </a:r>
+          </a:p>
+        </p:txBody>
+      </p:sp>
+      <p:pic>
+        <p:nvPicPr>
+          <p:cNvPr id="9" name="Picture 8" descr="23_Teacher_Exam_Builder.jpg"/>
+          <p:cNvPicPr>
+            <a:picLocks noChangeAspect="1"/>
+          </p:cNvPicPr>
+          <p:nvPr/>
+        </p:nvPicPr>
+        <p:blipFill>
+          <a:blip r:embed="rId4"/>
+          <a:stretch>
+            <a:fillRect/>
+          </a:stretch>
+        </p:blipFill>
+        <p:spPr>
+          <a:xfrm>
+            <a:off x="7612360" y="4109080"/>
+            <a:ext cx="3931960" cy="1554960"/>
+          </a:xfrm>
+          <a:prstGeom prst="rect">
+            <a:avLst/>
+          </a:prstGeom>
+          <a:ln w="9525">
+            <a:solidFill>
+              <a:srgbClr val="D8CEA8"/>
+            </a:solidFill>
+          </a:ln>
+        </p:spPr>
+      </p:pic>
+      <p:sp>
+        <p:nvSpPr>
+          <p:cNvPr id="10" name="TextBox 9"/>
+          <p:cNvSpPr txBox="1"/>
+          <p:nvPr/>
+        </p:nvSpPr>
+        <p:spPr>
+          <a:xfrm>
+            <a:off x="7612360" y="5913640"/>
+            <a:ext cx="3931960" cy="210000"/>
+          </a:xfrm>
+          <a:prstGeom prst="rect">
+            <a:avLst/>
+          </a:prstGeom>
+          <a:noFill/>
+        </p:spPr>
+        <p:txBody>
+          <a:bodyPr wrap="square" lIns="0" rIns="0" tIns="0" bIns="0">
+            <a:spAutoFit/>
+          </a:bodyPr>
+          <a:lstStyle/>
+          <a:p>
+            <a:pPr algn="ctr"/>
+            <a:r>
+              <a:rPr sz="900" b="1" i="0">
                 <a:solidFill>
                   <a:srgbClr val="0E7C86"/>
                 </a:solidFill>
-              </a:defRPr>
-            </a:pPr>
-            <a:r>
-              <a:t>✨  Animation</a:t>
-            </a:r>
-          </a:p>
-          <a:p>
-            <a:pPr>
-              <a:spcAft>
-                <a:spcPts val="200"/>
-              </a:spcAft>
-              <a:defRPr sz="1250">
-                <a:solidFill>
-                  <a:srgbClr val="5A4A1E"/>
-                </a:solidFill>
-              </a:defRPr>
-            </a:pPr>
-            <a:r>
-              <a:t>Appear on click, synced to whichever screenshot is being shown.</a:t>
+                <a:latin typeface="Calibri"/>
+              </a:rPr>
+              <a:t>Exam Builder Screenshot</a:t>
             </a:r>
           </a:p>
         </p:txBody>
@@ -7518,7 +9127,7 @@
               </a:defRPr>
             </a:pPr>
             <a:r>
-              <a:t>Parent Portal</a:t>
+              <a:t>Student Portal</a:t>
             </a:r>
           </a:p>
         </p:txBody>
@@ -7556,7 +9165,7 @@
               </a:defRPr>
             </a:pPr>
             <a:r>
-              <a:t>•  Linked-child selector — auto-selected when a Parent has exactly one linked child</a:t>
+              <a:t>•  Dashboard: attendance %, upcoming exams, and recent results at a glance</a:t>
             </a:r>
           </a:p>
           <a:p>
@@ -7571,7 +9180,7 @@
               </a:defRPr>
             </a:pPr>
             <a:r>
-              <a:t>•  Dashboard: Fee Status, Attendance %, and Upcoming Exams for the selected child</a:t>
+              <a:t>•  Profile: academic history alongside profile data</a:t>
             </a:r>
           </a:p>
           <a:p>
@@ -7586,7 +9195,7 @@
               </a:defRPr>
             </a:pPr>
             <a:r>
-              <a:t>•  Attendance: linked child's record with PDF/Excel/CSV export</a:t>
+              <a:t>•  Timetable: class schedule, table or calendar view</a:t>
             </a:r>
           </a:p>
           <a:p>
@@ -7601,7 +9210,7 @@
               </a:defRPr>
             </a:pPr>
             <a:r>
-              <a:t>•  Results: linked child's published results</a:t>
+              <a:t>•  Attendance: table and calendar views of own attendance record</a:t>
             </a:r>
           </a:p>
           <a:p>
@@ -7616,7 +9225,7 @@
               </a:defRPr>
             </a:pPr>
             <a:r>
-              <a:t>•  Fee Centre: linked child's balance and invoice history</a:t>
+              <a:t>•  Exams: list of available (non-draft) exams; live timed exam-taking interface</a:t>
             </a:r>
           </a:p>
           <a:p>
@@ -7631,7 +9240,7 @@
               </a:defRPr>
             </a:pPr>
             <a:r>
-              <a:t>•  Timetable: linked child's class schedule</a:t>
+              <a:t>•  Results: published results with grade letters and per-semester GPA</a:t>
             </a:r>
           </a:p>
           <a:p>
@@ -7646,22 +9255,7 @@
               </a:defRPr>
             </a:pPr>
             <a:r>
-              <a:t>•  New in v2.4.1 — Upcoming Exams widget: previously showed 'Not available'; now scoped to the linked child</a:t>
-            </a:r>
-          </a:p>
-          <a:p>
-            <a:pPr>
-              <a:spcAft>
-                <a:spcPts val="1000"/>
-              </a:spcAft>
-              <a:defRPr sz="1700" b="0">
-                <a:solidFill>
-                  <a:srgbClr val="333333"/>
-                </a:solidFill>
-              </a:defRPr>
-            </a:pPr>
-            <a:r>
-              <a:t>•  Every view is ownership-verified server-side against the parent_student_link table</a:t>
+              <a:t>•  Fee Centre: outstanding balance, invoice history, downloadable invoice/receipt PDF</a:t>
             </a:r>
           </a:p>
         </p:txBody>
@@ -7718,83 +9312,179 @@
                 </a:solidFill>
               </a:defRPr>
             </a:pPr>
-            <a:r>
-              <a:t>📷  Recommended Screenshot</a:t>
-            </a:r>
-          </a:p>
-          <a:p>
-            <a:pPr>
-              <a:spcAft>
-                <a:spcPts val="200"/>
-              </a:spcAft>
-              <a:defRPr sz="1250">
+          </a:p>
+        </p:txBody>
+      </p:sp>
+      <p:pic>
+        <p:nvPicPr>
+          <p:cNvPr id="7" name="Picture 6" descr="25_Student_Dashboard.jpg"/>
+          <p:cNvPicPr>
+            <a:picLocks noChangeAspect="1"/>
+          </p:cNvPicPr>
+          <p:nvPr/>
+        </p:nvPicPr>
+        <p:blipFill>
+          <a:blip r:embed="rId3"/>
+          <a:stretch>
+            <a:fillRect/>
+          </a:stretch>
+        </p:blipFill>
+        <p:spPr>
+          <a:xfrm>
+            <a:off x="7612360" y="2005264"/>
+            <a:ext cx="3931960" cy="1126271"/>
+          </a:xfrm>
+          <a:prstGeom prst="rect">
+            <a:avLst/>
+          </a:prstGeom>
+          <a:ln w="9525">
+            <a:solidFill>
+              <a:srgbClr val="D8CEA8"/>
+            </a:solidFill>
+          </a:ln>
+        </p:spPr>
+      </p:pic>
+      <p:sp>
+        <p:nvSpPr>
+          <p:cNvPr id="8" name="TextBox 7"/>
+          <p:cNvSpPr txBox="1"/>
+          <p:nvPr/>
+        </p:nvSpPr>
+        <p:spPr>
+          <a:xfrm>
+            <a:off x="7612360" y="3595480"/>
+            <a:ext cx="3931960" cy="210000"/>
+          </a:xfrm>
+          <a:prstGeom prst="rect">
+            <a:avLst/>
+          </a:prstGeom>
+          <a:noFill/>
+        </p:spPr>
+        <p:txBody>
+          <a:bodyPr wrap="square" lIns="0" rIns="0" tIns="0" bIns="0">
+            <a:spAutoFit/>
+          </a:bodyPr>
+          <a:lstStyle/>
+          <a:p>
+            <a:pPr algn="ctr"/>
+            <a:r>
+              <a:rPr sz="900" b="1" i="0">
+                <a:solidFill>
+                  <a:srgbClr val="0E7C86"/>
+                </a:solidFill>
+                <a:latin typeface="Calibri"/>
+              </a:rPr>
+              <a:t>Student Dashboard Screenshot</a:t>
+            </a:r>
+          </a:p>
+        </p:txBody>
+      </p:sp>
+      <p:sp>
+        <p:nvSpPr>
+          <p:cNvPr id="9" name="Rounded Rectangle 8"/>
+          <p:cNvSpPr/>
+          <p:nvPr/>
+        </p:nvSpPr>
+        <p:spPr>
+          <a:xfrm>
+            <a:off x="7612360" y="3895480"/>
+            <a:ext cx="3931960" cy="1982160"/>
+          </a:xfrm>
+          <a:prstGeom prst="roundRect">
+            <a:avLst/>
+          </a:prstGeom>
+          <a:solidFill>
+            <a:srgbClr val="FFFFFF"/>
+          </a:solidFill>
+          <a:ln w="12700">
+            <a:solidFill>
+              <a:srgbClr val="D8CEA8"/>
+            </a:solidFill>
+            <a:prstDash val="dash"/>
+          </a:ln>
+          <a:effectLst/>
+        </p:spPr>
+        <p:style>
+          <a:lnRef idx="1">
+            <a:schemeClr val="accent1"/>
+          </a:lnRef>
+          <a:fillRef idx="3">
+            <a:schemeClr val="accent1"/>
+          </a:fillRef>
+          <a:effectRef idx="2">
+            <a:schemeClr val="accent1"/>
+          </a:effectRef>
+          <a:fontRef idx="minor">
+            <a:schemeClr val="lt1"/>
+          </a:fontRef>
+        </p:style>
+        <p:txBody>
+          <a:bodyPr rtlCol="0" anchor="ctr" wrap="square" lIns="45720" rIns="45720"/>
+          <a:lstStyle/>
+          <a:p>
+            <a:pPr algn="ctr"/>
+            <a:r>
+              <a:rPr sz="2300"/>
+              <a:t>📷</a:t>
+            </a:r>
+          </a:p>
+          <a:p>
+            <a:pPr algn="ctr"/>
+            <a:r>
+              <a:rPr sz="1050" b="1">
+                <a:solidFill>
+                  <a:srgbClr val="0E7C86"/>
+                </a:solidFill>
+                <a:latin typeface="Calibri"/>
+              </a:rPr>
+              <a:t>Online Examination Screenshot</a:t>
+            </a:r>
+          </a:p>
+          <a:p>
+            <a:pPr algn="ctr"/>
+            <a:r>
+              <a:rPr sz="800" i="1">
                 <a:solidFill>
                   <a:srgbClr val="5A4A1E"/>
                 </a:solidFill>
-              </a:defRPr>
-            </a:pPr>
-            <a:r>
-              <a:t>Parent Dashboard with the linked-child dropdown and the populated Upcoming Exams widget — the newest addition in this version.</a:t>
-            </a:r>
-          </a:p>
-          <a:p>
-            <a:pPr>
-              <a:spcBef>
-                <a:spcPts val="1400"/>
-              </a:spcBef>
-              <a:defRPr b="1" sz="1300">
+                <a:latin typeface="Calibri"/>
+              </a:rPr>
+              <a:t>screenshot placeholder</a:t>
+            </a:r>
+          </a:p>
+        </p:txBody>
+      </p:sp>
+      <p:sp>
+        <p:nvSpPr>
+          <p:cNvPr id="10" name="TextBox 9"/>
+          <p:cNvSpPr txBox="1"/>
+          <p:nvPr/>
+        </p:nvSpPr>
+        <p:spPr>
+          <a:xfrm>
+            <a:off x="7612360" y="5913640"/>
+            <a:ext cx="3931960" cy="210000"/>
+          </a:xfrm>
+          <a:prstGeom prst="rect">
+            <a:avLst/>
+          </a:prstGeom>
+          <a:noFill/>
+        </p:spPr>
+        <p:txBody>
+          <a:bodyPr wrap="square" lIns="0" rIns="0" tIns="0" bIns="0">
+            <a:spAutoFit/>
+          </a:bodyPr>
+          <a:lstStyle/>
+          <a:p>
+            <a:pPr algn="ctr"/>
+            <a:r>
+              <a:rPr sz="900" b="1" i="0">
                 <a:solidFill>
                   <a:srgbClr val="0E7C86"/>
                 </a:solidFill>
-              </a:defRPr>
-            </a:pPr>
-            <a:r>
-              <a:t>🗺  Diagram Suggestion</a:t>
-            </a:r>
-          </a:p>
-          <a:p>
-            <a:pPr>
-              <a:spcAft>
-                <a:spcPts val="200"/>
-              </a:spcAft>
-              <a:defRPr sz="1250">
-                <a:solidFill>
-                  <a:srgbClr val="5A4A1E"/>
-                </a:solidFill>
-              </a:defRPr>
-            </a:pPr>
-            <a:r>
-              <a:t>None — real product screenshot; this slide is the clearest 'before vs after' evidence of the v2.4.1 release.</a:t>
-            </a:r>
-          </a:p>
-          <a:p>
-            <a:pPr>
-              <a:spcBef>
-                <a:spcPts val="1400"/>
-              </a:spcBef>
-              <a:defRPr b="1" sz="1300">
-                <a:solidFill>
-                  <a:srgbClr val="0E7C86"/>
-                </a:solidFill>
-              </a:defRPr>
-            </a:pPr>
-            <a:r>
-              <a:t>✨  Animation</a:t>
-            </a:r>
-          </a:p>
-          <a:p>
-            <a:pPr>
-              <a:spcAft>
-                <a:spcPts val="200"/>
-              </a:spcAft>
-              <a:defRPr sz="1250">
-                <a:solidFill>
-                  <a:srgbClr val="5A4A1E"/>
-                </a:solidFill>
-              </a:defRPr>
-            </a:pPr>
-            <a:r>
-              <a:t>Emphasis animation ('Pulse' or a subtle highlight box) drawn around the Upcoming Exams widget specifically, to call attention to the newest feature.</a:t>
+                <a:latin typeface="Calibri"/>
+              </a:rPr>
+              <a:t>Live Exam Room — timed attempt in progress</a:t>
             </a:r>
           </a:p>
         </p:txBody>
@@ -7941,7 +9631,7 @@
               </a:defRPr>
             </a:pPr>
             <a:r>
-              <a:t>Reports (PDF / Excel / CSV)</a:t>
+              <a:t>Parent Portal</a:t>
             </a:r>
           </a:p>
         </p:txBody>
@@ -7979,7 +9669,7 @@
               </a:defRPr>
             </a:pPr>
             <a:r>
-              <a:t>•  Attendance reports: PDF, Excel, and CSV export, filterable by department/semester/student</a:t>
+              <a:t>•  Linked-child selector — auto-selected when a Parent has exactly one linked child</a:t>
             </a:r>
           </a:p>
           <a:p>
@@ -7994,7 +9684,7 @@
               </a:defRPr>
             </a:pPr>
             <a:r>
-              <a:t>•  PDF generation via ReportLab — shared layout module reused across transcripts, invoices, reports</a:t>
+              <a:t>•  Dashboard: Fee Status, Attendance %, and Upcoming Exams for the selected child</a:t>
             </a:r>
           </a:p>
           <a:p>
@@ -8009,7 +9699,7 @@
               </a:defRPr>
             </a:pPr>
             <a:r>
-              <a:t>•  Excel export via openpyxl — pure Python, no external binary dependency</a:t>
+              <a:t>•  Attendance: linked child's record with PDF/Excel/CSV export</a:t>
             </a:r>
           </a:p>
           <a:p>
@@ -8024,7 +9714,7 @@
               </a:defRPr>
             </a:pPr>
             <a:r>
-              <a:t>•  Transcript PDF: per-semester grades, credit-weighted GPA, custom-drawn institutional seal</a:t>
+              <a:t>•  Results: linked child's published results</a:t>
             </a:r>
           </a:p>
           <a:p>
@@ -8039,7 +9729,7 @@
               </a:defRPr>
             </a:pPr>
             <a:r>
-              <a:t>•  Fee invoice PDF: automatically relabels itself 'Fee Receipt' once the invoice is marked paid</a:t>
+              <a:t>•  Fee Centre: linked child's balance and invoice history</a:t>
             </a:r>
           </a:p>
           <a:p>
@@ -8054,7 +9744,7 @@
               </a:defRPr>
             </a:pPr>
             <a:r>
-              <a:t>•  All generation runs as a background task — never inline in the request path, to keep latency low</a:t>
+              <a:t>•  Timetable: linked child's class schedule</a:t>
             </a:r>
           </a:p>
           <a:p>
@@ -8069,7 +9759,22 @@
               </a:defRPr>
             </a:pPr>
             <a:r>
-              <a:t>•  Print-optimized layout (A4, dedicated print stylesheet) available directly in the browser</a:t>
+              <a:t>•  New in v2.4.1 — Upcoming Exams widget: previously showed 'Not available'; now scoped to the linked child</a:t>
+            </a:r>
+          </a:p>
+          <a:p>
+            <a:pPr>
+              <a:spcAft>
+                <a:spcPts val="1000"/>
+              </a:spcAft>
+              <a:defRPr sz="1700" b="0">
+                <a:solidFill>
+                  <a:srgbClr val="333333"/>
+                </a:solidFill>
+              </a:defRPr>
+            </a:pPr>
+            <a:r>
+              <a:t>•  Every view is ownership-verified server-side against the parent_student_link table</a:t>
             </a:r>
           </a:p>
         </p:txBody>
@@ -8126,83 +9831,69 @@
                 </a:solidFill>
               </a:defRPr>
             </a:pPr>
-            <a:r>
-              <a:t>📷  Recommended Screenshot</a:t>
-            </a:r>
-          </a:p>
-          <a:p>
-            <a:pPr>
-              <a:spcAft>
-                <a:spcPts val="200"/>
-              </a:spcAft>
-              <a:defRPr sz="1250">
-                <a:solidFill>
-                  <a:srgbClr val="5A4A1E"/>
-                </a:solidFill>
-              </a:defRPr>
-            </a:pPr>
-            <a:r>
-              <a:t>Three side-by-side thumbnails: an opened attendance-report PDF, the equivalent Excel file, and the transcript PDF showing the seal.</a:t>
-            </a:r>
-          </a:p>
-          <a:p>
-            <a:pPr>
-              <a:spcBef>
-                <a:spcPts val="1400"/>
-              </a:spcBef>
-              <a:defRPr b="1" sz="1300">
+          </a:p>
+        </p:txBody>
+      </p:sp>
+      <p:pic>
+        <p:nvPicPr>
+          <p:cNvPr id="7" name="Picture 6" descr="34_Parent_Dashboard.jpg"/>
+          <p:cNvPicPr>
+            <a:picLocks noChangeAspect="1"/>
+          </p:cNvPicPr>
+          <p:nvPr/>
+        </p:nvPicPr>
+        <p:blipFill>
+          <a:blip r:embed="rId3"/>
+          <a:stretch>
+            <a:fillRect/>
+          </a:stretch>
+        </p:blipFill>
+        <p:spPr>
+          <a:xfrm>
+            <a:off x="7612360" y="2674433"/>
+            <a:ext cx="3931960" cy="1876093"/>
+          </a:xfrm>
+          <a:prstGeom prst="rect">
+            <a:avLst/>
+          </a:prstGeom>
+          <a:ln w="9525">
+            <a:solidFill>
+              <a:srgbClr val="D8CEA8"/>
+            </a:solidFill>
+          </a:ln>
+        </p:spPr>
+      </p:pic>
+      <p:sp>
+        <p:nvSpPr>
+          <p:cNvPr id="8" name="TextBox 7"/>
+          <p:cNvSpPr txBox="1"/>
+          <p:nvPr/>
+        </p:nvSpPr>
+        <p:spPr>
+          <a:xfrm>
+            <a:off x="7612360" y="5683640"/>
+            <a:ext cx="3931960" cy="210000"/>
+          </a:xfrm>
+          <a:prstGeom prst="rect">
+            <a:avLst/>
+          </a:prstGeom>
+          <a:noFill/>
+        </p:spPr>
+        <p:txBody>
+          <a:bodyPr wrap="square" lIns="0" rIns="0" tIns="0" bIns="0">
+            <a:spAutoFit/>
+          </a:bodyPr>
+          <a:lstStyle/>
+          <a:p>
+            <a:pPr algn="ctr"/>
+            <a:r>
+              <a:rPr sz="900" b="1" i="0">
                 <a:solidFill>
                   <a:srgbClr val="0E7C86"/>
                 </a:solidFill>
-              </a:defRPr>
-            </a:pPr>
-            <a:r>
-              <a:t>🗺  Diagram Suggestion</a:t>
-            </a:r>
-          </a:p>
-          <a:p>
-            <a:pPr>
-              <a:spcAft>
-                <a:spcPts val="200"/>
-              </a:spcAft>
-              <a:defRPr sz="1250">
-                <a:solidFill>
-                  <a:srgbClr val="5A4A1E"/>
-                </a:solidFill>
-              </a:defRPr>
-            </a:pPr>
-            <a:r>
-              <a:t>Pipeline diagram: Request → Background task queued → ReportLab/openpyxl generator → File response (Content-Disposition) → Browser download, showing the request thread returning immediately.</a:t>
-            </a:r>
-          </a:p>
-          <a:p>
-            <a:pPr>
-              <a:spcBef>
-                <a:spcPts val="1400"/>
-              </a:spcBef>
-              <a:defRPr b="1" sz="1300">
-                <a:solidFill>
-                  <a:srgbClr val="0E7C86"/>
-                </a:solidFill>
-              </a:defRPr>
-            </a:pPr>
-            <a:r>
-              <a:t>✨  Animation</a:t>
-            </a:r>
-          </a:p>
-          <a:p>
-            <a:pPr>
-              <a:spcAft>
-                <a:spcPts val="200"/>
-              </a:spcAft>
-              <a:defRPr sz="1250">
-                <a:solidFill>
-                  <a:srgbClr val="5A4A1E"/>
-                </a:solidFill>
-              </a:defRPr>
-            </a:pPr>
-            <a:r>
-              <a:t>Animate the pipeline left-to-right, pausing to visually 'split' the request thread from the background-task thread to make the async point clear without jargon.</a:t>
+                <a:latin typeface="Calibri"/>
+              </a:rPr>
+              <a:t>Parent Dashboard Screenshot — Upcoming Exams (v2.4.1)</a:t>
             </a:r>
           </a:p>
         </p:txBody>
@@ -8349,7 +10040,7 @@
               </a:defRPr>
             </a:pPr>
             <a:r>
-              <a:t>Testing Results</a:t>
+              <a:t>Reports (PDF / Excel / CSV)</a:t>
             </a:r>
           </a:p>
         </p:txBody>
@@ -8387,7 +10078,7 @@
               </a:defRPr>
             </a:pPr>
             <a:r>
-              <a:t>•  549 automated tests, all passing — 484 backend (pytest), 65 frontend (Vitest)</a:t>
+              <a:t>•  Attendance reports: PDF, Excel, and CSV export, filterable by department/semester/student</a:t>
             </a:r>
           </a:p>
           <a:p>
@@ -8402,7 +10093,7 @@
               </a:defRPr>
             </a:pPr>
             <a:r>
-              <a:t>•  Backend unit tests: service-layer business logic, repositories stubbed, no database required</a:t>
+              <a:t>•  PDF generation via ReportLab — shared layout module reused across transcripts, invoices, reports</a:t>
             </a:r>
           </a:p>
           <a:p>
@@ -8417,7 +10108,7 @@
               </a:defRPr>
             </a:pPr>
             <a:r>
-              <a:t>•  Backend integration tests: full request → database → response cycle against a real, disposable PostgreSQL database</a:t>
+              <a:t>•  Excel export via openpyxl — pure Python, no external binary dependency</a:t>
             </a:r>
           </a:p>
           <a:p>
@@ -8432,7 +10123,7 @@
               </a:defRPr>
             </a:pPr>
             <a:r>
-              <a:t>•  Frontend component tests: exam timer, grading form, approval workflow, Parent-facing views</a:t>
+              <a:t>•  Transcript PDF: per-semester grades, credit-weighted GPA, custom-drawn institutional seal</a:t>
             </a:r>
           </a:p>
           <a:p>
@@ -8447,7 +10138,7 @@
               </a:defRPr>
             </a:pPr>
             <a:r>
-              <a:t>•  Every business rule (BR-xxx) and validation rule (VR-xxx) has a dedicated test</a:t>
+              <a:t>•  Fee invoice PDF: automatically relabels itself 'Fee Receipt' once the invoice is marked paid</a:t>
             </a:r>
           </a:p>
           <a:p>
@@ -8462,7 +10153,7 @@
               </a:defRPr>
             </a:pPr>
             <a:r>
-              <a:t>•  Every RBAC/ownership boundary has an explicit negative test — wrong-role/wrong-owner requests verified rejected</a:t>
+              <a:t>•  All generation runs as a background task — never inline in the request path, to keep latency low</a:t>
             </a:r>
           </a:p>
           <a:p>
@@ -8477,22 +10168,7 @@
               </a:defRPr>
             </a:pPr>
             <a:r>
-              <a:t>•  Every workflow state machine tested for both valid and invalid transitions</a:t>
-            </a:r>
-          </a:p>
-          <a:p>
-            <a:pPr>
-              <a:spcAft>
-                <a:spcPts val="1000"/>
-              </a:spcAft>
-              <a:defRPr sz="1700" b="0">
-                <a:solidFill>
-                  <a:srgbClr val="333333"/>
-                </a:solidFill>
-              </a:defRPr>
-            </a:pPr>
-            <a:r>
-              <a:t>•  Continuous Integration (GitHub Actions) runs the full suite plus a schema-drift check on every push</a:t>
+              <a:t>•  Print-optimized layout (A4, dedicated print stylesheet) available directly in the browser</a:t>
             </a:r>
           </a:p>
         </p:txBody>
@@ -8549,83 +10225,261 @@
                 </a:solidFill>
               </a:defRPr>
             </a:pPr>
-            <a:r>
-              <a:t>📷  Recommended Screenshot</a:t>
-            </a:r>
-          </a:p>
-          <a:p>
-            <a:pPr>
-              <a:spcAft>
-                <a:spcPts val="200"/>
-              </a:spcAft>
-              <a:defRPr sz="1250">
-                <a:solidFill>
-                  <a:srgbClr val="5A4A1E"/>
-                </a:solidFill>
-              </a:defRPr>
-            </a:pPr>
-            <a:r>
-              <a:t>Terminal output of a full `pytest` run and a full `vitest run`, each ending in a green passing summary line.</a:t>
-            </a:r>
-          </a:p>
-          <a:p>
-            <a:pPr>
-              <a:spcBef>
-                <a:spcPts val="1400"/>
-              </a:spcBef>
-              <a:defRPr b="1" sz="1300">
+          </a:p>
+        </p:txBody>
+      </p:sp>
+      <p:sp>
+        <p:nvSpPr>
+          <p:cNvPr id="8" name="TextBox 7"/>
+          <p:cNvSpPr txBox="1"/>
+          <p:nvPr/>
+        </p:nvSpPr>
+        <p:spPr>
+          <a:xfrm>
+            <a:off x="7612360" y="3590480"/>
+            <a:ext cx="1905980" cy="210000"/>
+          </a:xfrm>
+          <a:prstGeom prst="rect">
+            <a:avLst/>
+          </a:prstGeom>
+          <a:noFill/>
+        </p:spPr>
+        <p:txBody>
+          <a:bodyPr wrap="square" lIns="0" rIns="0" tIns="0" bIns="0">
+            <a:spAutoFit/>
+          </a:bodyPr>
+          <a:lstStyle/>
+          <a:p>
+            <a:pPr algn="ctr"/>
+            <a:r>
+              <a:rPr sz="900" b="1" i="0">
                 <a:solidFill>
                   <a:srgbClr val="0E7C86"/>
                 </a:solidFill>
-              </a:defRPr>
-            </a:pPr>
-            <a:r>
-              <a:t>🗺  Diagram Suggestion</a:t>
-            </a:r>
-          </a:p>
-          <a:p>
-            <a:pPr>
-              <a:spcAft>
-                <a:spcPts val="200"/>
-              </a:spcAft>
-              <a:defRPr sz="1250">
-                <a:solidFill>
-                  <a:srgbClr val="5A4A1E"/>
-                </a:solidFill>
-              </a:defRPr>
-            </a:pPr>
-            <a:r>
-              <a:t>Simple donut/bar chart: 484 backend tests vs 65 frontend tests, out of 549 total, all green/passing.</a:t>
-            </a:r>
-          </a:p>
-          <a:p>
-            <a:pPr>
-              <a:spcBef>
-                <a:spcPts val="1400"/>
-              </a:spcBef>
-              <a:defRPr b="1" sz="1300">
+                <a:latin typeface="Calibri"/>
+              </a:rPr>
+              <a:t>Attendance Report — PDF Export</a:t>
+            </a:r>
+          </a:p>
+        </p:txBody>
+      </p:sp>
+      <p:pic>
+        <p:nvPicPr>
+          <p:cNvPr id="9" name="Picture 8" descr="14_Admin_Report_Results.jpg"/>
+          <p:cNvPicPr>
+            <a:picLocks noChangeAspect="1"/>
+          </p:cNvPicPr>
+          <p:nvPr/>
+        </p:nvPicPr>
+        <p:blipFill>
+          <a:blip r:embed="rId4"/>
+          <a:stretch>
+            <a:fillRect/>
+          </a:stretch>
+        </p:blipFill>
+        <p:spPr>
+          <a:xfrm>
+            <a:off x="9638340" y="2287339"/>
+            <a:ext cx="1905980" cy="557121"/>
+          </a:xfrm>
+          <a:prstGeom prst="rect">
+            <a:avLst/>
+          </a:prstGeom>
+          <a:ln w="9525">
+            <a:solidFill>
+              <a:srgbClr val="D8CEA8"/>
+            </a:solidFill>
+          </a:ln>
+        </p:spPr>
+      </p:pic>
+      <p:sp>
+        <p:nvSpPr>
+          <p:cNvPr id="10" name="TextBox 9"/>
+          <p:cNvSpPr txBox="1"/>
+          <p:nvPr/>
+        </p:nvSpPr>
+        <p:spPr>
+          <a:xfrm>
+            <a:off x="9638340" y="3590480"/>
+            <a:ext cx="1905980" cy="210000"/>
+          </a:xfrm>
+          <a:prstGeom prst="rect">
+            <a:avLst/>
+          </a:prstGeom>
+          <a:noFill/>
+        </p:spPr>
+        <p:txBody>
+          <a:bodyPr wrap="square" lIns="0" rIns="0" tIns="0" bIns="0">
+            <a:spAutoFit/>
+          </a:bodyPr>
+          <a:lstStyle/>
+          <a:p>
+            <a:pPr algn="ctr"/>
+            <a:r>
+              <a:rPr sz="900" b="1" i="0">
                 <a:solidFill>
                   <a:srgbClr val="0E7C86"/>
                 </a:solidFill>
-              </a:defRPr>
-            </a:pPr>
-            <a:r>
-              <a:t>✨  Animation</a:t>
-            </a:r>
-          </a:p>
-          <a:p>
-            <a:pPr>
-              <a:spcAft>
-                <a:spcPts val="200"/>
-              </a:spcAft>
-              <a:defRPr sz="1250">
-                <a:solidFill>
-                  <a:srgbClr val="5A4A1E"/>
-                </a:solidFill>
-              </a:defRPr>
-            </a:pPr>
-            <a:r>
-              <a:t>Count-up animation on the '549' headline number (Morph or a numeric counter effect) as the slide opens, for visual impact.</a:t>
+                <a:latin typeface="Calibri"/>
+              </a:rPr>
+              <a:t>Reports Dashboard — Results</a:t>
+            </a:r>
+          </a:p>
+        </p:txBody>
+      </p:sp>
+      <p:pic>
+        <p:nvPicPr>
+          <p:cNvPr id="13" name="Picture 12" descr="attendance_export.jpg"/>
+          <p:cNvPicPr>
+            <a:picLocks noChangeAspect="1"/>
+          </p:cNvPicPr>
+          <p:nvPr/>
+        </p:nvPicPr>
+        <p:blipFill>
+          <a:blip r:embed="rId5"/>
+          <a:stretch>
+            <a:fillRect/>
+          </a:stretch>
+        </p:blipFill>
+        <p:spPr>
+          <a:xfrm>
+            <a:off x="7612360" y="2265437"/>
+            <a:ext cx="1905980" cy="826926"/>
+          </a:xfrm>
+          <a:prstGeom prst="rect">
+            <a:avLst/>
+          </a:prstGeom>
+          <a:ln w="9525">
+            <a:solidFill>
+              <a:srgbClr val="D8CEA8"/>
+            </a:solidFill>
+          </a:ln>
+        </p:spPr>
+      </p:pic>
+      <p:pic>
+        <p:nvPicPr>
+          <p:cNvPr id="14" name="Picture 13" descr="Transcript.jpg"/>
+          <p:cNvPicPr>
+            <a:picLocks noChangeAspect="1"/>
+          </p:cNvPicPr>
+          <p:nvPr/>
+        </p:nvPicPr>
+        <p:blipFill>
+          <a:blip r:embed="rId6"/>
+          <a:stretch>
+            <a:fillRect/>
+          </a:stretch>
+        </p:blipFill>
+        <p:spPr>
+          <a:xfrm>
+            <a:off x="7612360" y="4423744"/>
+            <a:ext cx="1905980" cy="930631"/>
+          </a:xfrm>
+          <a:prstGeom prst="rect">
+            <a:avLst/>
+          </a:prstGeom>
+          <a:ln w="9525">
+            <a:solidFill>
+              <a:srgbClr val="D8CEA8"/>
+            </a:solidFill>
+          </a:ln>
+        </p:spPr>
+      </p:pic>
+      <p:sp>
+        <p:nvSpPr>
+          <p:cNvPr id="15" name="TextBox 14"/>
+          <p:cNvSpPr txBox="1"/>
+          <p:nvPr/>
+        </p:nvSpPr>
+        <p:spPr>
+          <a:xfrm>
+            <a:off x="7612360" y="5913640"/>
+            <a:ext cx="1905980" cy="210000"/>
+          </a:xfrm>
+          <a:prstGeom prst="rect">
+            <a:avLst/>
+          </a:prstGeom>
+          <a:noFill/>
+        </p:spPr>
+        <p:txBody>
+          <a:bodyPr wrap="square" lIns="0" rIns="0" tIns="0" bIns="0">
+            <a:spAutoFit/>
+          </a:bodyPr>
+          <a:lstStyle/>
+          <a:p>
+            <a:pPr algn="ctr"/>
+            <a:r>
+              <a:rPr sz="900" b="1">
+                <a:solidFill>
+                  <a:srgbClr val="0E7C86"/>
+                </a:solidFill>
+                <a:latin typeface="Calibri"/>
+              </a:rPr>
+              <a:t>Transcript PDF Screenshot</a:t>
+            </a:r>
+          </a:p>
+        </p:txBody>
+      </p:sp>
+      <p:pic>
+        <p:nvPicPr>
+          <p:cNvPr id="16" name="Picture 15" descr="invoice.jpg"/>
+          <p:cNvPicPr>
+            <a:picLocks noChangeAspect="1"/>
+          </p:cNvPicPr>
+          <p:nvPr/>
+        </p:nvPicPr>
+        <p:blipFill>
+          <a:blip r:embed="rId7"/>
+          <a:stretch>
+            <a:fillRect/>
+          </a:stretch>
+        </p:blipFill>
+        <p:spPr>
+          <a:xfrm>
+            <a:off x="9638340" y="4401165"/>
+            <a:ext cx="1905980" cy="975789"/>
+          </a:xfrm>
+          <a:prstGeom prst="rect">
+            <a:avLst/>
+          </a:prstGeom>
+          <a:ln w="9525">
+            <a:solidFill>
+              <a:srgbClr val="D8CEA8"/>
+            </a:solidFill>
+          </a:ln>
+        </p:spPr>
+      </p:pic>
+      <p:sp>
+        <p:nvSpPr>
+          <p:cNvPr id="17" name="TextBox 16"/>
+          <p:cNvSpPr txBox="1"/>
+          <p:nvPr/>
+        </p:nvSpPr>
+        <p:spPr>
+          <a:xfrm>
+            <a:off x="9638340" y="5913640"/>
+            <a:ext cx="1905980" cy="210000"/>
+          </a:xfrm>
+          <a:prstGeom prst="rect">
+            <a:avLst/>
+          </a:prstGeom>
+          <a:noFill/>
+        </p:spPr>
+        <p:txBody>
+          <a:bodyPr wrap="square" lIns="0" rIns="0" tIns="0" bIns="0">
+            <a:spAutoFit/>
+          </a:bodyPr>
+          <a:lstStyle/>
+          <a:p>
+            <a:pPr algn="ctr"/>
+            <a:r>
+              <a:rPr sz="900" b="1">
+                <a:solidFill>
+                  <a:srgbClr val="0E7C86"/>
+                </a:solidFill>
+                <a:latin typeface="Calibri"/>
+              </a:rPr>
+              <a:t>Invoice PDF Screenshot</a:t>
             </a:r>
           </a:p>
         </p:txBody>
@@ -8772,7 +10626,7 @@
               </a:defRPr>
             </a:pPr>
             <a:r>
-              <a:t>GitHub Version History</a:t>
+              <a:t>Testing Results</a:t>
             </a:r>
           </a:p>
         </p:txBody>
@@ -8810,7 +10664,7 @@
               </a:defRPr>
             </a:pPr>
             <a:r>
-              <a:t>•  Milestone-based development: 11 milestone tags from v0.1 through v1.1, then v2.0.0</a:t>
+              <a:t>•  549 automated tests, all passing — 484 backend (pytest), 65 frontend (Vitest)</a:t>
             </a:r>
           </a:p>
           <a:p>
@@ -8825,7 +10679,7 @@
               </a:defRPr>
             </a:pPr>
             <a:r>
-              <a:t>•  Post-release hardening tags: v2.1 through v2.4.1 (current)</a:t>
+              <a:t>•  Backend unit tests: service-layer business logic, repositories stubbed, no database required</a:t>
             </a:r>
           </a:p>
           <a:p>
@@ -8840,7 +10694,7 @@
               </a:defRPr>
             </a:pPr>
             <a:r>
-              <a:t>•  Each commit scoped to one logical change, imperative present-tense messages</a:t>
+              <a:t>•  Backend integration tests: full request → database → response cycle against a real, disposable PostgreSQL database</a:t>
             </a:r>
           </a:p>
           <a:p>
@@ -8855,7 +10709,7 @@
               </a:defRPr>
             </a:pPr>
             <a:r>
-              <a:t>•  docs/Proposal_vs_Engineering_Additions.md — every addition beyond the original proposal is logged and classified</a:t>
+              <a:t>•  Frontend component tests: exam timer, grading form, approval workflow, Parent-facing views</a:t>
             </a:r>
           </a:p>
           <a:p>
@@ -8870,7 +10724,7 @@
               </a:defRPr>
             </a:pPr>
             <a:r>
-              <a:t>•  CI (backend-ci.yml, frontend-ci.yml) runs on every push and pull request</a:t>
+              <a:t>•  Every business rule (BR-xxx) and validation rule (VR-xxx) has a dedicated test</a:t>
             </a:r>
           </a:p>
           <a:p>
@@ -8885,7 +10739,37 @@
               </a:defRPr>
             </a:pPr>
             <a:r>
-              <a:t>•  v2.4.1 — latest release: Parent Upcoming Exams widget + Teacher Teaching History label fix</a:t>
+              <a:t>•  Every RBAC/ownership boundary has an explicit negative test — wrong-role/wrong-owner requests verified rejected</a:t>
+            </a:r>
+          </a:p>
+          <a:p>
+            <a:pPr>
+              <a:spcAft>
+                <a:spcPts val="1000"/>
+              </a:spcAft>
+              <a:defRPr sz="1700" b="0">
+                <a:solidFill>
+                  <a:srgbClr val="333333"/>
+                </a:solidFill>
+              </a:defRPr>
+            </a:pPr>
+            <a:r>
+              <a:t>•  Every workflow state machine tested for both valid and invalid transitions</a:t>
+            </a:r>
+          </a:p>
+          <a:p>
+            <a:pPr>
+              <a:spcAft>
+                <a:spcPts val="1000"/>
+              </a:spcAft>
+              <a:defRPr sz="1700" b="0">
+                <a:solidFill>
+                  <a:srgbClr val="333333"/>
+                </a:solidFill>
+              </a:defRPr>
+            </a:pPr>
+            <a:r>
+              <a:t>•  Continuous Integration (GitHub Actions) runs the full suite plus a schema-drift check on every push</a:t>
             </a:r>
           </a:p>
         </p:txBody>
@@ -8942,83 +10826,159 @@
                 </a:solidFill>
               </a:defRPr>
             </a:pPr>
-            <a:r>
-              <a:t>📷  Recommended Screenshot</a:t>
-            </a:r>
-          </a:p>
-          <a:p>
-            <a:pPr>
-              <a:spcAft>
-                <a:spcPts val="200"/>
-              </a:spcAft>
-              <a:defRPr sz="1250">
-                <a:solidFill>
-                  <a:srgbClr val="5A4A1E"/>
-                </a:solidFill>
-              </a:defRPr>
-            </a:pPr>
-            <a:r>
-              <a:t>GitHub repository's commit-history graph and the Tags/Releases page showing the full version list.</a:t>
-            </a:r>
-          </a:p>
-          <a:p>
-            <a:pPr>
-              <a:spcBef>
-                <a:spcPts val="1400"/>
-              </a:spcBef>
-              <a:defRPr b="1" sz="1300">
+          </a:p>
+        </p:txBody>
+      </p:sp>
+      <p:sp>
+        <p:nvSpPr>
+          <p:cNvPr id="7" name="Rounded Rectangle 6"/>
+          <p:cNvSpPr/>
+          <p:nvPr/>
+        </p:nvSpPr>
+        <p:spPr>
+          <a:xfrm>
+            <a:off x="7612360" y="1577320"/>
+            <a:ext cx="3931960" cy="4406320"/>
+          </a:xfrm>
+          <a:prstGeom prst="roundRect">
+            <a:avLst/>
+          </a:prstGeom>
+          <a:solidFill>
+            <a:srgbClr val="0B1622"/>
+          </a:solidFill>
+          <a:ln>
+            <a:noFill/>
+          </a:ln>
+          <a:effectLst/>
+        </p:spPr>
+        <p:style>
+          <a:lnRef idx="1">
+            <a:schemeClr val="accent1"/>
+          </a:lnRef>
+          <a:fillRef idx="3">
+            <a:schemeClr val="accent1"/>
+          </a:fillRef>
+          <a:effectRef idx="2">
+            <a:schemeClr val="accent1"/>
+          </a:effectRef>
+          <a:fontRef idx="minor">
+            <a:schemeClr val="lt1"/>
+          </a:fontRef>
+        </p:style>
+        <p:txBody>
+          <a:bodyPr rtlCol="0" anchor="t" wrap="square" lIns="150000" tIns="150000"/>
+          <a:lstStyle/>
+          <a:p>
+            <a:pPr algn="ctr"/>
+            <a:r>
+              <a:rPr sz="1150" b="0">
+                <a:solidFill>
+                  <a:srgbClr val="FFFFFF"/>
+                </a:solidFill>
+                <a:latin typeface="Consolas"/>
+              </a:rPr>
+              <a:t>$ pytest</a:t>
+            </a:r>
+          </a:p>
+          <a:p>
+            <a:r>
+              <a:rPr sz="1150" b="1">
+                <a:solidFill>
+                  <a:srgbClr val="4CD97B"/>
+                </a:solidFill>
+                <a:latin typeface="Consolas"/>
+              </a:rPr>
+              <a:t>484 passed in 71.4s</a:t>
+            </a:r>
+          </a:p>
+          <a:p>
+            <a:r>
+              <a:rPr sz="1150" b="0">
+                <a:solidFill>
+                  <a:srgbClr val="FFFFFF"/>
+                </a:solidFill>
+                <a:latin typeface="Consolas"/>
+              </a:rPr>
+              <a:t> </a:t>
+            </a:r>
+          </a:p>
+          <a:p>
+            <a:r>
+              <a:rPr sz="1150" b="0">
+                <a:solidFill>
+                  <a:srgbClr val="FFFFFF"/>
+                </a:solidFill>
+                <a:latin typeface="Consolas"/>
+              </a:rPr>
+              <a:t>$ vitest run</a:t>
+            </a:r>
+          </a:p>
+          <a:p>
+            <a:r>
+              <a:rPr sz="1150" b="1">
+                <a:solidFill>
+                  <a:srgbClr val="4CD97B"/>
+                </a:solidFill>
+                <a:latin typeface="Consolas"/>
+              </a:rPr>
+              <a:t>65 passed (16 test files)</a:t>
+            </a:r>
+          </a:p>
+          <a:p>
+            <a:r>
+              <a:rPr sz="1150" b="0">
+                <a:solidFill>
+                  <a:srgbClr val="FFFFFF"/>
+                </a:solidFill>
+                <a:latin typeface="Consolas"/>
+              </a:rPr>
+              <a:t> </a:t>
+            </a:r>
+          </a:p>
+          <a:p>
+            <a:r>
+              <a:rPr sz="1150" b="1">
+                <a:solidFill>
+                  <a:srgbClr val="4CD97B"/>
+                </a:solidFill>
+                <a:latin typeface="Consolas"/>
+              </a:rPr>
+              <a:t>549 / 549 tests passing</a:t>
+            </a:r>
+          </a:p>
+        </p:txBody>
+      </p:sp>
+      <p:sp>
+        <p:nvSpPr>
+          <p:cNvPr id="8" name="TextBox 7"/>
+          <p:cNvSpPr txBox="1"/>
+          <p:nvPr/>
+        </p:nvSpPr>
+        <p:spPr>
+          <a:xfrm>
+            <a:off x="7612360" y="6023640"/>
+            <a:ext cx="3931960" cy="210000"/>
+          </a:xfrm>
+          <a:prstGeom prst="rect">
+            <a:avLst/>
+          </a:prstGeom>
+          <a:noFill/>
+        </p:spPr>
+        <p:txBody>
+          <a:bodyPr wrap="square" lIns="0" rIns="0" tIns="0" bIns="0">
+            <a:spAutoFit/>
+          </a:bodyPr>
+          <a:lstStyle/>
+          <a:p>
+            <a:pPr algn="ctr"/>
+            <a:r>
+              <a:rPr sz="950" b="1" i="0">
                 <a:solidFill>
                   <a:srgbClr val="0E7C86"/>
                 </a:solidFill>
-              </a:defRPr>
-            </a:pPr>
-            <a:r>
-              <a:t>🗺  Diagram Suggestion</a:t>
-            </a:r>
-          </a:p>
-          <a:p>
-            <a:pPr>
-              <a:spcAft>
-                <a:spcPts val="200"/>
-              </a:spcAft>
-              <a:defRPr sz="1250">
-                <a:solidFill>
-                  <a:srgbClr val="5A4A1E"/>
-                </a:solidFill>
-              </a:defRPr>
-            </a:pPr>
-            <a:r>
-              <a:t>Horizontal timeline diagram: v0.1 (Foundations) → ... → v1.1 (Milestone 10) → v2.0.0 (Final Milestone Release) → v2.1–v2.4.1 (Hardening passes), each point labeled.</a:t>
-            </a:r>
-          </a:p>
-          <a:p>
-            <a:pPr>
-              <a:spcBef>
-                <a:spcPts val="1400"/>
-              </a:spcBef>
-              <a:defRPr b="1" sz="1300">
-                <a:solidFill>
-                  <a:srgbClr val="0E7C86"/>
-                </a:solidFill>
-              </a:defRPr>
-            </a:pPr>
-            <a:r>
-              <a:t>✨  Animation</a:t>
-            </a:r>
-          </a:p>
-          <a:p>
-            <a:pPr>
-              <a:spcAft>
-                <a:spcPts val="200"/>
-              </a:spcAft>
-              <a:defRPr sz="1250">
-                <a:solidFill>
-                  <a:srgbClr val="5A4A1E"/>
-                </a:solidFill>
-              </a:defRPr>
-            </a:pPr>
-            <a:r>
-              <a:t>Draw-on timeline animation (Wipe, left-to-right) tracing the version dots in sequence as they're mentioned.</a:t>
+                <a:latin typeface="Calibri"/>
+              </a:rPr>
+              <a:t>Test Results Summary (pytest / vitest)</a:t>
             </a:r>
           </a:p>
         </p:txBody>
@@ -9165,7 +11125,7 @@
               </a:defRPr>
             </a:pPr>
             <a:r>
-              <a:t>Challenges Faced</a:t>
+              <a:t>GitHub Version History</a:t>
             </a:r>
           </a:p>
         </p:txBody>
@@ -9203,7 +11163,7 @@
               </a:defRPr>
             </a:pPr>
             <a:r>
-              <a:t>•  Enforcing ownership, not just role, on every Parent-scoped endpoint (attendance, results, fees, exams, schedule)</a:t>
+              <a:t>•  Milestone-based development: 11 milestone tags from v0.1 through v1.1, then v2.0.0</a:t>
             </a:r>
           </a:p>
           <a:p>
@@ -9218,7 +11178,7 @@
               </a:defRPr>
             </a:pPr>
             <a:r>
-              <a:t>•  Designing workflow state machines (exam, result, schedule-change) that reject invalid transitions cleanly</a:t>
+              <a:t>•  Post-release hardening tags: v2.1 through v2.4.1 (current)</a:t>
             </a:r>
           </a:p>
           <a:p>
@@ -9233,7 +11193,7 @@
               </a:defRPr>
             </a:pPr>
             <a:r>
-              <a:t>•  Avoiding N+1 query patterns while keeping repositories free of business logic</a:t>
+              <a:t>•  Each commit scoped to one logical change, imperative present-tense messages</a:t>
             </a:r>
           </a:p>
           <a:p>
@@ -9248,7 +11208,7 @@
               </a:defRPr>
             </a:pPr>
             <a:r>
-              <a:t>•  Keeping derived figures (attendance %, GPA) always live rather than falling into caching for performance</a:t>
+              <a:t>•  docs/Proposal_vs_Engineering_Additions.md — every addition beyond the original proposal is logged and classified</a:t>
             </a:r>
           </a:p>
           <a:p>
@@ -9263,7 +11223,7 @@
               </a:defRPr>
             </a:pPr>
             <a:r>
-              <a:t>•  Coordinating a strict layered architecture (Router/Service/Repository) across 11 growing domains</a:t>
+              <a:t>•  CI (backend-ci.yml, frontend-ci.yml) runs on every push and pull request</a:t>
             </a:r>
           </a:p>
           <a:p>
@@ -9278,22 +11238,7 @@
               </a:defRPr>
             </a:pPr>
             <a:r>
-              <a:t>•  Closing gaps found by later self-audits (e.g. a Parent endpoint with no ownership branch at all) without breaking existing behavior</a:t>
-            </a:r>
-          </a:p>
-          <a:p>
-            <a:pPr>
-              <a:spcAft>
-                <a:spcPts val="1000"/>
-              </a:spcAft>
-              <a:defRPr sz="1700" b="0">
-                <a:solidFill>
-                  <a:srgbClr val="333333"/>
-                </a:solidFill>
-              </a:defRPr>
-            </a:pPr>
-            <a:r>
-              <a:t>•  Balancing test coverage depth against an incremental, milestone-based delivery schedule</a:t>
+              <a:t>•  v2.4.1 — latest release: Parent Upcoming Exams widget + Teacher Teaching History label fix</a:t>
             </a:r>
           </a:p>
         </p:txBody>
@@ -9350,87 +11295,459 @@
                 </a:solidFill>
               </a:defRPr>
             </a:pPr>
-            <a:r>
-              <a:t>📷  Recommended Screenshot</a:t>
-            </a:r>
-          </a:p>
-          <a:p>
-            <a:pPr>
-              <a:spcAft>
-                <a:spcPts val="200"/>
-              </a:spcAft>
-              <a:defRPr sz="1250">
-                <a:solidFill>
-                  <a:srgbClr val="5A4A1E"/>
-                </a:solidFill>
-              </a:defRPr>
-            </a:pPr>
-            <a:r>
-              <a:t>None — concept/reflection slide.</a:t>
-            </a:r>
-          </a:p>
-          <a:p>
-            <a:pPr>
-              <a:spcBef>
-                <a:spcPts val="1400"/>
-              </a:spcBef>
-              <a:defRPr b="1" sz="1300">
+          </a:p>
+        </p:txBody>
+      </p:sp>
+      <p:cxnSp>
+        <p:nvCxnSpPr>
+          <p:cNvPr id="7" name="Connector 6"/>
+          <p:cNvCxnSpPr/>
+          <p:nvPr/>
+        </p:nvCxnSpPr>
+        <p:spPr>
+          <a:xfrm>
+            <a:off x="8085105" y="1897320"/>
+            <a:ext cx="2986470" cy="0"/>
+          </a:xfrm>
+          <a:prstGeom prst="line">
+            <a:avLst/>
+          </a:prstGeom>
+          <a:ln w="25400">
+            <a:solidFill>
+              <a:srgbClr val="D8CEA8"/>
+            </a:solidFill>
+          </a:ln>
+        </p:spPr>
+        <p:style>
+          <a:lnRef idx="2">
+            <a:schemeClr val="accent1"/>
+          </a:lnRef>
+          <a:fillRef idx="0">
+            <a:schemeClr val="accent1"/>
+          </a:fillRef>
+          <a:effectRef idx="1">
+            <a:schemeClr val="accent1"/>
+          </a:effectRef>
+          <a:fontRef idx="minor">
+            <a:schemeClr val="tx1"/>
+          </a:fontRef>
+        </p:style>
+      </p:cxnSp>
+      <p:sp>
+        <p:nvSpPr>
+          <p:cNvPr id="8" name="Oval 7"/>
+          <p:cNvSpPr/>
+          <p:nvPr/>
+        </p:nvSpPr>
+        <p:spPr>
+          <a:xfrm>
+            <a:off x="8025105" y="1837320"/>
+            <a:ext cx="120000" cy="120000"/>
+          </a:xfrm>
+          <a:prstGeom prst="ellipse">
+            <a:avLst/>
+          </a:prstGeom>
+          <a:solidFill>
+            <a:srgbClr val="0E7C86"/>
+          </a:solidFill>
+          <a:ln>
+            <a:noFill/>
+          </a:ln>
+          <a:effectLst/>
+        </p:spPr>
+        <p:style>
+          <a:lnRef idx="1">
+            <a:schemeClr val="accent1"/>
+          </a:lnRef>
+          <a:fillRef idx="3">
+            <a:schemeClr val="accent1"/>
+          </a:fillRef>
+          <a:effectRef idx="2">
+            <a:schemeClr val="accent1"/>
+          </a:effectRef>
+          <a:fontRef idx="minor">
+            <a:schemeClr val="lt1"/>
+          </a:fontRef>
+        </p:style>
+        <p:txBody>
+          <a:bodyPr rtlCol="0" anchor="ctr"/>
+          <a:lstStyle/>
+          <a:p>
+            <a:pPr algn="ctr"/>
+          </a:p>
+        </p:txBody>
+      </p:sp>
+      <p:sp>
+        <p:nvSpPr>
+          <p:cNvPr id="9" name="TextBox 8"/>
+          <p:cNvSpPr txBox="1"/>
+          <p:nvPr/>
+        </p:nvSpPr>
+        <p:spPr>
+          <a:xfrm>
+            <a:off x="7612360" y="2017320"/>
+            <a:ext cx="945490" cy="240000"/>
+          </a:xfrm>
+          <a:prstGeom prst="rect">
+            <a:avLst/>
+          </a:prstGeom>
+          <a:noFill/>
+        </p:spPr>
+        <p:txBody>
+          <a:bodyPr wrap="square" anchor="ctr" lIns="0" rIns="0" tIns="0" bIns="0">
+            <a:spAutoFit/>
+          </a:bodyPr>
+          <a:lstStyle/>
+          <a:p>
+            <a:pPr algn="ctr"/>
+            <a:r>
+              <a:rPr sz="900" b="1">
+                <a:solidFill>
+                  <a:srgbClr val="0F2442"/>
+                </a:solidFill>
+                <a:latin typeface="Calibri"/>
+              </a:rPr>
+              <a:t>v0.1</a:t>
+            </a:r>
+          </a:p>
+        </p:txBody>
+      </p:sp>
+      <p:sp>
+        <p:nvSpPr>
+          <p:cNvPr id="10" name="Oval 9"/>
+          <p:cNvSpPr/>
+          <p:nvPr/>
+        </p:nvSpPr>
+        <p:spPr>
+          <a:xfrm>
+            <a:off x="9020595" y="1837320"/>
+            <a:ext cx="120000" cy="120000"/>
+          </a:xfrm>
+          <a:prstGeom prst="ellipse">
+            <a:avLst/>
+          </a:prstGeom>
+          <a:solidFill>
+            <a:srgbClr val="0E7C86"/>
+          </a:solidFill>
+          <a:ln>
+            <a:noFill/>
+          </a:ln>
+          <a:effectLst/>
+        </p:spPr>
+        <p:style>
+          <a:lnRef idx="1">
+            <a:schemeClr val="accent1"/>
+          </a:lnRef>
+          <a:fillRef idx="3">
+            <a:schemeClr val="accent1"/>
+          </a:fillRef>
+          <a:effectRef idx="2">
+            <a:schemeClr val="accent1"/>
+          </a:effectRef>
+          <a:fontRef idx="minor">
+            <a:schemeClr val="lt1"/>
+          </a:fontRef>
+        </p:style>
+        <p:txBody>
+          <a:bodyPr rtlCol="0" anchor="ctr"/>
+          <a:lstStyle/>
+          <a:p>
+            <a:pPr algn="ctr"/>
+          </a:p>
+        </p:txBody>
+      </p:sp>
+      <p:sp>
+        <p:nvSpPr>
+          <p:cNvPr id="11" name="TextBox 10"/>
+          <p:cNvSpPr txBox="1"/>
+          <p:nvPr/>
+        </p:nvSpPr>
+        <p:spPr>
+          <a:xfrm>
+            <a:off x="8607850" y="2017320"/>
+            <a:ext cx="945490" cy="240000"/>
+          </a:xfrm>
+          <a:prstGeom prst="rect">
+            <a:avLst/>
+          </a:prstGeom>
+          <a:noFill/>
+        </p:spPr>
+        <p:txBody>
+          <a:bodyPr wrap="square" anchor="ctr" lIns="0" rIns="0" tIns="0" bIns="0">
+            <a:spAutoFit/>
+          </a:bodyPr>
+          <a:lstStyle/>
+          <a:p>
+            <a:pPr algn="ctr"/>
+            <a:r>
+              <a:rPr sz="900" b="1">
+                <a:solidFill>
+                  <a:srgbClr val="0F2442"/>
+                </a:solidFill>
+                <a:latin typeface="Calibri"/>
+              </a:rPr>
+              <a:t>v1.1</a:t>
+            </a:r>
+          </a:p>
+        </p:txBody>
+      </p:sp>
+      <p:sp>
+        <p:nvSpPr>
+          <p:cNvPr id="12" name="Oval 11"/>
+          <p:cNvSpPr/>
+          <p:nvPr/>
+        </p:nvSpPr>
+        <p:spPr>
+          <a:xfrm>
+            <a:off x="10016085" y="1837320"/>
+            <a:ext cx="120000" cy="120000"/>
+          </a:xfrm>
+          <a:prstGeom prst="ellipse">
+            <a:avLst/>
+          </a:prstGeom>
+          <a:solidFill>
+            <a:srgbClr val="0E7C86"/>
+          </a:solidFill>
+          <a:ln>
+            <a:noFill/>
+          </a:ln>
+          <a:effectLst/>
+        </p:spPr>
+        <p:style>
+          <a:lnRef idx="1">
+            <a:schemeClr val="accent1"/>
+          </a:lnRef>
+          <a:fillRef idx="3">
+            <a:schemeClr val="accent1"/>
+          </a:fillRef>
+          <a:effectRef idx="2">
+            <a:schemeClr val="accent1"/>
+          </a:effectRef>
+          <a:fontRef idx="minor">
+            <a:schemeClr val="lt1"/>
+          </a:fontRef>
+        </p:style>
+        <p:txBody>
+          <a:bodyPr rtlCol="0" anchor="ctr"/>
+          <a:lstStyle/>
+          <a:p>
+            <a:pPr algn="ctr"/>
+          </a:p>
+        </p:txBody>
+      </p:sp>
+      <p:sp>
+        <p:nvSpPr>
+          <p:cNvPr id="13" name="TextBox 12"/>
+          <p:cNvSpPr txBox="1"/>
+          <p:nvPr/>
+        </p:nvSpPr>
+        <p:spPr>
+          <a:xfrm>
+            <a:off x="9603340" y="2017320"/>
+            <a:ext cx="945490" cy="240000"/>
+          </a:xfrm>
+          <a:prstGeom prst="rect">
+            <a:avLst/>
+          </a:prstGeom>
+          <a:noFill/>
+        </p:spPr>
+        <p:txBody>
+          <a:bodyPr wrap="square" anchor="ctr" lIns="0" rIns="0" tIns="0" bIns="0">
+            <a:spAutoFit/>
+          </a:bodyPr>
+          <a:lstStyle/>
+          <a:p>
+            <a:pPr algn="ctr"/>
+            <a:r>
+              <a:rPr sz="900" b="1">
+                <a:solidFill>
+                  <a:srgbClr val="0F2442"/>
+                </a:solidFill>
+                <a:latin typeface="Calibri"/>
+              </a:rPr>
+              <a:t>v2.0.0</a:t>
+            </a:r>
+          </a:p>
+        </p:txBody>
+      </p:sp>
+      <p:sp>
+        <p:nvSpPr>
+          <p:cNvPr id="14" name="Oval 13"/>
+          <p:cNvSpPr/>
+          <p:nvPr/>
+        </p:nvSpPr>
+        <p:spPr>
+          <a:xfrm>
+            <a:off x="11011575" y="1837320"/>
+            <a:ext cx="120000" cy="120000"/>
+          </a:xfrm>
+          <a:prstGeom prst="ellipse">
+            <a:avLst/>
+          </a:prstGeom>
+          <a:solidFill>
+            <a:srgbClr val="0F2442"/>
+          </a:solidFill>
+          <a:ln>
+            <a:noFill/>
+          </a:ln>
+          <a:effectLst/>
+        </p:spPr>
+        <p:style>
+          <a:lnRef idx="1">
+            <a:schemeClr val="accent1"/>
+          </a:lnRef>
+          <a:fillRef idx="3">
+            <a:schemeClr val="accent1"/>
+          </a:fillRef>
+          <a:effectRef idx="2">
+            <a:schemeClr val="accent1"/>
+          </a:effectRef>
+          <a:fontRef idx="minor">
+            <a:schemeClr val="lt1"/>
+          </a:fontRef>
+        </p:style>
+        <p:txBody>
+          <a:bodyPr rtlCol="0" anchor="ctr"/>
+          <a:lstStyle/>
+          <a:p>
+            <a:pPr algn="ctr"/>
+          </a:p>
+        </p:txBody>
+      </p:sp>
+      <p:sp>
+        <p:nvSpPr>
+          <p:cNvPr id="15" name="TextBox 14"/>
+          <p:cNvSpPr txBox="1"/>
+          <p:nvPr/>
+        </p:nvSpPr>
+        <p:spPr>
+          <a:xfrm>
+            <a:off x="10598830" y="2017320"/>
+            <a:ext cx="945490" cy="240000"/>
+          </a:xfrm>
+          <a:prstGeom prst="rect">
+            <a:avLst/>
+          </a:prstGeom>
+          <a:noFill/>
+        </p:spPr>
+        <p:txBody>
+          <a:bodyPr wrap="square" anchor="ctr" lIns="0" rIns="0" tIns="0" bIns="0">
+            <a:spAutoFit/>
+          </a:bodyPr>
+          <a:lstStyle/>
+          <a:p>
+            <a:pPr algn="ctr"/>
+            <a:r>
+              <a:rPr sz="900" b="1">
+                <a:solidFill>
+                  <a:srgbClr val="0F2442"/>
+                </a:solidFill>
+                <a:latin typeface="Calibri"/>
+              </a:rPr>
+              <a:t>v2.4.1</a:t>
+            </a:r>
+          </a:p>
+        </p:txBody>
+      </p:sp>
+      <p:sp>
+        <p:nvSpPr>
+          <p:cNvPr id="16" name="TextBox 15"/>
+          <p:cNvSpPr txBox="1"/>
+          <p:nvPr/>
+        </p:nvSpPr>
+        <p:spPr>
+          <a:xfrm>
+            <a:off x="7612360" y="1577320"/>
+            <a:ext cx="3931960" cy="240000"/>
+          </a:xfrm>
+          <a:prstGeom prst="rect">
+            <a:avLst/>
+          </a:prstGeom>
+          <a:noFill/>
+        </p:spPr>
+        <p:txBody>
+          <a:bodyPr wrap="square" anchor="ctr" lIns="0" rIns="0" tIns="0" bIns="0">
+            <a:spAutoFit/>
+          </a:bodyPr>
+          <a:lstStyle/>
+          <a:p>
+            <a:pPr algn="ctr"/>
+            <a:r>
+              <a:rPr sz="1050" b="1">
                 <a:solidFill>
                   <a:srgbClr val="0E7C86"/>
                 </a:solidFill>
-              </a:defRPr>
-            </a:pPr>
-            <a:r>
-              <a:t>🗺  Diagram Suggestion</a:t>
-            </a:r>
-          </a:p>
-          <a:p>
-            <a:pPr>
-              <a:spcAft>
-                <a:spcPts val="200"/>
-              </a:spcAft>
-              <a:defRPr sz="1250">
-                <a:solidFill>
-                  <a:srgbClr val="5A4A1E"/>
-                </a:solidFill>
-              </a:defRPr>
-            </a:pPr>
-            <a:r>
-              <a:t>Icon-based obstacle-course metaphor: a simple horizontal path with 4–5 hurdle icons, each labeled with one challenge category.</a:t>
-            </a:r>
-          </a:p>
-          <a:p>
-            <a:pPr>
-              <a:spcBef>
-                <a:spcPts val="1400"/>
-              </a:spcBef>
-              <a:defRPr b="1" sz="1300">
+                <a:latin typeface="Calibri"/>
+              </a:rPr>
+              <a:t>Milestone → Release Timeline</a:t>
+            </a:r>
+          </a:p>
+        </p:txBody>
+      </p:sp>
+      <p:sp>
+        <p:nvSpPr>
+          <p:cNvPr id="18" name="TextBox 17"/>
+          <p:cNvSpPr txBox="1"/>
+          <p:nvPr/>
+        </p:nvSpPr>
+        <p:spPr>
+          <a:xfrm>
+            <a:off x="7612360" y="5913640"/>
+            <a:ext cx="3931960" cy="210000"/>
+          </a:xfrm>
+          <a:prstGeom prst="rect">
+            <a:avLst/>
+          </a:prstGeom>
+          <a:noFill/>
+        </p:spPr>
+        <p:txBody>
+          <a:bodyPr wrap="square" lIns="0" rIns="0" tIns="0" bIns="0">
+            <a:spAutoFit/>
+          </a:bodyPr>
+          <a:lstStyle/>
+          <a:p>
+            <a:pPr algn="ctr"/>
+            <a:r>
+              <a:rPr sz="900" b="1" i="0">
                 <a:solidFill>
                   <a:srgbClr val="0E7C86"/>
                 </a:solidFill>
-              </a:defRPr>
-            </a:pPr>
-            <a:r>
-              <a:t>✨  Animation</a:t>
-            </a:r>
-          </a:p>
-          <a:p>
-            <a:pPr>
-              <a:spcAft>
-                <a:spcPts val="200"/>
-              </a:spcAft>
-              <a:defRPr sz="1250">
-                <a:solidFill>
-                  <a:srgbClr val="5A4A1E"/>
-                </a:solidFill>
-              </a:defRPr>
-            </a:pPr>
-            <a:r>
-              <a:t>Appear on click per hurdle icon, so the presenter can speak to each briefly and move on without a wall of text.</a:t>
-            </a:r>
-          </a:p>
-        </p:txBody>
-      </p:sp>
+                <a:latin typeface="Calibri"/>
+              </a:rPr>
+              <a:t>github.com/mhr014-cmd/university-management-system</a:t>
+            </a:r>
+          </a:p>
+        </p:txBody>
+      </p:sp>
+      <p:pic>
+        <p:nvPicPr>
+          <p:cNvPr id="19" name="Picture 18" descr="github_repository.jpg"/>
+          <p:cNvPicPr>
+            <a:picLocks noChangeAspect="1"/>
+          </p:cNvPicPr>
+          <p:nvPr/>
+        </p:nvPicPr>
+        <p:blipFill>
+          <a:blip r:embed="rId3"/>
+          <a:stretch>
+            <a:fillRect/>
+          </a:stretch>
+        </p:blipFill>
+        <p:spPr>
+          <a:xfrm>
+            <a:off x="7612360" y="3699052"/>
+            <a:ext cx="3931960" cy="2072541"/>
+          </a:xfrm>
+          <a:prstGeom prst="rect">
+            <a:avLst/>
+          </a:prstGeom>
+          <a:ln w="9525">
+            <a:solidFill>
+              <a:srgbClr val="D8CEA8"/>
+            </a:solidFill>
+          </a:ln>
+        </p:spPr>
+      </p:pic>
     </p:spTree>
   </p:cSld>
   <p:clrMapOvr>
@@ -9743,83 +12060,363 @@
                 </a:solidFill>
               </a:defRPr>
             </a:pPr>
-            <a:r>
-              <a:t>📷  Recommended Screenshot</a:t>
-            </a:r>
-          </a:p>
-          <a:p>
-            <a:pPr>
-              <a:spcAft>
-                <a:spcPts val="200"/>
-              </a:spcAft>
-              <a:defRPr sz="1250">
+          </a:p>
+        </p:txBody>
+      </p:sp>
+      <p:sp>
+        <p:nvSpPr>
+          <p:cNvPr id="7" name="TextBox 6"/>
+          <p:cNvSpPr txBox="1"/>
+          <p:nvPr/>
+        </p:nvSpPr>
+        <p:spPr>
+          <a:xfrm>
+            <a:off x="7612360" y="1577320"/>
+            <a:ext cx="3931960" cy="280000"/>
+          </a:xfrm>
+          <a:prstGeom prst="rect">
+            <a:avLst/>
+          </a:prstGeom>
+          <a:noFill/>
+        </p:spPr>
+        <p:txBody>
+          <a:bodyPr wrap="square" anchor="ctr" lIns="0" rIns="0" tIns="0" bIns="0">
+            <a:spAutoFit/>
+          </a:bodyPr>
+          <a:lstStyle/>
+          <a:p>
+            <a:pPr algn="ctr"/>
+            <a:r>
+              <a:rPr sz="1200" b="1">
+                <a:solidFill>
+                  <a:srgbClr val="0E7C86"/>
+                </a:solidFill>
+                <a:latin typeface="Calibri"/>
+              </a:rPr>
+              <a:t>Before ICT Education UMS</a:t>
+            </a:r>
+          </a:p>
+        </p:txBody>
+      </p:sp>
+      <p:sp>
+        <p:nvSpPr>
+          <p:cNvPr id="8" name="Rounded Rectangle 7"/>
+          <p:cNvSpPr/>
+          <p:nvPr/>
+        </p:nvSpPr>
+        <p:spPr>
+          <a:xfrm>
+            <a:off x="8162834" y="1917320"/>
+            <a:ext cx="2831011" cy="1248917"/>
+          </a:xfrm>
+          <a:prstGeom prst="roundRect">
+            <a:avLst/>
+          </a:prstGeom>
+          <a:solidFill>
+            <a:srgbClr val="FFFFFF"/>
+          </a:solidFill>
+          <a:ln w="12700">
+            <a:solidFill>
+              <a:srgbClr val="D8CEA8"/>
+            </a:solidFill>
+          </a:ln>
+          <a:effectLst/>
+        </p:spPr>
+        <p:style>
+          <a:lnRef idx="1">
+            <a:schemeClr val="accent1"/>
+          </a:lnRef>
+          <a:fillRef idx="3">
+            <a:schemeClr val="accent1"/>
+          </a:fillRef>
+          <a:effectRef idx="2">
+            <a:schemeClr val="accent1"/>
+          </a:effectRef>
+          <a:fontRef idx="minor">
+            <a:schemeClr val="lt1"/>
+          </a:fontRef>
+        </p:style>
+        <p:txBody>
+          <a:bodyPr rtlCol="0" anchor="ctr" wrap="square" lIns="45720" rIns="45720" tIns="18000" bIns="18000"/>
+          <a:lstStyle/>
+          <a:p>
+            <a:pPr algn="ctr"/>
+            <a:r>
+              <a:rPr sz="2000"/>
+              <a:t>📊</a:t>
+            </a:r>
+          </a:p>
+          <a:p>
+            <a:pPr algn="ctr"/>
+            <a:r>
+              <a:rPr sz="1000" b="1">
+                <a:solidFill>
+                  <a:srgbClr val="333333"/>
+                </a:solidFill>
+                <a:latin typeface="Calibri"/>
+              </a:rPr>
+              <a:t>Spreadsheets</a:t>
+            </a:r>
+            <a:br/>
+            <a:r>
+              <a:rPr sz="1000" b="0">
+                <a:solidFill>
+                  <a:srgbClr val="333333"/>
+                </a:solidFill>
+                <a:latin typeface="Calibri"/>
+              </a:rPr>
+              <a:t>(Attendance)</a:t>
+            </a:r>
+          </a:p>
+        </p:txBody>
+      </p:sp>
+      <p:sp>
+        <p:nvSpPr>
+          <p:cNvPr id="9" name="Rounded Rectangle 8"/>
+          <p:cNvSpPr/>
+          <p:nvPr/>
+        </p:nvSpPr>
+        <p:spPr>
+          <a:xfrm>
+            <a:off x="8162834" y="3256237"/>
+            <a:ext cx="2831011" cy="1248917"/>
+          </a:xfrm>
+          <a:prstGeom prst="roundRect">
+            <a:avLst/>
+          </a:prstGeom>
+          <a:solidFill>
+            <a:srgbClr val="FFFFFF"/>
+          </a:solidFill>
+          <a:ln w="12700">
+            <a:solidFill>
+              <a:srgbClr val="D8CEA8"/>
+            </a:solidFill>
+          </a:ln>
+          <a:effectLst/>
+        </p:spPr>
+        <p:style>
+          <a:lnRef idx="1">
+            <a:schemeClr val="accent1"/>
+          </a:lnRef>
+          <a:fillRef idx="3">
+            <a:schemeClr val="accent1"/>
+          </a:fillRef>
+          <a:effectRef idx="2">
+            <a:schemeClr val="accent1"/>
+          </a:effectRef>
+          <a:fontRef idx="minor">
+            <a:schemeClr val="lt1"/>
+          </a:fontRef>
+        </p:style>
+        <p:txBody>
+          <a:bodyPr rtlCol="0" anchor="ctr" wrap="square" lIns="45720" rIns="45720" tIns="18000" bIns="18000"/>
+          <a:lstStyle/>
+          <a:p>
+            <a:pPr algn="ctr"/>
+            <a:r>
+              <a:rPr sz="2000"/>
+              <a:t>📧</a:t>
+            </a:r>
+          </a:p>
+          <a:p>
+            <a:pPr algn="ctr"/>
+            <a:r>
+              <a:rPr sz="1000" b="1">
+                <a:solidFill>
+                  <a:srgbClr val="333333"/>
+                </a:solidFill>
+                <a:latin typeface="Calibri"/>
+              </a:rPr>
+              <a:t>Email threads</a:t>
+            </a:r>
+            <a:br/>
+            <a:r>
+              <a:rPr sz="1000" b="0">
+                <a:solidFill>
+                  <a:srgbClr val="333333"/>
+                </a:solidFill>
+                <a:latin typeface="Calibri"/>
+              </a:rPr>
+              <a:t>(Results)</a:t>
+            </a:r>
+          </a:p>
+        </p:txBody>
+      </p:sp>
+      <p:cxnSp>
+        <p:nvCxnSpPr>
+          <p:cNvPr id="10" name="Connector 9"/>
+          <p:cNvCxnSpPr/>
+          <p:nvPr/>
+        </p:nvCxnSpPr>
+        <p:spPr>
+          <a:xfrm>
+            <a:off x="9578339" y="3166237"/>
+            <a:ext cx="0" cy="90000"/>
+          </a:xfrm>
+          <a:prstGeom prst="line">
+            <a:avLst/>
+          </a:prstGeom>
+          <a:ln w="15875">
+            <a:solidFill>
+              <a:srgbClr val="D8CEA8"/>
+            </a:solidFill>
+            <a:prstDash val="dash"/>
+          </a:ln>
+        </p:spPr>
+        <p:style>
+          <a:lnRef idx="2">
+            <a:schemeClr val="accent1"/>
+          </a:lnRef>
+          <a:fillRef idx="0">
+            <a:schemeClr val="accent1"/>
+          </a:fillRef>
+          <a:effectRef idx="1">
+            <a:schemeClr val="accent1"/>
+          </a:effectRef>
+          <a:fontRef idx="minor">
+            <a:schemeClr val="tx1"/>
+          </a:fontRef>
+        </p:style>
+      </p:cxnSp>
+      <p:sp>
+        <p:nvSpPr>
+          <p:cNvPr id="11" name="Rounded Rectangle 10"/>
+          <p:cNvSpPr/>
+          <p:nvPr/>
+        </p:nvSpPr>
+        <p:spPr>
+          <a:xfrm>
+            <a:off x="8162834" y="4595154"/>
+            <a:ext cx="2831011" cy="1248917"/>
+          </a:xfrm>
+          <a:prstGeom prst="roundRect">
+            <a:avLst/>
+          </a:prstGeom>
+          <a:solidFill>
+            <a:srgbClr val="FFFFFF"/>
+          </a:solidFill>
+          <a:ln w="12700">
+            <a:solidFill>
+              <a:srgbClr val="D8CEA8"/>
+            </a:solidFill>
+          </a:ln>
+          <a:effectLst/>
+        </p:spPr>
+        <p:style>
+          <a:lnRef idx="1">
+            <a:schemeClr val="accent1"/>
+          </a:lnRef>
+          <a:fillRef idx="3">
+            <a:schemeClr val="accent1"/>
+          </a:fillRef>
+          <a:effectRef idx="2">
+            <a:schemeClr val="accent1"/>
+          </a:effectRef>
+          <a:fontRef idx="minor">
+            <a:schemeClr val="lt1"/>
+          </a:fontRef>
+        </p:style>
+        <p:txBody>
+          <a:bodyPr rtlCol="0" anchor="ctr" wrap="square" lIns="45720" rIns="45720" tIns="18000" bIns="18000"/>
+          <a:lstStyle/>
+          <a:p>
+            <a:pPr algn="ctr"/>
+            <a:r>
+              <a:rPr sz="2000"/>
+              <a:t>💰</a:t>
+            </a:r>
+          </a:p>
+          <a:p>
+            <a:pPr algn="ctr"/>
+            <a:r>
+              <a:rPr sz="1000" b="1">
+                <a:solidFill>
+                  <a:srgbClr val="333333"/>
+                </a:solidFill>
+                <a:latin typeface="Calibri"/>
+              </a:rPr>
+              <a:t>Separate finance tool</a:t>
+            </a:r>
+            <a:br/>
+            <a:r>
+              <a:rPr sz="1000" b="0">
+                <a:solidFill>
+                  <a:srgbClr val="333333"/>
+                </a:solidFill>
+                <a:latin typeface="Calibri"/>
+              </a:rPr>
+              <a:t>(Fees)</a:t>
+            </a:r>
+          </a:p>
+        </p:txBody>
+      </p:sp>
+      <p:cxnSp>
+        <p:nvCxnSpPr>
+          <p:cNvPr id="12" name="Connector 11"/>
+          <p:cNvCxnSpPr/>
+          <p:nvPr/>
+        </p:nvCxnSpPr>
+        <p:spPr>
+          <a:xfrm>
+            <a:off x="9578339" y="4505154"/>
+            <a:ext cx="0" cy="90000"/>
+          </a:xfrm>
+          <a:prstGeom prst="line">
+            <a:avLst/>
+          </a:prstGeom>
+          <a:ln w="15875">
+            <a:solidFill>
+              <a:srgbClr val="D8CEA8"/>
+            </a:solidFill>
+            <a:prstDash val="dash"/>
+          </a:ln>
+        </p:spPr>
+        <p:style>
+          <a:lnRef idx="2">
+            <a:schemeClr val="accent1"/>
+          </a:lnRef>
+          <a:fillRef idx="0">
+            <a:schemeClr val="accent1"/>
+          </a:fillRef>
+          <a:effectRef idx="1">
+            <a:schemeClr val="accent1"/>
+          </a:effectRef>
+          <a:fontRef idx="minor">
+            <a:schemeClr val="tx1"/>
+          </a:fontRef>
+        </p:style>
+      </p:cxnSp>
+      <p:sp>
+        <p:nvSpPr>
+          <p:cNvPr id="13" name="TextBox 12"/>
+          <p:cNvSpPr txBox="1"/>
+          <p:nvPr/>
+        </p:nvSpPr>
+        <p:spPr>
+          <a:xfrm>
+            <a:off x="7612360" y="5914071"/>
+            <a:ext cx="3931960" cy="210000"/>
+          </a:xfrm>
+          <a:prstGeom prst="rect">
+            <a:avLst/>
+          </a:prstGeom>
+          <a:noFill/>
+        </p:spPr>
+        <p:txBody>
+          <a:bodyPr wrap="square" lIns="0" rIns="0" tIns="0" bIns="0">
+            <a:spAutoFit/>
+          </a:bodyPr>
+          <a:lstStyle/>
+          <a:p>
+            <a:pPr algn="ctr"/>
+            <a:r>
+              <a:rPr sz="950" b="0" i="1">
                 <a:solidFill>
                   <a:srgbClr val="5A4A1E"/>
                 </a:solidFill>
-              </a:defRPr>
-            </a:pPr>
-            <a:r>
-              <a:t>None — this is a concept slide (no product screenshot).</a:t>
-            </a:r>
-          </a:p>
-          <a:p>
-            <a:pPr>
-              <a:spcBef>
-                <a:spcPts val="1400"/>
-              </a:spcBef>
-              <a:defRPr b="1" sz="1300">
-                <a:solidFill>
-                  <a:srgbClr val="0E7C86"/>
-                </a:solidFill>
-              </a:defRPr>
-            </a:pPr>
-            <a:r>
-              <a:t>🗺  Diagram Suggestion</a:t>
-            </a:r>
-          </a:p>
-          <a:p>
-            <a:pPr>
-              <a:spcAft>
-                <a:spcPts val="200"/>
-              </a:spcAft>
-              <a:defRPr sz="1250">
-                <a:solidFill>
-                  <a:srgbClr val="5A4A1E"/>
-                </a:solidFill>
-              </a:defRPr>
-            </a:pPr>
-            <a:r>
-              <a:t>Simple 'before' diagram: three disconnected icons (spreadsheet, email, finance app) with broken/dotted lines between them, labeled 'no single source of truth'.</a:t>
-            </a:r>
-          </a:p>
-          <a:p>
-            <a:pPr>
-              <a:spcBef>
-                <a:spcPts val="1400"/>
-              </a:spcBef>
-              <a:defRPr b="1" sz="1300">
-                <a:solidFill>
-                  <a:srgbClr val="0E7C86"/>
-                </a:solidFill>
-              </a:defRPr>
-            </a:pPr>
-            <a:r>
-              <a:t>✨  Animation</a:t>
-            </a:r>
-          </a:p>
-          <a:p>
-            <a:pPr>
-              <a:spcAft>
-                <a:spcPts val="200"/>
-              </a:spcAft>
-              <a:defRPr sz="1250">
-                <a:solidFill>
-                  <a:srgbClr val="5A4A1E"/>
-                </a:solidFill>
-              </a:defRPr>
-            </a:pPr>
-            <a:r>
-              <a:t>Fade-in each bullet one at a time (Appear, 0.3s) to let each consequence land before the next.</a:t>
+                <a:latin typeface="Calibri"/>
+              </a:rPr>
+              <a:t>No single source of truth</a:t>
             </a:r>
           </a:p>
         </p:txBody>
@@ -9966,7 +12563,7 @@
               </a:defRPr>
             </a:pPr>
             <a:r>
-              <a:t>Future Scope</a:t>
+              <a:t>Challenges Faced</a:t>
             </a:r>
           </a:p>
         </p:txBody>
@@ -10004,7 +12601,7 @@
               </a:defRPr>
             </a:pPr>
             <a:r>
-              <a:t>•  A shared, Redis-backed rate limiter to support horizontally-scaled deployment</a:t>
+              <a:t>•  Enforcing ownership, not just role, on every Parent-scoped endpoint (attendance, results, fees, exams, schedule)</a:t>
             </a:r>
           </a:p>
           <a:p>
@@ -10019,7 +12616,7 @@
               </a:defRPr>
             </a:pPr>
             <a:r>
-              <a:t>•  Email/SMS notification delivery channels, in addition to the existing in-app feed</a:t>
+              <a:t>•  Designing workflow state machines (exam, result, schedule-change) that reject invalid transitions cleanly</a:t>
             </a:r>
           </a:p>
           <a:p>
@@ -10034,7 +12631,7 @@
               </a:defRPr>
             </a:pPr>
             <a:r>
-              <a:t>•  A scheduled-task mechanism to support due-date reminders and other time-based triggers</a:t>
+              <a:t>•  Avoiding N+1 query patterns while keeping repositories free of business logic</a:t>
             </a:r>
           </a:p>
           <a:p>
@@ -10049,7 +12646,7 @@
               </a:defRPr>
             </a:pPr>
             <a:r>
-              <a:t>•  An overall (cross-semester) CGPA aggregate endpoint</a:t>
+              <a:t>•  Keeping derived figures (attendance %, GPA) always live rather than falling into caching for performance</a:t>
             </a:r>
           </a:p>
           <a:p>
@@ -10064,7 +12661,7 @@
               </a:defRPr>
             </a:pPr>
             <a:r>
-              <a:t>•  A Teacher-remarks field on the Result record, for narrative course-level feedback</a:t>
+              <a:t>•  Coordinating a strict layered architecture (Router/Service/Repository) across 11 growing domains</a:t>
             </a:r>
           </a:p>
           <a:p>
@@ -10079,7 +12676,7 @@
               </a:defRPr>
             </a:pPr>
             <a:r>
-              <a:t>•  A production-oriented Docker Compose profile (reverse proxy/TLS, managed database, multiple replicas)</a:t>
+              <a:t>•  Closing gaps found by later self-audits (e.g. a Parent endpoint with no ownership branch at all) without breaking existing behavior</a:t>
             </a:r>
           </a:p>
           <a:p>
@@ -10094,7 +12691,7 @@
               </a:defRPr>
             </a:pPr>
             <a:r>
-              <a:t>•  An in-app Parent-Teacher Communication/Messaging module, if required by a future scope decision</a:t>
+              <a:t>•  Balancing test coverage depth against an incremental, milestone-based delivery schedule</a:t>
             </a:r>
           </a:p>
         </p:txBody>
@@ -10151,83 +12748,475 @@
                 </a:solidFill>
               </a:defRPr>
             </a:pPr>
-            <a:r>
-              <a:t>📷  Recommended Screenshot</a:t>
-            </a:r>
-          </a:p>
-          <a:p>
-            <a:pPr>
-              <a:spcAft>
-                <a:spcPts val="200"/>
-              </a:spcAft>
-              <a:defRPr sz="1250">
-                <a:solidFill>
-                  <a:srgbClr val="5A4A1E"/>
-                </a:solidFill>
-              </a:defRPr>
-            </a:pPr>
-            <a:r>
-              <a:t>None — forward-looking slide.</a:t>
-            </a:r>
-          </a:p>
-          <a:p>
-            <a:pPr>
-              <a:spcBef>
-                <a:spcPts val="1400"/>
-              </a:spcBef>
-              <a:defRPr b="1" sz="1300">
+          </a:p>
+        </p:txBody>
+      </p:sp>
+      <p:sp>
+        <p:nvSpPr>
+          <p:cNvPr id="7" name="TextBox 6"/>
+          <p:cNvSpPr txBox="1"/>
+          <p:nvPr/>
+        </p:nvSpPr>
+        <p:spPr>
+          <a:xfrm>
+            <a:off x="7612360" y="1577320"/>
+            <a:ext cx="3931960" cy="260000"/>
+          </a:xfrm>
+          <a:prstGeom prst="rect">
+            <a:avLst/>
+          </a:prstGeom>
+          <a:noFill/>
+        </p:spPr>
+        <p:txBody>
+          <a:bodyPr wrap="square" anchor="ctr" lIns="0" rIns="0" tIns="0" bIns="0">
+            <a:spAutoFit/>
+          </a:bodyPr>
+          <a:lstStyle/>
+          <a:p>
+            <a:pPr algn="ctr"/>
+            <a:r>
+              <a:rPr sz="1200" b="1">
                 <a:solidFill>
                   <a:srgbClr val="0E7C86"/>
                 </a:solidFill>
-              </a:defRPr>
-            </a:pPr>
-            <a:r>
-              <a:t>🗺  Diagram Suggestion</a:t>
-            </a:r>
-          </a:p>
-          <a:p>
-            <a:pPr>
-              <a:spcAft>
-                <a:spcPts val="200"/>
-              </a:spcAft>
-              <a:defRPr sz="1250">
-                <a:solidFill>
-                  <a:srgbClr val="5A4A1E"/>
-                </a:solidFill>
-              </a:defRPr>
-            </a:pPr>
-            <a:r>
-              <a:t>Roadmap-style horizontal arrow with 3–4 future milestones plotted beyond 'v2.4.1 (Today)', unlabeled dates (e.g. 'Next', 'Later').</a:t>
-            </a:r>
-          </a:p>
-          <a:p>
-            <a:pPr>
-              <a:spcBef>
-                <a:spcPts val="1400"/>
-              </a:spcBef>
-              <a:defRPr b="1" sz="1300">
-                <a:solidFill>
-                  <a:srgbClr val="0E7C86"/>
-                </a:solidFill>
-              </a:defRPr>
-            </a:pPr>
-            <a:r>
-              <a:t>✨  Animation</a:t>
-            </a:r>
-          </a:p>
-          <a:p>
-            <a:pPr>
-              <a:spcAft>
-                <a:spcPts val="200"/>
-              </a:spcAft>
-              <a:defRPr sz="1250">
-                <a:solidFill>
-                  <a:srgbClr val="5A4A1E"/>
-                </a:solidFill>
-              </a:defRPr>
-            </a:pPr>
-            <a:r>
-              <a:t>Appear on click, each future item revealed in priority order.</a:t>
+                <a:latin typeface="Calibri"/>
+              </a:rPr>
+              <a:t>Obstacles Cleared</a:t>
+            </a:r>
+          </a:p>
+        </p:txBody>
+      </p:sp>
+      <p:cxnSp>
+        <p:nvCxnSpPr>
+          <p:cNvPr id="8" name="Connector 7"/>
+          <p:cNvCxnSpPr/>
+          <p:nvPr/>
+        </p:nvCxnSpPr>
+        <p:spPr>
+          <a:xfrm>
+            <a:off x="7981556" y="2477320"/>
+            <a:ext cx="3193568" cy="0"/>
+          </a:xfrm>
+          <a:prstGeom prst="line">
+            <a:avLst/>
+          </a:prstGeom>
+          <a:ln w="25400">
+            <a:solidFill>
+              <a:srgbClr val="D8CEA8"/>
+            </a:solidFill>
+          </a:ln>
+        </p:spPr>
+        <p:style>
+          <a:lnRef idx="2">
+            <a:schemeClr val="accent1"/>
+          </a:lnRef>
+          <a:fillRef idx="0">
+            <a:schemeClr val="accent1"/>
+          </a:fillRef>
+          <a:effectRef idx="1">
+            <a:schemeClr val="accent1"/>
+          </a:effectRef>
+          <a:fontRef idx="minor">
+            <a:schemeClr val="tx1"/>
+          </a:fontRef>
+        </p:style>
+      </p:cxnSp>
+      <p:sp>
+        <p:nvSpPr>
+          <p:cNvPr id="9" name="Isosceles Triangle 8"/>
+          <p:cNvSpPr/>
+          <p:nvPr/>
+        </p:nvSpPr>
+        <p:spPr>
+          <a:xfrm>
+            <a:off x="7851556" y="1917320"/>
+            <a:ext cx="260000" cy="560000"/>
+          </a:xfrm>
+          <a:prstGeom prst="triangle">
+            <a:avLst/>
+          </a:prstGeom>
+          <a:solidFill>
+            <a:srgbClr val="5A4A1E"/>
+          </a:solidFill>
+          <a:ln>
+            <a:noFill/>
+          </a:ln>
+          <a:effectLst/>
+        </p:spPr>
+        <p:style>
+          <a:lnRef idx="1">
+            <a:schemeClr val="accent1"/>
+          </a:lnRef>
+          <a:fillRef idx="3">
+            <a:schemeClr val="accent1"/>
+          </a:fillRef>
+          <a:effectRef idx="2">
+            <a:schemeClr val="accent1"/>
+          </a:effectRef>
+          <a:fontRef idx="minor">
+            <a:schemeClr val="lt1"/>
+          </a:fontRef>
+        </p:style>
+        <p:txBody>
+          <a:bodyPr rtlCol="0" anchor="ctr"/>
+          <a:lstStyle/>
+          <a:p>
+            <a:pPr algn="ctr"/>
+          </a:p>
+        </p:txBody>
+      </p:sp>
+      <p:sp>
+        <p:nvSpPr>
+          <p:cNvPr id="10" name="TextBox 9"/>
+          <p:cNvSpPr txBox="1"/>
+          <p:nvPr/>
+        </p:nvSpPr>
+        <p:spPr>
+          <a:xfrm>
+            <a:off x="7612360" y="2597320"/>
+            <a:ext cx="738392" cy="560000"/>
+          </a:xfrm>
+          <a:prstGeom prst="rect">
+            <a:avLst/>
+          </a:prstGeom>
+          <a:noFill/>
+        </p:spPr>
+        <p:txBody>
+          <a:bodyPr wrap="square" anchor="ctr" lIns="0" rIns="0" tIns="0" bIns="0">
+            <a:spAutoFit/>
+          </a:bodyPr>
+          <a:lstStyle/>
+          <a:p>
+            <a:pPr algn="ctr"/>
+            <a:r>
+              <a:rPr sz="850" b="1">
+                <a:solidFill>
+                  <a:srgbClr val="333333"/>
+                </a:solidFill>
+                <a:latin typeface="Calibri"/>
+              </a:rPr>
+              <a:t>Ownership
+vs. Role</a:t>
+            </a:r>
+          </a:p>
+        </p:txBody>
+      </p:sp>
+      <p:sp>
+        <p:nvSpPr>
+          <p:cNvPr id="11" name="Isosceles Triangle 10"/>
+          <p:cNvSpPr/>
+          <p:nvPr/>
+        </p:nvSpPr>
+        <p:spPr>
+          <a:xfrm>
+            <a:off x="8649948" y="1917320"/>
+            <a:ext cx="260000" cy="560000"/>
+          </a:xfrm>
+          <a:prstGeom prst="triangle">
+            <a:avLst/>
+          </a:prstGeom>
+          <a:solidFill>
+            <a:srgbClr val="5A4A1E"/>
+          </a:solidFill>
+          <a:ln>
+            <a:noFill/>
+          </a:ln>
+          <a:effectLst/>
+        </p:spPr>
+        <p:style>
+          <a:lnRef idx="1">
+            <a:schemeClr val="accent1"/>
+          </a:lnRef>
+          <a:fillRef idx="3">
+            <a:schemeClr val="accent1"/>
+          </a:fillRef>
+          <a:effectRef idx="2">
+            <a:schemeClr val="accent1"/>
+          </a:effectRef>
+          <a:fontRef idx="minor">
+            <a:schemeClr val="lt1"/>
+          </a:fontRef>
+        </p:style>
+        <p:txBody>
+          <a:bodyPr rtlCol="0" anchor="ctr"/>
+          <a:lstStyle/>
+          <a:p>
+            <a:pPr algn="ctr"/>
+          </a:p>
+        </p:txBody>
+      </p:sp>
+      <p:sp>
+        <p:nvSpPr>
+          <p:cNvPr id="12" name="TextBox 11"/>
+          <p:cNvSpPr txBox="1"/>
+          <p:nvPr/>
+        </p:nvSpPr>
+        <p:spPr>
+          <a:xfrm>
+            <a:off x="8410752" y="2597320"/>
+            <a:ext cx="738392" cy="560000"/>
+          </a:xfrm>
+          <a:prstGeom prst="rect">
+            <a:avLst/>
+          </a:prstGeom>
+          <a:noFill/>
+        </p:spPr>
+        <p:txBody>
+          <a:bodyPr wrap="square" anchor="ctr" lIns="0" rIns="0" tIns="0" bIns="0">
+            <a:spAutoFit/>
+          </a:bodyPr>
+          <a:lstStyle/>
+          <a:p>
+            <a:pPr algn="ctr"/>
+            <a:r>
+              <a:rPr sz="850" b="1">
+                <a:solidFill>
+                  <a:srgbClr val="333333"/>
+                </a:solidFill>
+                <a:latin typeface="Calibri"/>
+              </a:rPr>
+              <a:t>State
+Machines</a:t>
+            </a:r>
+          </a:p>
+        </p:txBody>
+      </p:sp>
+      <p:sp>
+        <p:nvSpPr>
+          <p:cNvPr id="13" name="Isosceles Triangle 12"/>
+          <p:cNvSpPr/>
+          <p:nvPr/>
+        </p:nvSpPr>
+        <p:spPr>
+          <a:xfrm>
+            <a:off x="9448340" y="1917320"/>
+            <a:ext cx="260000" cy="560000"/>
+          </a:xfrm>
+          <a:prstGeom prst="triangle">
+            <a:avLst/>
+          </a:prstGeom>
+          <a:solidFill>
+            <a:srgbClr val="5A4A1E"/>
+          </a:solidFill>
+          <a:ln>
+            <a:noFill/>
+          </a:ln>
+          <a:effectLst/>
+        </p:spPr>
+        <p:style>
+          <a:lnRef idx="1">
+            <a:schemeClr val="accent1"/>
+          </a:lnRef>
+          <a:fillRef idx="3">
+            <a:schemeClr val="accent1"/>
+          </a:fillRef>
+          <a:effectRef idx="2">
+            <a:schemeClr val="accent1"/>
+          </a:effectRef>
+          <a:fontRef idx="minor">
+            <a:schemeClr val="lt1"/>
+          </a:fontRef>
+        </p:style>
+        <p:txBody>
+          <a:bodyPr rtlCol="0" anchor="ctr"/>
+          <a:lstStyle/>
+          <a:p>
+            <a:pPr algn="ctr"/>
+          </a:p>
+        </p:txBody>
+      </p:sp>
+      <p:sp>
+        <p:nvSpPr>
+          <p:cNvPr id="14" name="TextBox 13"/>
+          <p:cNvSpPr txBox="1"/>
+          <p:nvPr/>
+        </p:nvSpPr>
+        <p:spPr>
+          <a:xfrm>
+            <a:off x="9209144" y="2597320"/>
+            <a:ext cx="738392" cy="560000"/>
+          </a:xfrm>
+          <a:prstGeom prst="rect">
+            <a:avLst/>
+          </a:prstGeom>
+          <a:noFill/>
+        </p:spPr>
+        <p:txBody>
+          <a:bodyPr wrap="square" anchor="ctr" lIns="0" rIns="0" tIns="0" bIns="0">
+            <a:spAutoFit/>
+          </a:bodyPr>
+          <a:lstStyle/>
+          <a:p>
+            <a:pPr algn="ctr"/>
+            <a:r>
+              <a:rPr sz="850" b="1">
+                <a:solidFill>
+                  <a:srgbClr val="333333"/>
+                </a:solidFill>
+                <a:latin typeface="Calibri"/>
+              </a:rPr>
+              <a:t>N+1
+Queries</a:t>
+            </a:r>
+          </a:p>
+        </p:txBody>
+      </p:sp>
+      <p:sp>
+        <p:nvSpPr>
+          <p:cNvPr id="15" name="Isosceles Triangle 14"/>
+          <p:cNvSpPr/>
+          <p:nvPr/>
+        </p:nvSpPr>
+        <p:spPr>
+          <a:xfrm>
+            <a:off x="10246732" y="1917320"/>
+            <a:ext cx="260000" cy="560000"/>
+          </a:xfrm>
+          <a:prstGeom prst="triangle">
+            <a:avLst/>
+          </a:prstGeom>
+          <a:solidFill>
+            <a:srgbClr val="5A4A1E"/>
+          </a:solidFill>
+          <a:ln>
+            <a:noFill/>
+          </a:ln>
+          <a:effectLst/>
+        </p:spPr>
+        <p:style>
+          <a:lnRef idx="1">
+            <a:schemeClr val="accent1"/>
+          </a:lnRef>
+          <a:fillRef idx="3">
+            <a:schemeClr val="accent1"/>
+          </a:fillRef>
+          <a:effectRef idx="2">
+            <a:schemeClr val="accent1"/>
+          </a:effectRef>
+          <a:fontRef idx="minor">
+            <a:schemeClr val="lt1"/>
+          </a:fontRef>
+        </p:style>
+        <p:txBody>
+          <a:bodyPr rtlCol="0" anchor="ctr"/>
+          <a:lstStyle/>
+          <a:p>
+            <a:pPr algn="ctr"/>
+          </a:p>
+        </p:txBody>
+      </p:sp>
+      <p:sp>
+        <p:nvSpPr>
+          <p:cNvPr id="16" name="TextBox 15"/>
+          <p:cNvSpPr txBox="1"/>
+          <p:nvPr/>
+        </p:nvSpPr>
+        <p:spPr>
+          <a:xfrm>
+            <a:off x="10007536" y="2597320"/>
+            <a:ext cx="738392" cy="560000"/>
+          </a:xfrm>
+          <a:prstGeom prst="rect">
+            <a:avLst/>
+          </a:prstGeom>
+          <a:noFill/>
+        </p:spPr>
+        <p:txBody>
+          <a:bodyPr wrap="square" anchor="ctr" lIns="0" rIns="0" tIns="0" bIns="0">
+            <a:spAutoFit/>
+          </a:bodyPr>
+          <a:lstStyle/>
+          <a:p>
+            <a:pPr algn="ctr"/>
+            <a:r>
+              <a:rPr sz="850" b="1">
+                <a:solidFill>
+                  <a:srgbClr val="333333"/>
+                </a:solidFill>
+                <a:latin typeface="Calibri"/>
+              </a:rPr>
+              <a:t>Live
+Figures</a:t>
+            </a:r>
+          </a:p>
+        </p:txBody>
+      </p:sp>
+      <p:sp>
+        <p:nvSpPr>
+          <p:cNvPr id="17" name="Isosceles Triangle 16"/>
+          <p:cNvSpPr/>
+          <p:nvPr/>
+        </p:nvSpPr>
+        <p:spPr>
+          <a:xfrm>
+            <a:off x="11045124" y="1917320"/>
+            <a:ext cx="260000" cy="560000"/>
+          </a:xfrm>
+          <a:prstGeom prst="triangle">
+            <a:avLst/>
+          </a:prstGeom>
+          <a:solidFill>
+            <a:srgbClr val="5A4A1E"/>
+          </a:solidFill>
+          <a:ln>
+            <a:noFill/>
+          </a:ln>
+          <a:effectLst/>
+        </p:spPr>
+        <p:style>
+          <a:lnRef idx="1">
+            <a:schemeClr val="accent1"/>
+          </a:lnRef>
+          <a:fillRef idx="3">
+            <a:schemeClr val="accent1"/>
+          </a:fillRef>
+          <a:effectRef idx="2">
+            <a:schemeClr val="accent1"/>
+          </a:effectRef>
+          <a:fontRef idx="minor">
+            <a:schemeClr val="lt1"/>
+          </a:fontRef>
+        </p:style>
+        <p:txBody>
+          <a:bodyPr rtlCol="0" anchor="ctr"/>
+          <a:lstStyle/>
+          <a:p>
+            <a:pPr algn="ctr"/>
+          </a:p>
+        </p:txBody>
+      </p:sp>
+      <p:sp>
+        <p:nvSpPr>
+          <p:cNvPr id="18" name="TextBox 17"/>
+          <p:cNvSpPr txBox="1"/>
+          <p:nvPr/>
+        </p:nvSpPr>
+        <p:spPr>
+          <a:xfrm>
+            <a:off x="10805928" y="2597320"/>
+            <a:ext cx="738392" cy="560000"/>
+          </a:xfrm>
+          <a:prstGeom prst="rect">
+            <a:avLst/>
+          </a:prstGeom>
+          <a:noFill/>
+        </p:spPr>
+        <p:txBody>
+          <a:bodyPr wrap="square" anchor="ctr" lIns="0" rIns="0" tIns="0" bIns="0">
+            <a:spAutoFit/>
+          </a:bodyPr>
+          <a:lstStyle/>
+          <a:p>
+            <a:pPr algn="ctr"/>
+            <a:r>
+              <a:rPr sz="850" b="1">
+                <a:solidFill>
+                  <a:srgbClr val="333333"/>
+                </a:solidFill>
+                <a:latin typeface="Calibri"/>
+              </a:rPr>
+              <a:t>Layered
+Architecture</a:t>
             </a:r>
           </a:p>
         </p:txBody>
@@ -10374,7 +13363,7 @@
               </a:defRPr>
             </a:pPr>
             <a:r>
-              <a:t>Conclusion</a:t>
+              <a:t>Future Scope</a:t>
             </a:r>
           </a:p>
         </p:txBody>
@@ -10412,7 +13401,7 @@
               </a:defRPr>
             </a:pPr>
             <a:r>
-              <a:t>•  Delivers a complete, verifiably working replacement for fragmented spreadsheet/email/finance-tool tracking</a:t>
+              <a:t>•  A shared, Redis-backed rate limiter to support horizontally-scaled deployment</a:t>
             </a:r>
           </a:p>
           <a:p>
@@ -10427,7 +13416,7 @@
               </a:defRPr>
             </a:pPr>
             <a:r>
-              <a:t>•  Every functional requirement from the original proposal was implemented and tested</a:t>
+              <a:t>•  Email/SMS notification delivery channels, in addition to the existing in-app feed</a:t>
             </a:r>
           </a:p>
           <a:p>
@@ -10442,7 +13431,7 @@
               </a:defRPr>
             </a:pPr>
             <a:r>
-              <a:t>•  Every access-control boundary is enforced server-side and explicitly, negatively tested</a:t>
+              <a:t>•  A scheduled-task mechanism to support due-date reminders and other time-based triggers</a:t>
             </a:r>
           </a:p>
           <a:p>
@@ -10457,7 +13446,7 @@
               </a:defRPr>
             </a:pPr>
             <a:r>
-              <a:t>•  Every derived figure is computed live — never cached or duplicated</a:t>
+              <a:t>•  An overall (cross-semester) CGPA aggregate endpoint</a:t>
             </a:r>
           </a:p>
           <a:p>
@@ -10472,7 +13461,7 @@
               </a:defRPr>
             </a:pPr>
             <a:r>
-              <a:t>•  11 backend domains, 82 endpoints, 26 tables, kept maintainable by a strict layered architecture</a:t>
+              <a:t>•  A Teacher-remarks field on the Result record, for narrative course-level feedback</a:t>
             </a:r>
           </a:p>
           <a:p>
@@ -10487,7 +13476,7 @@
               </a:defRPr>
             </a:pPr>
             <a:r>
-              <a:t>•  549 automated tests, run continuously via CI, give confidence beyond manual inspection alone</a:t>
+              <a:t>•  A production-oriented Docker Compose profile (reverse proxy/TLS, managed database, multiple replicas)</a:t>
             </a:r>
           </a:p>
           <a:p>
@@ -10502,7 +13491,7 @@
               </a:defRPr>
             </a:pPr>
             <a:r>
-              <a:t>•  Deliberately unbuilt capabilities are documented, not silently omitted</a:t>
+              <a:t>•  An in-app Parent-Teacher Communication/Messaging module, if required by a future scope decision</a:t>
             </a:r>
           </a:p>
         </p:txBody>
@@ -10559,83 +13548,301 @@
                 </a:solidFill>
               </a:defRPr>
             </a:pPr>
-            <a:r>
-              <a:t>📷  Recommended Screenshot</a:t>
-            </a:r>
-          </a:p>
-          <a:p>
-            <a:pPr>
-              <a:spcAft>
-                <a:spcPts val="200"/>
-              </a:spcAft>
-              <a:defRPr sz="1250">
+          </a:p>
+        </p:txBody>
+      </p:sp>
+      <p:sp>
+        <p:nvSpPr>
+          <p:cNvPr id="7" name="TextBox 6"/>
+          <p:cNvSpPr txBox="1"/>
+          <p:nvPr/>
+        </p:nvSpPr>
+        <p:spPr>
+          <a:xfrm>
+            <a:off x="7612360" y="1577320"/>
+            <a:ext cx="3931960" cy="260000"/>
+          </a:xfrm>
+          <a:prstGeom prst="rect">
+            <a:avLst/>
+          </a:prstGeom>
+          <a:noFill/>
+        </p:spPr>
+        <p:txBody>
+          <a:bodyPr wrap="square" anchor="ctr" lIns="0" rIns="0" tIns="0" bIns="0">
+            <a:spAutoFit/>
+          </a:bodyPr>
+          <a:lstStyle/>
+          <a:p>
+            <a:pPr algn="ctr"/>
+            <a:r>
+              <a:rPr sz="1200" b="1">
+                <a:solidFill>
+                  <a:srgbClr val="0E7C86"/>
+                </a:solidFill>
+                <a:latin typeface="Calibri"/>
+              </a:rPr>
+              <a:t>Roadmap Beyond v2.4.1</a:t>
+            </a:r>
+          </a:p>
+        </p:txBody>
+      </p:sp>
+      <p:sp>
+        <p:nvSpPr>
+          <p:cNvPr id="8" name="Right Arrow 7"/>
+          <p:cNvSpPr/>
+          <p:nvPr/>
+        </p:nvSpPr>
+        <p:spPr>
+          <a:xfrm>
+            <a:off x="7612360" y="2927320"/>
+            <a:ext cx="3931960" cy="520000"/>
+          </a:xfrm>
+          <a:prstGeom prst="rightArrow">
+            <a:avLst/>
+          </a:prstGeom>
+          <a:solidFill>
+            <a:srgbClr val="DDEEEF"/>
+          </a:solidFill>
+          <a:ln w="12700">
+            <a:solidFill>
+              <a:srgbClr val="0E7C86"/>
+            </a:solidFill>
+          </a:ln>
+          <a:effectLst/>
+        </p:spPr>
+        <p:style>
+          <a:lnRef idx="1">
+            <a:schemeClr val="accent1"/>
+          </a:lnRef>
+          <a:fillRef idx="3">
+            <a:schemeClr val="accent1"/>
+          </a:fillRef>
+          <a:effectRef idx="2">
+            <a:schemeClr val="accent1"/>
+          </a:effectRef>
+          <a:fontRef idx="minor">
+            <a:schemeClr val="lt1"/>
+          </a:fontRef>
+        </p:style>
+        <p:txBody>
+          <a:bodyPr rtlCol="0" anchor="ctr"/>
+          <a:lstStyle/>
+          <a:p>
+            <a:pPr algn="ctr"/>
+          </a:p>
+        </p:txBody>
+      </p:sp>
+      <p:sp>
+        <p:nvSpPr>
+          <p:cNvPr id="9" name="TextBox 8"/>
+          <p:cNvSpPr txBox="1"/>
+          <p:nvPr/>
+        </p:nvSpPr>
+        <p:spPr>
+          <a:xfrm>
+            <a:off x="7690999" y="2967320"/>
+            <a:ext cx="676297" cy="440000"/>
+          </a:xfrm>
+          <a:prstGeom prst="rect">
+            <a:avLst/>
+          </a:prstGeom>
+          <a:noFill/>
+        </p:spPr>
+        <p:txBody>
+          <a:bodyPr wrap="square" anchor="ctr" lIns="0" rIns="0" tIns="0" bIns="0">
+            <a:spAutoFit/>
+          </a:bodyPr>
+          <a:lstStyle/>
+          <a:p>
+            <a:pPr algn="ctr"/>
+            <a:r>
+              <a:rPr sz="850" b="1">
+                <a:solidFill>
+                  <a:srgbClr val="0F2442"/>
+                </a:solidFill>
+                <a:latin typeface="Calibri"/>
+              </a:rPr>
+              <a:t>v2.4.1
+(Today)</a:t>
+            </a:r>
+          </a:p>
+        </p:txBody>
+      </p:sp>
+      <p:sp>
+        <p:nvSpPr>
+          <p:cNvPr id="10" name="TextBox 9"/>
+          <p:cNvSpPr txBox="1"/>
+          <p:nvPr/>
+        </p:nvSpPr>
+        <p:spPr>
+          <a:xfrm>
+            <a:off x="8367296" y="2967320"/>
+            <a:ext cx="676297" cy="440000"/>
+          </a:xfrm>
+          <a:prstGeom prst="rect">
+            <a:avLst/>
+          </a:prstGeom>
+          <a:noFill/>
+        </p:spPr>
+        <p:txBody>
+          <a:bodyPr wrap="square" anchor="ctr" lIns="0" rIns="0" tIns="0" bIns="0">
+            <a:spAutoFit/>
+          </a:bodyPr>
+          <a:lstStyle/>
+          <a:p>
+            <a:pPr algn="ctr"/>
+            <a:r>
+              <a:rPr sz="850" b="0">
+                <a:solidFill>
+                  <a:srgbClr val="333333"/>
+                </a:solidFill>
+                <a:latin typeface="Calibri"/>
+              </a:rPr>
+              <a:t>Rate Limiter
++ Redis</a:t>
+            </a:r>
+          </a:p>
+        </p:txBody>
+      </p:sp>
+      <p:sp>
+        <p:nvSpPr>
+          <p:cNvPr id="11" name="TextBox 10"/>
+          <p:cNvSpPr txBox="1"/>
+          <p:nvPr/>
+        </p:nvSpPr>
+        <p:spPr>
+          <a:xfrm>
+            <a:off x="9043593" y="2967320"/>
+            <a:ext cx="676297" cy="440000"/>
+          </a:xfrm>
+          <a:prstGeom prst="rect">
+            <a:avLst/>
+          </a:prstGeom>
+          <a:noFill/>
+        </p:spPr>
+        <p:txBody>
+          <a:bodyPr wrap="square" anchor="ctr" lIns="0" rIns="0" tIns="0" bIns="0">
+            <a:spAutoFit/>
+          </a:bodyPr>
+          <a:lstStyle/>
+          <a:p>
+            <a:pPr algn="ctr"/>
+            <a:r>
+              <a:rPr sz="850" b="0">
+                <a:solidFill>
+                  <a:srgbClr val="333333"/>
+                </a:solidFill>
+                <a:latin typeface="Calibri"/>
+              </a:rPr>
+              <a:t>Email / SMS
+Channel</a:t>
+            </a:r>
+          </a:p>
+        </p:txBody>
+      </p:sp>
+      <p:sp>
+        <p:nvSpPr>
+          <p:cNvPr id="12" name="TextBox 11"/>
+          <p:cNvSpPr txBox="1"/>
+          <p:nvPr/>
+        </p:nvSpPr>
+        <p:spPr>
+          <a:xfrm>
+            <a:off x="9719890" y="2967320"/>
+            <a:ext cx="676297" cy="440000"/>
+          </a:xfrm>
+          <a:prstGeom prst="rect">
+            <a:avLst/>
+          </a:prstGeom>
+          <a:noFill/>
+        </p:spPr>
+        <p:txBody>
+          <a:bodyPr wrap="square" anchor="ctr" lIns="0" rIns="0" tIns="0" bIns="0">
+            <a:spAutoFit/>
+          </a:bodyPr>
+          <a:lstStyle/>
+          <a:p>
+            <a:pPr algn="ctr"/>
+            <a:r>
+              <a:rPr sz="850" b="0">
+                <a:solidFill>
+                  <a:srgbClr val="333333"/>
+                </a:solidFill>
+                <a:latin typeface="Calibri"/>
+              </a:rPr>
+              <a:t>Scheduler
++ CGPA</a:t>
+            </a:r>
+          </a:p>
+        </p:txBody>
+      </p:sp>
+      <p:sp>
+        <p:nvSpPr>
+          <p:cNvPr id="13" name="TextBox 12"/>
+          <p:cNvSpPr txBox="1"/>
+          <p:nvPr/>
+        </p:nvSpPr>
+        <p:spPr>
+          <a:xfrm>
+            <a:off x="10396187" y="2967320"/>
+            <a:ext cx="676297" cy="440000"/>
+          </a:xfrm>
+          <a:prstGeom prst="rect">
+            <a:avLst/>
+          </a:prstGeom>
+          <a:noFill/>
+        </p:spPr>
+        <p:txBody>
+          <a:bodyPr wrap="square" anchor="ctr" lIns="0" rIns="0" tIns="0" bIns="0">
+            <a:spAutoFit/>
+          </a:bodyPr>
+          <a:lstStyle/>
+          <a:p>
+            <a:pPr algn="ctr"/>
+            <a:r>
+              <a:rPr sz="850" b="0">
+                <a:solidFill>
+                  <a:srgbClr val="333333"/>
+                </a:solidFill>
+                <a:latin typeface="Calibri"/>
+              </a:rPr>
+              <a:t>Docker
+Production</a:t>
+            </a:r>
+          </a:p>
+        </p:txBody>
+      </p:sp>
+      <p:sp>
+        <p:nvSpPr>
+          <p:cNvPr id="14" name="TextBox 13"/>
+          <p:cNvSpPr txBox="1"/>
+          <p:nvPr/>
+        </p:nvSpPr>
+        <p:spPr>
+          <a:xfrm>
+            <a:off x="7612360" y="3627320"/>
+            <a:ext cx="3931960" cy="210000"/>
+          </a:xfrm>
+          <a:prstGeom prst="rect">
+            <a:avLst/>
+          </a:prstGeom>
+          <a:noFill/>
+        </p:spPr>
+        <p:txBody>
+          <a:bodyPr wrap="square" lIns="0" rIns="0" tIns="0" bIns="0">
+            <a:spAutoFit/>
+          </a:bodyPr>
+          <a:lstStyle/>
+          <a:p>
+            <a:pPr algn="ctr"/>
+            <a:r>
+              <a:rPr sz="900" b="0" i="1">
                 <a:solidFill>
                   <a:srgbClr val="5A4A1E"/>
                 </a:solidFill>
-              </a:defRPr>
-            </a:pPr>
-            <a:r>
-              <a:t>A final montage: one clean screenshot per role's dashboard (Admin, Teacher, Student, Parent), arranged in a 2×2 grid.</a:t>
-            </a:r>
-          </a:p>
-          <a:p>
-            <a:pPr>
-              <a:spcBef>
-                <a:spcPts val="1400"/>
-              </a:spcBef>
-              <a:defRPr b="1" sz="1300">
-                <a:solidFill>
-                  <a:srgbClr val="0E7C86"/>
-                </a:solidFill>
-              </a:defRPr>
-            </a:pPr>
-            <a:r>
-              <a:t>🗺  Diagram Suggestion</a:t>
-            </a:r>
-          </a:p>
-          <a:p>
-            <a:pPr>
-              <a:spcAft>
-                <a:spcPts val="200"/>
-              </a:spcAft>
-              <a:defRPr sz="1250">
-                <a:solidFill>
-                  <a:srgbClr val="5A4A1E"/>
-                </a:solidFill>
-              </a:defRPr>
-            </a:pPr>
-            <a:r>
-              <a:t>None — closing summary slide; let the 2×2 dashboard montage do the visual work.</a:t>
-            </a:r>
-          </a:p>
-          <a:p>
-            <a:pPr>
-              <a:spcBef>
-                <a:spcPts val="1400"/>
-              </a:spcBef>
-              <a:defRPr b="1" sz="1300">
-                <a:solidFill>
-                  <a:srgbClr val="0E7C86"/>
-                </a:solidFill>
-              </a:defRPr>
-            </a:pPr>
-            <a:r>
-              <a:t>✨  Animation</a:t>
-            </a:r>
-          </a:p>
-          <a:p>
-            <a:pPr>
-              <a:spcAft>
-                <a:spcPts val="200"/>
-              </a:spcAft>
-              <a:defRPr sz="1250">
-                <a:solidFill>
-                  <a:srgbClr val="5A4A1E"/>
-                </a:solidFill>
-              </a:defRPr>
-            </a:pPr>
-            <a:r>
-              <a:t>Simple fade-in for the whole slide as a single block — no per-bullet animation, to signal 'wrapping up' pacing to the audience.</a:t>
+                <a:latin typeface="Calibri"/>
+              </a:rPr>
+              <a:t>Deliberately unbuilt capabilities — documented, not silently omitted</a:t>
             </a:r>
           </a:p>
         </p:txBody>
@@ -10651,6 +13858,14 @@
 <file path=ppt/slides/slide22.xml><?xml version="1.0" encoding="utf-8"?>
 <p:sld xmlns:a="http://schemas.openxmlformats.org/drawingml/2006/main" xmlns:p="http://schemas.openxmlformats.org/presentationml/2006/main" xmlns:r="http://schemas.openxmlformats.org/officeDocument/2006/relationships">
   <p:cSld>
+    <p:bg>
+      <p:bgPr>
+        <a:solidFill>
+          <a:srgbClr val="FFFFFF"/>
+        </a:solidFill>
+        <a:effectLst/>
+      </p:bgPr>
+    </p:bg>
     <p:spTree>
       <p:nvGrpSpPr>
         <p:cNvPr id="1" name=""/>
@@ -10667,7 +13882,7 @@
         <p:spPr>
           <a:xfrm>
             <a:off x="0" y="0"/>
-            <a:ext cx="12191695" cy="6858000"/>
+            <a:ext cx="12191695" cy="1051560"/>
           </a:xfrm>
           <a:prstGeom prst="rect">
             <a:avLst/>
@@ -10709,8 +13924,8 @@
         </p:nvSpPr>
         <p:spPr>
           <a:xfrm>
-            <a:off x="0" y="4114800"/>
-            <a:ext cx="12191695" cy="63500"/>
+            <a:off x="0" y="1051560"/>
+            <a:ext cx="12191695" cy="50800"/>
           </a:xfrm>
           <a:prstGeom prst="rect">
             <a:avLst/>
@@ -10752,8 +13967,8 @@
         </p:nvSpPr>
         <p:spPr>
           <a:xfrm>
-            <a:off x="914400" y="2377440"/>
-            <a:ext cx="10332720" cy="1371600"/>
+            <a:off x="502920" y="164592"/>
+            <a:ext cx="10058400" cy="777240"/>
           </a:xfrm>
           <a:prstGeom prst="rect">
             <a:avLst/>
@@ -10767,14 +13982,14 @@
           <a:lstStyle/>
           <a:p>
             <a:pPr>
-              <a:defRPr sz="4600" b="1">
+              <a:defRPr sz="3000" b="1">
                 <a:solidFill>
                   <a:srgbClr val="FFFFFF"/>
                 </a:solidFill>
               </a:defRPr>
             </a:pPr>
             <a:r>
-              <a:t>Questions</a:t>
+              <a:t>Conclusion</a:t>
             </a:r>
           </a:p>
         </p:txBody>
@@ -10787,8 +14002,8 @@
         </p:nvSpPr>
         <p:spPr>
           <a:xfrm>
-            <a:off x="914400" y="4343400"/>
-            <a:ext cx="10058400" cy="1188720"/>
+            <a:off x="502920" y="1417320"/>
+            <a:ext cx="6766560" cy="4846320"/>
           </a:xfrm>
           <a:prstGeom prst="rect">
             <a:avLst/>
@@ -10802,6 +14017,584 @@
           <a:lstStyle/>
           <a:p>
             <a:pPr>
+              <a:spcAft>
+                <a:spcPts val="1000"/>
+              </a:spcAft>
+              <a:defRPr sz="1700" b="0">
+                <a:solidFill>
+                  <a:srgbClr val="333333"/>
+                </a:solidFill>
+              </a:defRPr>
+            </a:pPr>
+            <a:r>
+              <a:t>•  Delivers a complete, verifiably working replacement for fragmented spreadsheet/email/finance-tool tracking</a:t>
+            </a:r>
+          </a:p>
+          <a:p>
+            <a:pPr>
+              <a:spcAft>
+                <a:spcPts val="1000"/>
+              </a:spcAft>
+              <a:defRPr sz="1700" b="0">
+                <a:solidFill>
+                  <a:srgbClr val="333333"/>
+                </a:solidFill>
+              </a:defRPr>
+            </a:pPr>
+            <a:r>
+              <a:t>•  Every functional requirement from the original proposal was implemented and tested</a:t>
+            </a:r>
+          </a:p>
+          <a:p>
+            <a:pPr>
+              <a:spcAft>
+                <a:spcPts val="1000"/>
+              </a:spcAft>
+              <a:defRPr sz="1700" b="0">
+                <a:solidFill>
+                  <a:srgbClr val="333333"/>
+                </a:solidFill>
+              </a:defRPr>
+            </a:pPr>
+            <a:r>
+              <a:t>•  Every access-control boundary is enforced server-side and explicitly, negatively tested</a:t>
+            </a:r>
+          </a:p>
+          <a:p>
+            <a:pPr>
+              <a:spcAft>
+                <a:spcPts val="1000"/>
+              </a:spcAft>
+              <a:defRPr sz="1700" b="0">
+                <a:solidFill>
+                  <a:srgbClr val="333333"/>
+                </a:solidFill>
+              </a:defRPr>
+            </a:pPr>
+            <a:r>
+              <a:t>•  Every derived figure is computed live — never cached or duplicated</a:t>
+            </a:r>
+          </a:p>
+          <a:p>
+            <a:pPr>
+              <a:spcAft>
+                <a:spcPts val="1000"/>
+              </a:spcAft>
+              <a:defRPr sz="1700" b="0">
+                <a:solidFill>
+                  <a:srgbClr val="333333"/>
+                </a:solidFill>
+              </a:defRPr>
+            </a:pPr>
+            <a:r>
+              <a:t>•  11 backend domains, 82 endpoints, 26 tables, kept maintainable by a strict layered architecture</a:t>
+            </a:r>
+          </a:p>
+          <a:p>
+            <a:pPr>
+              <a:spcAft>
+                <a:spcPts val="1000"/>
+              </a:spcAft>
+              <a:defRPr sz="1700" b="0">
+                <a:solidFill>
+                  <a:srgbClr val="333333"/>
+                </a:solidFill>
+              </a:defRPr>
+            </a:pPr>
+            <a:r>
+              <a:t>•  549 automated tests, run continuously via CI, give confidence beyond manual inspection alone</a:t>
+            </a:r>
+          </a:p>
+          <a:p>
+            <a:pPr>
+              <a:spcAft>
+                <a:spcPts val="1000"/>
+              </a:spcAft>
+              <a:defRPr sz="1700" b="0">
+                <a:solidFill>
+                  <a:srgbClr val="333333"/>
+                </a:solidFill>
+              </a:defRPr>
+            </a:pPr>
+            <a:r>
+              <a:t>•  Deliberately unbuilt capabilities are documented, not silently omitted</a:t>
+            </a:r>
+          </a:p>
+        </p:txBody>
+      </p:sp>
+      <p:sp>
+        <p:nvSpPr>
+          <p:cNvPr id="6" name="Rounded Rectangle 5"/>
+          <p:cNvSpPr/>
+          <p:nvPr/>
+        </p:nvSpPr>
+        <p:spPr>
+          <a:xfrm>
+            <a:off x="7452360" y="1417320"/>
+            <a:ext cx="4251960" cy="4846320"/>
+          </a:xfrm>
+          <a:prstGeom prst="roundRect">
+            <a:avLst/>
+          </a:prstGeom>
+          <a:solidFill>
+            <a:srgbClr val="F3F0E7"/>
+          </a:solidFill>
+          <a:ln w="9525">
+            <a:solidFill>
+              <a:srgbClr val="D8CEA8"/>
+            </a:solidFill>
+          </a:ln>
+          <a:effectLst/>
+        </p:spPr>
+        <p:style>
+          <a:lnRef idx="1">
+            <a:schemeClr val="accent1"/>
+          </a:lnRef>
+          <a:fillRef idx="3">
+            <a:schemeClr val="accent1"/>
+          </a:fillRef>
+          <a:effectRef idx="2">
+            <a:schemeClr val="accent1"/>
+          </a:effectRef>
+          <a:fontRef idx="minor">
+            <a:schemeClr val="lt1"/>
+          </a:fontRef>
+        </p:style>
+        <p:txBody>
+          <a:bodyPr rtlCol="0" anchor="ctr" wrap="square" lIns="182880" rIns="182880" tIns="164592"/>
+          <a:lstStyle/>
+          <a:p>
+            <a:pPr algn="ctr">
+              <a:spcBef>
+                <a:spcPts val="0"/>
+              </a:spcBef>
+              <a:defRPr b="1" sz="1300">
+                <a:solidFill>
+                  <a:srgbClr val="0E7C86"/>
+                </a:solidFill>
+              </a:defRPr>
+            </a:pPr>
+          </a:p>
+        </p:txBody>
+      </p:sp>
+      <p:pic>
+        <p:nvPicPr>
+          <p:cNvPr id="7" name="Picture 6" descr="02_Admin_Dashboard.jpg"/>
+          <p:cNvPicPr>
+            <a:picLocks noChangeAspect="1"/>
+          </p:cNvPicPr>
+          <p:nvPr/>
+        </p:nvPicPr>
+        <p:blipFill>
+          <a:blip r:embed="rId3"/>
+          <a:stretch>
+            <a:fillRect/>
+          </a:stretch>
+        </p:blipFill>
+        <p:spPr>
+          <a:xfrm>
+            <a:off x="7612360" y="2216582"/>
+            <a:ext cx="1905980" cy="698636"/>
+          </a:xfrm>
+          <a:prstGeom prst="rect">
+            <a:avLst/>
+          </a:prstGeom>
+          <a:ln w="9525">
+            <a:solidFill>
+              <a:srgbClr val="D8CEA8"/>
+            </a:solidFill>
+          </a:ln>
+        </p:spPr>
+      </p:pic>
+      <p:sp>
+        <p:nvSpPr>
+          <p:cNvPr id="8" name="TextBox 7"/>
+          <p:cNvSpPr txBox="1"/>
+          <p:nvPr/>
+        </p:nvSpPr>
+        <p:spPr>
+          <a:xfrm>
+            <a:off x="7612360" y="3590480"/>
+            <a:ext cx="1905980" cy="210000"/>
+          </a:xfrm>
+          <a:prstGeom prst="rect">
+            <a:avLst/>
+          </a:prstGeom>
+          <a:noFill/>
+        </p:spPr>
+        <p:txBody>
+          <a:bodyPr wrap="square" lIns="0" rIns="0" tIns="0" bIns="0">
+            <a:spAutoFit/>
+          </a:bodyPr>
+          <a:lstStyle/>
+          <a:p>
+            <a:pPr algn="ctr"/>
+            <a:r>
+              <a:rPr sz="900" b="1" i="0">
+                <a:solidFill>
+                  <a:srgbClr val="0E7C86"/>
+                </a:solidFill>
+                <a:latin typeface="Calibri"/>
+              </a:rPr>
+              <a:t>Admin Dashboard</a:t>
+            </a:r>
+          </a:p>
+        </p:txBody>
+      </p:sp>
+      <p:pic>
+        <p:nvPicPr>
+          <p:cNvPr id="9" name="Picture 8" descr="18_Teacher_Dashboard.jpg"/>
+          <p:cNvPicPr>
+            <a:picLocks noChangeAspect="1"/>
+          </p:cNvPicPr>
+          <p:nvPr/>
+        </p:nvPicPr>
+        <p:blipFill>
+          <a:blip r:embed="rId4"/>
+          <a:stretch>
+            <a:fillRect/>
+          </a:stretch>
+        </p:blipFill>
+        <p:spPr>
+          <a:xfrm>
+            <a:off x="9638340" y="2403158"/>
+            <a:ext cx="1905980" cy="325484"/>
+          </a:xfrm>
+          <a:prstGeom prst="rect">
+            <a:avLst/>
+          </a:prstGeom>
+          <a:ln w="9525">
+            <a:solidFill>
+              <a:srgbClr val="D8CEA8"/>
+            </a:solidFill>
+          </a:ln>
+        </p:spPr>
+      </p:pic>
+      <p:sp>
+        <p:nvSpPr>
+          <p:cNvPr id="10" name="TextBox 9"/>
+          <p:cNvSpPr txBox="1"/>
+          <p:nvPr/>
+        </p:nvSpPr>
+        <p:spPr>
+          <a:xfrm>
+            <a:off x="9638340" y="3590480"/>
+            <a:ext cx="1905980" cy="210000"/>
+          </a:xfrm>
+          <a:prstGeom prst="rect">
+            <a:avLst/>
+          </a:prstGeom>
+          <a:noFill/>
+        </p:spPr>
+        <p:txBody>
+          <a:bodyPr wrap="square" lIns="0" rIns="0" tIns="0" bIns="0">
+            <a:spAutoFit/>
+          </a:bodyPr>
+          <a:lstStyle/>
+          <a:p>
+            <a:pPr algn="ctr"/>
+            <a:r>
+              <a:rPr sz="900" b="1" i="0">
+                <a:solidFill>
+                  <a:srgbClr val="0E7C86"/>
+                </a:solidFill>
+                <a:latin typeface="Calibri"/>
+              </a:rPr>
+              <a:t>Teacher Dashboard</a:t>
+            </a:r>
+          </a:p>
+        </p:txBody>
+      </p:sp>
+      <p:pic>
+        <p:nvPicPr>
+          <p:cNvPr id="11" name="Picture 10" descr="25_Student_Dashboard.jpg"/>
+          <p:cNvPicPr>
+            <a:picLocks noChangeAspect="1"/>
+          </p:cNvPicPr>
+          <p:nvPr/>
+        </p:nvPicPr>
+        <p:blipFill>
+          <a:blip r:embed="rId5"/>
+          <a:stretch>
+            <a:fillRect/>
+          </a:stretch>
+        </p:blipFill>
+        <p:spPr>
+          <a:xfrm>
+            <a:off x="7612360" y="4616085"/>
+            <a:ext cx="1905980" cy="545949"/>
+          </a:xfrm>
+          <a:prstGeom prst="rect">
+            <a:avLst/>
+          </a:prstGeom>
+          <a:ln w="9525">
+            <a:solidFill>
+              <a:srgbClr val="D8CEA8"/>
+            </a:solidFill>
+          </a:ln>
+        </p:spPr>
+      </p:pic>
+      <p:sp>
+        <p:nvSpPr>
+          <p:cNvPr id="12" name="TextBox 11"/>
+          <p:cNvSpPr txBox="1"/>
+          <p:nvPr/>
+        </p:nvSpPr>
+        <p:spPr>
+          <a:xfrm>
+            <a:off x="7612360" y="5913640"/>
+            <a:ext cx="1905980" cy="210000"/>
+          </a:xfrm>
+          <a:prstGeom prst="rect">
+            <a:avLst/>
+          </a:prstGeom>
+          <a:noFill/>
+        </p:spPr>
+        <p:txBody>
+          <a:bodyPr wrap="square" lIns="0" rIns="0" tIns="0" bIns="0">
+            <a:spAutoFit/>
+          </a:bodyPr>
+          <a:lstStyle/>
+          <a:p>
+            <a:pPr algn="ctr"/>
+            <a:r>
+              <a:rPr sz="900" b="1" i="0">
+                <a:solidFill>
+                  <a:srgbClr val="0E7C86"/>
+                </a:solidFill>
+                <a:latin typeface="Calibri"/>
+              </a:rPr>
+              <a:t>Student Dashboard</a:t>
+            </a:r>
+          </a:p>
+        </p:txBody>
+      </p:sp>
+      <p:pic>
+        <p:nvPicPr>
+          <p:cNvPr id="13" name="Picture 12" descr="34_Parent_Dashboard.jpg"/>
+          <p:cNvPicPr>
+            <a:picLocks noChangeAspect="1"/>
+          </p:cNvPicPr>
+          <p:nvPr/>
+        </p:nvPicPr>
+        <p:blipFill>
+          <a:blip r:embed="rId6"/>
+          <a:stretch>
+            <a:fillRect/>
+          </a:stretch>
+        </p:blipFill>
+        <p:spPr>
+          <a:xfrm>
+            <a:off x="9638340" y="4434351"/>
+            <a:ext cx="1905980" cy="909418"/>
+          </a:xfrm>
+          <a:prstGeom prst="rect">
+            <a:avLst/>
+          </a:prstGeom>
+          <a:ln w="9525">
+            <a:solidFill>
+              <a:srgbClr val="D8CEA8"/>
+            </a:solidFill>
+          </a:ln>
+        </p:spPr>
+      </p:pic>
+      <p:sp>
+        <p:nvSpPr>
+          <p:cNvPr id="14" name="TextBox 13"/>
+          <p:cNvSpPr txBox="1"/>
+          <p:nvPr/>
+        </p:nvSpPr>
+        <p:spPr>
+          <a:xfrm>
+            <a:off x="9638340" y="5913640"/>
+            <a:ext cx="1905980" cy="210000"/>
+          </a:xfrm>
+          <a:prstGeom prst="rect">
+            <a:avLst/>
+          </a:prstGeom>
+          <a:noFill/>
+        </p:spPr>
+        <p:txBody>
+          <a:bodyPr wrap="square" lIns="0" rIns="0" tIns="0" bIns="0">
+            <a:spAutoFit/>
+          </a:bodyPr>
+          <a:lstStyle/>
+          <a:p>
+            <a:pPr algn="ctr"/>
+            <a:r>
+              <a:rPr sz="900" b="1" i="0">
+                <a:solidFill>
+                  <a:srgbClr val="0E7C86"/>
+                </a:solidFill>
+                <a:latin typeface="Calibri"/>
+              </a:rPr>
+              <a:t>Parent Dashboard</a:t>
+            </a:r>
+          </a:p>
+        </p:txBody>
+      </p:sp>
+    </p:spTree>
+  </p:cSld>
+  <p:clrMapOvr>
+    <a:masterClrMapping/>
+  </p:clrMapOvr>
+</p:sld>
+</file>
+
+<file path=ppt/slides/slide23.xml><?xml version="1.0" encoding="utf-8"?>
+<p:sld xmlns:a="http://schemas.openxmlformats.org/drawingml/2006/main" xmlns:p="http://schemas.openxmlformats.org/presentationml/2006/main" xmlns:r="http://schemas.openxmlformats.org/officeDocument/2006/relationships">
+  <p:cSld>
+    <p:spTree>
+      <p:nvGrpSpPr>
+        <p:cNvPr id="1" name=""/>
+        <p:cNvGrpSpPr/>
+        <p:nvPr/>
+      </p:nvGrpSpPr>
+      <p:grpSpPr/>
+      <p:sp>
+        <p:nvSpPr>
+          <p:cNvPr id="2" name="Rectangle 1"/>
+          <p:cNvSpPr/>
+          <p:nvPr/>
+        </p:nvSpPr>
+        <p:spPr>
+          <a:xfrm>
+            <a:off x="0" y="0"/>
+            <a:ext cx="12191695" cy="6858000"/>
+          </a:xfrm>
+          <a:prstGeom prst="rect">
+            <a:avLst/>
+          </a:prstGeom>
+          <a:solidFill>
+            <a:srgbClr val="0F2442"/>
+          </a:solidFill>
+          <a:ln>
+            <a:noFill/>
+          </a:ln>
+        </p:spPr>
+        <p:style>
+          <a:lnRef idx="1">
+            <a:schemeClr val="accent1"/>
+          </a:lnRef>
+          <a:fillRef idx="3">
+            <a:schemeClr val="accent1"/>
+          </a:fillRef>
+          <a:effectRef idx="2">
+            <a:schemeClr val="accent1"/>
+          </a:effectRef>
+          <a:fontRef idx="minor">
+            <a:schemeClr val="lt1"/>
+          </a:fontRef>
+        </p:style>
+        <p:txBody>
+          <a:bodyPr rtlCol="0" anchor="ctr"/>
+          <a:lstStyle/>
+          <a:p>
+            <a:pPr algn="ctr"/>
+          </a:p>
+        </p:txBody>
+      </p:sp>
+      <p:sp>
+        <p:nvSpPr>
+          <p:cNvPr id="3" name="Rectangle 2"/>
+          <p:cNvSpPr/>
+          <p:nvPr/>
+        </p:nvSpPr>
+        <p:spPr>
+          <a:xfrm>
+            <a:off x="0" y="4114800"/>
+            <a:ext cx="12191695" cy="63500"/>
+          </a:xfrm>
+          <a:prstGeom prst="rect">
+            <a:avLst/>
+          </a:prstGeom>
+          <a:solidFill>
+            <a:srgbClr val="0E7C86"/>
+          </a:solidFill>
+          <a:ln>
+            <a:noFill/>
+          </a:ln>
+        </p:spPr>
+        <p:style>
+          <a:lnRef idx="1">
+            <a:schemeClr val="accent1"/>
+          </a:lnRef>
+          <a:fillRef idx="3">
+            <a:schemeClr val="accent1"/>
+          </a:fillRef>
+          <a:effectRef idx="2">
+            <a:schemeClr val="accent1"/>
+          </a:effectRef>
+          <a:fontRef idx="minor">
+            <a:schemeClr val="lt1"/>
+          </a:fontRef>
+        </p:style>
+        <p:txBody>
+          <a:bodyPr rtlCol="0" anchor="ctr"/>
+          <a:lstStyle/>
+          <a:p>
+            <a:pPr algn="ctr"/>
+          </a:p>
+        </p:txBody>
+      </p:sp>
+      <p:sp>
+        <p:nvSpPr>
+          <p:cNvPr id="4" name="TextBox 3"/>
+          <p:cNvSpPr txBox="1"/>
+          <p:nvPr/>
+        </p:nvSpPr>
+        <p:spPr>
+          <a:xfrm>
+            <a:off x="914400" y="2377440"/>
+            <a:ext cx="10332720" cy="1371600"/>
+          </a:xfrm>
+          <a:prstGeom prst="rect">
+            <a:avLst/>
+          </a:prstGeom>
+          <a:noFill/>
+        </p:spPr>
+        <p:txBody>
+          <a:bodyPr wrap="square">
+            <a:spAutoFit/>
+          </a:bodyPr>
+          <a:lstStyle/>
+          <a:p>
+            <a:pPr>
+              <a:defRPr sz="4600" b="1">
+                <a:solidFill>
+                  <a:srgbClr val="FFFFFF"/>
+                </a:solidFill>
+              </a:defRPr>
+            </a:pPr>
+            <a:r>
+              <a:t>Questions</a:t>
+            </a:r>
+          </a:p>
+        </p:txBody>
+      </p:sp>
+      <p:sp>
+        <p:nvSpPr>
+          <p:cNvPr id="5" name="TextBox 4"/>
+          <p:cNvSpPr txBox="1"/>
+          <p:nvPr/>
+        </p:nvSpPr>
+        <p:spPr>
+          <a:xfrm>
+            <a:off x="914400" y="4343400"/>
+            <a:ext cx="10058400" cy="1188720"/>
+          </a:xfrm>
+          <a:prstGeom prst="rect">
+            <a:avLst/>
+          </a:prstGeom>
+          <a:noFill/>
+        </p:spPr>
+        <p:txBody>
+          <a:bodyPr wrap="square">
+            <a:spAutoFit/>
+          </a:bodyPr>
+          <a:lstStyle/>
+          <a:p>
+            <a:pPr>
               <a:defRPr sz="1800">
                 <a:solidFill>
                   <a:srgbClr val="C9DDE4"/>
@@ -10891,7 +14684,7 @@
               </a:defRPr>
             </a:pPr>
             <a:r>
-              <a:t>22 / 22</a:t>
+              <a:t>23 / 23</a:t>
             </a:r>
           </a:p>
         </p:txBody>
@@ -11223,83 +15016,257 @@
                 </a:solidFill>
               </a:defRPr>
             </a:pPr>
-            <a:r>
-              <a:t>📷  Recommended Screenshot</a:t>
-            </a:r>
-          </a:p>
-          <a:p>
-            <a:pPr>
-              <a:spcAft>
-                <a:spcPts val="200"/>
-              </a:spcAft>
-              <a:defRPr sz="1250">
+          </a:p>
+        </p:txBody>
+      </p:sp>
+      <p:sp>
+        <p:nvSpPr>
+          <p:cNvPr id="7" name="Oval 6"/>
+          <p:cNvSpPr/>
+          <p:nvPr/>
+        </p:nvSpPr>
+        <p:spPr>
+          <a:xfrm>
+            <a:off x="8753340" y="2865480"/>
+            <a:ext cx="1650000" cy="1650000"/>
+          </a:xfrm>
+          <a:prstGeom prst="ellipse">
+            <a:avLst/>
+          </a:prstGeom>
+          <a:solidFill>
+            <a:srgbClr val="F3F0E7"/>
+          </a:solidFill>
+          <a:ln w="9525">
+            <a:solidFill>
+              <a:srgbClr val="D8CEA8"/>
+            </a:solidFill>
+          </a:ln>
+          <a:effectLst/>
+        </p:spPr>
+        <p:style>
+          <a:lnRef idx="1">
+            <a:schemeClr val="accent1"/>
+          </a:lnRef>
+          <a:fillRef idx="3">
+            <a:schemeClr val="accent1"/>
+          </a:fillRef>
+          <a:effectRef idx="2">
+            <a:schemeClr val="accent1"/>
+          </a:effectRef>
+          <a:fontRef idx="minor">
+            <a:schemeClr val="lt1"/>
+          </a:fontRef>
+        </p:style>
+        <p:txBody>
+          <a:bodyPr rtlCol="0" anchor="ctr"/>
+          <a:lstStyle/>
+          <a:p>
+            <a:pPr algn="ctr"/>
+          </a:p>
+        </p:txBody>
+      </p:sp>
+      <p:sp>
+        <p:nvSpPr>
+          <p:cNvPr id="8" name="Oval 7"/>
+          <p:cNvSpPr/>
+          <p:nvPr/>
+        </p:nvSpPr>
+        <p:spPr>
+          <a:xfrm>
+            <a:off x="8953340" y="3065480"/>
+            <a:ext cx="1250000" cy="1250000"/>
+          </a:xfrm>
+          <a:prstGeom prst="ellipse">
+            <a:avLst/>
+          </a:prstGeom>
+          <a:solidFill>
+            <a:srgbClr val="DDEEEF"/>
+          </a:solidFill>
+          <a:ln w="9525">
+            <a:solidFill>
+              <a:srgbClr val="D8CEA8"/>
+            </a:solidFill>
+          </a:ln>
+          <a:effectLst/>
+        </p:spPr>
+        <p:style>
+          <a:lnRef idx="1">
+            <a:schemeClr val="accent1"/>
+          </a:lnRef>
+          <a:fillRef idx="3">
+            <a:schemeClr val="accent1"/>
+          </a:fillRef>
+          <a:effectRef idx="2">
+            <a:schemeClr val="accent1"/>
+          </a:effectRef>
+          <a:fontRef idx="minor">
+            <a:schemeClr val="lt1"/>
+          </a:fontRef>
+        </p:style>
+        <p:txBody>
+          <a:bodyPr rtlCol="0" anchor="ctr"/>
+          <a:lstStyle/>
+          <a:p>
+            <a:pPr algn="ctr"/>
+          </a:p>
+        </p:txBody>
+      </p:sp>
+      <p:sp>
+        <p:nvSpPr>
+          <p:cNvPr id="9" name="Oval 8"/>
+          <p:cNvSpPr/>
+          <p:nvPr/>
+        </p:nvSpPr>
+        <p:spPr>
+          <a:xfrm>
+            <a:off x="9153340" y="3265480"/>
+            <a:ext cx="850000" cy="850000"/>
+          </a:xfrm>
+          <a:prstGeom prst="ellipse">
+            <a:avLst/>
+          </a:prstGeom>
+          <a:solidFill>
+            <a:srgbClr val="0E7C86"/>
+          </a:solidFill>
+          <a:ln w="9525">
+            <a:solidFill>
+              <a:srgbClr val="D8CEA8"/>
+            </a:solidFill>
+          </a:ln>
+          <a:effectLst/>
+        </p:spPr>
+        <p:style>
+          <a:lnRef idx="1">
+            <a:schemeClr val="accent1"/>
+          </a:lnRef>
+          <a:fillRef idx="3">
+            <a:schemeClr val="accent1"/>
+          </a:fillRef>
+          <a:effectRef idx="2">
+            <a:schemeClr val="accent1"/>
+          </a:effectRef>
+          <a:fontRef idx="minor">
+            <a:schemeClr val="lt1"/>
+          </a:fontRef>
+        </p:style>
+        <p:txBody>
+          <a:bodyPr rtlCol="0" anchor="ctr"/>
+          <a:lstStyle/>
+          <a:p>
+            <a:pPr algn="ctr"/>
+          </a:p>
+        </p:txBody>
+      </p:sp>
+      <p:sp>
+        <p:nvSpPr>
+          <p:cNvPr id="10" name="5-Point Star 9"/>
+          <p:cNvSpPr/>
+          <p:nvPr/>
+        </p:nvSpPr>
+        <p:spPr>
+          <a:xfrm>
+            <a:off x="9258340" y="3370480"/>
+            <a:ext cx="640000" cy="640000"/>
+          </a:xfrm>
+          <a:prstGeom prst="star5">
+            <a:avLst/>
+          </a:prstGeom>
+          <a:solidFill>
+            <a:srgbClr val="FFFFFF"/>
+          </a:solidFill>
+          <a:ln>
+            <a:noFill/>
+          </a:ln>
+          <a:effectLst/>
+        </p:spPr>
+        <p:style>
+          <a:lnRef idx="1">
+            <a:schemeClr val="accent1"/>
+          </a:lnRef>
+          <a:fillRef idx="3">
+            <a:schemeClr val="accent1"/>
+          </a:fillRef>
+          <a:effectRef idx="2">
+            <a:schemeClr val="accent1"/>
+          </a:effectRef>
+          <a:fontRef idx="minor">
+            <a:schemeClr val="lt1"/>
+          </a:fontRef>
+        </p:style>
+        <p:txBody>
+          <a:bodyPr rtlCol="0" anchor="ctr"/>
+          <a:lstStyle/>
+          <a:p>
+            <a:pPr algn="ctr"/>
+          </a:p>
+        </p:txBody>
+      </p:sp>
+      <p:sp>
+        <p:nvSpPr>
+          <p:cNvPr id="11" name="TextBox 10"/>
+          <p:cNvSpPr txBox="1"/>
+          <p:nvPr/>
+        </p:nvSpPr>
+        <p:spPr>
+          <a:xfrm>
+            <a:off x="7612360" y="4640480"/>
+            <a:ext cx="3931960" cy="400000"/>
+          </a:xfrm>
+          <a:prstGeom prst="rect">
+            <a:avLst/>
+          </a:prstGeom>
+          <a:noFill/>
+        </p:spPr>
+        <p:txBody>
+          <a:bodyPr wrap="square" anchor="ctr" lIns="0" rIns="0" tIns="0" bIns="0">
+            <a:spAutoFit/>
+          </a:bodyPr>
+          <a:lstStyle/>
+          <a:p>
+            <a:pPr algn="ctr"/>
+            <a:r>
+              <a:rPr sz="1500" b="1">
+                <a:solidFill>
+                  <a:srgbClr val="0F2442"/>
+                </a:solidFill>
+                <a:latin typeface="Calibri"/>
+              </a:rPr>
+              <a:t>7 Objectives</a:t>
+            </a:r>
+          </a:p>
+        </p:txBody>
+      </p:sp>
+      <p:sp>
+        <p:nvSpPr>
+          <p:cNvPr id="12" name="TextBox 11"/>
+          <p:cNvSpPr txBox="1"/>
+          <p:nvPr/>
+        </p:nvSpPr>
+        <p:spPr>
+          <a:xfrm>
+            <a:off x="7612360" y="5040480"/>
+            <a:ext cx="3931960" cy="210000"/>
+          </a:xfrm>
+          <a:prstGeom prst="rect">
+            <a:avLst/>
+          </a:prstGeom>
+          <a:noFill/>
+        </p:spPr>
+        <p:txBody>
+          <a:bodyPr wrap="square" lIns="0" rIns="0" tIns="0" bIns="0">
+            <a:spAutoFit/>
+          </a:bodyPr>
+          <a:lstStyle/>
+          <a:p>
+            <a:pPr algn="ctr"/>
+            <a:r>
+              <a:rPr sz="950" b="0" i="1">
                 <a:solidFill>
                   <a:srgbClr val="5A4A1E"/>
                 </a:solidFill>
-              </a:defRPr>
-            </a:pPr>
-            <a:r>
-              <a:t>None — concept slide.</a:t>
-            </a:r>
-          </a:p>
-          <a:p>
-            <a:pPr>
-              <a:spcBef>
-                <a:spcPts val="1400"/>
-              </a:spcBef>
-              <a:defRPr b="1" sz="1300">
-                <a:solidFill>
-                  <a:srgbClr val="0E7C86"/>
-                </a:solidFill>
-              </a:defRPr>
-            </a:pPr>
-            <a:r>
-              <a:t>🗺  Diagram Suggestion</a:t>
-            </a:r>
-          </a:p>
-          <a:p>
-            <a:pPr>
-              <a:spcAft>
-                <a:spcPts val="200"/>
-              </a:spcAft>
-              <a:defRPr sz="1250">
-                <a:solidFill>
-                  <a:srgbClr val="5A4A1E"/>
-                </a:solidFill>
-              </a:defRPr>
-            </a:pPr>
-            <a:r>
-              <a:t>Numbered checklist icon set (1–7) or a simple target/bullseye graphic representing 'objectives hit'.</a:t>
-            </a:r>
-          </a:p>
-          <a:p>
-            <a:pPr>
-              <a:spcBef>
-                <a:spcPts val="1400"/>
-              </a:spcBef>
-              <a:defRPr b="1" sz="1300">
-                <a:solidFill>
-                  <a:srgbClr val="0E7C86"/>
-                </a:solidFill>
-              </a:defRPr>
-            </a:pPr>
-            <a:r>
-              <a:t>✨  Animation</a:t>
-            </a:r>
-          </a:p>
-          <a:p>
-            <a:pPr>
-              <a:spcAft>
-                <a:spcPts val="200"/>
-              </a:spcAft>
-              <a:defRPr sz="1250">
-                <a:solidFill>
-                  <a:srgbClr val="5A4A1E"/>
-                </a:solidFill>
-              </a:defRPr>
-            </a:pPr>
-            <a:r>
-              <a:t>Wipe-in from left, one bullet per click, to pace delivery with speech.</a:t>
+                <a:latin typeface="Calibri"/>
+              </a:rPr>
+              <a:t>guiding every design decision</a:t>
             </a:r>
           </a:p>
         </p:txBody>
@@ -12173,83 +16140,640 @@
                 </a:solidFill>
               </a:defRPr>
             </a:pPr>
-            <a:r>
-              <a:t>📷  Recommended Screenshot</a:t>
-            </a:r>
-          </a:p>
-          <a:p>
-            <a:pPr>
-              <a:spcAft>
-                <a:spcPts val="200"/>
-              </a:spcAft>
-              <a:defRPr sz="1250">
-                <a:solidFill>
-                  <a:srgbClr val="5A4A1E"/>
-                </a:solidFill>
-              </a:defRPr>
-            </a:pPr>
-            <a:r>
-              <a:t>Terminal split-screen: `uvicorn` backend startup log on one side, `npm run dev` Vite frontend startup on the other.</a:t>
-            </a:r>
-          </a:p>
-          <a:p>
-            <a:pPr>
-              <a:spcBef>
-                <a:spcPts val="1400"/>
-              </a:spcBef>
-              <a:defRPr b="1" sz="1300">
+          </a:p>
+        </p:txBody>
+      </p:sp>
+      <p:sp>
+        <p:nvSpPr>
+          <p:cNvPr id="7" name="TextBox 6"/>
+          <p:cNvSpPr txBox="1"/>
+          <p:nvPr/>
+        </p:nvSpPr>
+        <p:spPr>
+          <a:xfrm>
+            <a:off x="7612360" y="1577320"/>
+            <a:ext cx="3931960" cy="260000"/>
+          </a:xfrm>
+          <a:prstGeom prst="rect">
+            <a:avLst/>
+          </a:prstGeom>
+          <a:noFill/>
+        </p:spPr>
+        <p:txBody>
+          <a:bodyPr wrap="square" anchor="ctr" lIns="0" rIns="0" tIns="0" bIns="0">
+            <a:spAutoFit/>
+          </a:bodyPr>
+          <a:lstStyle/>
+          <a:p>
+            <a:pPr algn="ctr"/>
+            <a:r>
+              <a:rPr sz="1200" b="1">
                 <a:solidFill>
                   <a:srgbClr val="0E7C86"/>
                 </a:solidFill>
-              </a:defRPr>
-            </a:pPr>
-            <a:r>
-              <a:t>🗺  Diagram Suggestion</a:t>
-            </a:r>
-          </a:p>
-          <a:p>
-            <a:pPr>
-              <a:spcAft>
-                <a:spcPts val="200"/>
-              </a:spcAft>
-              <a:defRPr sz="1250">
-                <a:solidFill>
-                  <a:srgbClr val="5A4A1E"/>
-                </a:solidFill>
-              </a:defRPr>
-            </a:pPr>
-            <a:r>
-              <a:t>Simple two-column tech logo grid: Backend column (FastAPI, PostgreSQL, SQLAlchemy, Alembic, JWT) vs Frontend column (React, TypeScript, TailwindCSS, React Query).</a:t>
-            </a:r>
-          </a:p>
-          <a:p>
-            <a:pPr>
-              <a:spcBef>
-                <a:spcPts val="1400"/>
-              </a:spcBef>
-              <a:defRPr b="1" sz="1300">
-                <a:solidFill>
-                  <a:srgbClr val="0E7C86"/>
-                </a:solidFill>
-              </a:defRPr>
-            </a:pPr>
-            <a:r>
-              <a:t>✨  Animation</a:t>
-            </a:r>
-          </a:p>
-          <a:p>
-            <a:pPr>
-              <a:spcAft>
-                <a:spcPts val="200"/>
-              </a:spcAft>
-              <a:defRPr sz="1250">
-                <a:solidFill>
-                  <a:srgbClr val="5A4A1E"/>
-                </a:solidFill>
-              </a:defRPr>
-            </a:pPr>
-            <a:r>
-              <a:t>Fly-in from bottom, grouped: backend bullets first as one group, then frontend bullets as a second group.</a:t>
+                <a:latin typeface="Calibri"/>
+              </a:rPr>
+              <a:t>Technology Stack</a:t>
+            </a:r>
+          </a:p>
+        </p:txBody>
+      </p:sp>
+      <p:sp>
+        <p:nvSpPr>
+          <p:cNvPr id="8" name="TextBox 7"/>
+          <p:cNvSpPr txBox="1"/>
+          <p:nvPr/>
+        </p:nvSpPr>
+        <p:spPr>
+          <a:xfrm>
+            <a:off x="7612360" y="1907320"/>
+            <a:ext cx="1895980" cy="260000"/>
+          </a:xfrm>
+          <a:prstGeom prst="rect">
+            <a:avLst/>
+          </a:prstGeom>
+          <a:noFill/>
+        </p:spPr>
+        <p:txBody>
+          <a:bodyPr wrap="square" anchor="ctr" lIns="0" rIns="0" tIns="0" bIns="0">
+            <a:spAutoFit/>
+          </a:bodyPr>
+          <a:lstStyle/>
+          <a:p>
+            <a:pPr algn="ctr"/>
+            <a:r>
+              <a:rPr sz="1050" b="1">
+                <a:solidFill>
+                  <a:srgbClr val="0F2442"/>
+                </a:solidFill>
+                <a:latin typeface="Calibri"/>
+              </a:rPr>
+              <a:t>Backend</a:t>
+            </a:r>
+          </a:p>
+        </p:txBody>
+      </p:sp>
+      <p:sp>
+        <p:nvSpPr>
+          <p:cNvPr id="9" name="TextBox 8"/>
+          <p:cNvSpPr txBox="1"/>
+          <p:nvPr/>
+        </p:nvSpPr>
+        <p:spPr>
+          <a:xfrm>
+            <a:off x="9648340" y="1907320"/>
+            <a:ext cx="1895980" cy="260000"/>
+          </a:xfrm>
+          <a:prstGeom prst="rect">
+            <a:avLst/>
+          </a:prstGeom>
+          <a:noFill/>
+        </p:spPr>
+        <p:txBody>
+          <a:bodyPr wrap="square" anchor="ctr" lIns="0" rIns="0" tIns="0" bIns="0">
+            <a:spAutoFit/>
+          </a:bodyPr>
+          <a:lstStyle/>
+          <a:p>
+            <a:pPr algn="ctr"/>
+            <a:r>
+              <a:rPr sz="1050" b="1">
+                <a:solidFill>
+                  <a:srgbClr val="0F2442"/>
+                </a:solidFill>
+                <a:latin typeface="Calibri"/>
+              </a:rPr>
+              <a:t>Frontend</a:t>
+            </a:r>
+          </a:p>
+        </p:txBody>
+      </p:sp>
+      <p:sp>
+        <p:nvSpPr>
+          <p:cNvPr id="10" name="Rounded Rectangle 9"/>
+          <p:cNvSpPr/>
+          <p:nvPr/>
+        </p:nvSpPr>
+        <p:spPr>
+          <a:xfrm>
+            <a:off x="7612360" y="2217320"/>
+            <a:ext cx="1895980" cy="340000"/>
+          </a:xfrm>
+          <a:prstGeom prst="roundRect">
+            <a:avLst/>
+          </a:prstGeom>
+          <a:solidFill>
+            <a:srgbClr val="0F2442"/>
+          </a:solidFill>
+          <a:ln>
+            <a:noFill/>
+          </a:ln>
+          <a:effectLst/>
+        </p:spPr>
+        <p:style>
+          <a:lnRef idx="1">
+            <a:schemeClr val="accent1"/>
+          </a:lnRef>
+          <a:fillRef idx="3">
+            <a:schemeClr val="accent1"/>
+          </a:fillRef>
+          <a:effectRef idx="2">
+            <a:schemeClr val="accent1"/>
+          </a:effectRef>
+          <a:fontRef idx="minor">
+            <a:schemeClr val="lt1"/>
+          </a:fontRef>
+        </p:style>
+        <p:txBody>
+          <a:bodyPr rtlCol="0" anchor="ctr" wrap="square" lIns="45720" rIns="45720" tIns="18000" bIns="18000"/>
+          <a:lstStyle/>
+          <a:p>
+            <a:pPr algn="ctr"/>
+            <a:r>
+              <a:rPr sz="1000" b="1">
+                <a:solidFill>
+                  <a:srgbClr val="FFFFFF"/>
+                </a:solidFill>
+                <a:latin typeface="Calibri"/>
+              </a:rPr>
+              <a:t>FastAPI</a:t>
+            </a:r>
+          </a:p>
+        </p:txBody>
+      </p:sp>
+      <p:sp>
+        <p:nvSpPr>
+          <p:cNvPr id="11" name="Rounded Rectangle 10"/>
+          <p:cNvSpPr/>
+          <p:nvPr/>
+        </p:nvSpPr>
+        <p:spPr>
+          <a:xfrm>
+            <a:off x="7612360" y="2637320"/>
+            <a:ext cx="1895980" cy="340000"/>
+          </a:xfrm>
+          <a:prstGeom prst="roundRect">
+            <a:avLst/>
+          </a:prstGeom>
+          <a:solidFill>
+            <a:srgbClr val="0F2442"/>
+          </a:solidFill>
+          <a:ln>
+            <a:noFill/>
+          </a:ln>
+          <a:effectLst/>
+        </p:spPr>
+        <p:style>
+          <a:lnRef idx="1">
+            <a:schemeClr val="accent1"/>
+          </a:lnRef>
+          <a:fillRef idx="3">
+            <a:schemeClr val="accent1"/>
+          </a:fillRef>
+          <a:effectRef idx="2">
+            <a:schemeClr val="accent1"/>
+          </a:effectRef>
+          <a:fontRef idx="minor">
+            <a:schemeClr val="lt1"/>
+          </a:fontRef>
+        </p:style>
+        <p:txBody>
+          <a:bodyPr rtlCol="0" anchor="ctr" wrap="square" lIns="45720" rIns="45720" tIns="18000" bIns="18000"/>
+          <a:lstStyle/>
+          <a:p>
+            <a:pPr algn="ctr"/>
+            <a:r>
+              <a:rPr sz="1000" b="1">
+                <a:solidFill>
+                  <a:srgbClr val="FFFFFF"/>
+                </a:solidFill>
+                <a:latin typeface="Calibri"/>
+              </a:rPr>
+              <a:t>PostgreSQL</a:t>
+            </a:r>
+          </a:p>
+        </p:txBody>
+      </p:sp>
+      <p:sp>
+        <p:nvSpPr>
+          <p:cNvPr id="12" name="Rounded Rectangle 11"/>
+          <p:cNvSpPr/>
+          <p:nvPr/>
+        </p:nvSpPr>
+        <p:spPr>
+          <a:xfrm>
+            <a:off x="7612360" y="3057320"/>
+            <a:ext cx="1895980" cy="340000"/>
+          </a:xfrm>
+          <a:prstGeom prst="roundRect">
+            <a:avLst/>
+          </a:prstGeom>
+          <a:solidFill>
+            <a:srgbClr val="0F2442"/>
+          </a:solidFill>
+          <a:ln>
+            <a:noFill/>
+          </a:ln>
+          <a:effectLst/>
+        </p:spPr>
+        <p:style>
+          <a:lnRef idx="1">
+            <a:schemeClr val="accent1"/>
+          </a:lnRef>
+          <a:fillRef idx="3">
+            <a:schemeClr val="accent1"/>
+          </a:fillRef>
+          <a:effectRef idx="2">
+            <a:schemeClr val="accent1"/>
+          </a:effectRef>
+          <a:fontRef idx="minor">
+            <a:schemeClr val="lt1"/>
+          </a:fontRef>
+        </p:style>
+        <p:txBody>
+          <a:bodyPr rtlCol="0" anchor="ctr" wrap="square" lIns="45720" rIns="45720" tIns="18000" bIns="18000"/>
+          <a:lstStyle/>
+          <a:p>
+            <a:pPr algn="ctr"/>
+            <a:r>
+              <a:rPr sz="1000" b="1">
+                <a:solidFill>
+                  <a:srgbClr val="FFFFFF"/>
+                </a:solidFill>
+                <a:latin typeface="Calibri"/>
+              </a:rPr>
+              <a:t>SQLAlchemy</a:t>
+            </a:r>
+          </a:p>
+        </p:txBody>
+      </p:sp>
+      <p:sp>
+        <p:nvSpPr>
+          <p:cNvPr id="13" name="Rounded Rectangle 12"/>
+          <p:cNvSpPr/>
+          <p:nvPr/>
+        </p:nvSpPr>
+        <p:spPr>
+          <a:xfrm>
+            <a:off x="7612360" y="3477320"/>
+            <a:ext cx="1895980" cy="340000"/>
+          </a:xfrm>
+          <a:prstGeom prst="roundRect">
+            <a:avLst/>
+          </a:prstGeom>
+          <a:solidFill>
+            <a:srgbClr val="0F2442"/>
+          </a:solidFill>
+          <a:ln>
+            <a:noFill/>
+          </a:ln>
+          <a:effectLst/>
+        </p:spPr>
+        <p:style>
+          <a:lnRef idx="1">
+            <a:schemeClr val="accent1"/>
+          </a:lnRef>
+          <a:fillRef idx="3">
+            <a:schemeClr val="accent1"/>
+          </a:fillRef>
+          <a:effectRef idx="2">
+            <a:schemeClr val="accent1"/>
+          </a:effectRef>
+          <a:fontRef idx="minor">
+            <a:schemeClr val="lt1"/>
+          </a:fontRef>
+        </p:style>
+        <p:txBody>
+          <a:bodyPr rtlCol="0" anchor="ctr" wrap="square" lIns="45720" rIns="45720" tIns="18000" bIns="18000"/>
+          <a:lstStyle/>
+          <a:p>
+            <a:pPr algn="ctr"/>
+            <a:r>
+              <a:rPr sz="1000" b="1">
+                <a:solidFill>
+                  <a:srgbClr val="FFFFFF"/>
+                </a:solidFill>
+                <a:latin typeface="Calibri"/>
+              </a:rPr>
+              <a:t>Alembic</a:t>
+            </a:r>
+          </a:p>
+        </p:txBody>
+      </p:sp>
+      <p:sp>
+        <p:nvSpPr>
+          <p:cNvPr id="14" name="Rounded Rectangle 13"/>
+          <p:cNvSpPr/>
+          <p:nvPr/>
+        </p:nvSpPr>
+        <p:spPr>
+          <a:xfrm>
+            <a:off x="7612360" y="3897320"/>
+            <a:ext cx="1895980" cy="340000"/>
+          </a:xfrm>
+          <a:prstGeom prst="roundRect">
+            <a:avLst/>
+          </a:prstGeom>
+          <a:solidFill>
+            <a:srgbClr val="0F2442"/>
+          </a:solidFill>
+          <a:ln>
+            <a:noFill/>
+          </a:ln>
+          <a:effectLst/>
+        </p:spPr>
+        <p:style>
+          <a:lnRef idx="1">
+            <a:schemeClr val="accent1"/>
+          </a:lnRef>
+          <a:fillRef idx="3">
+            <a:schemeClr val="accent1"/>
+          </a:fillRef>
+          <a:effectRef idx="2">
+            <a:schemeClr val="accent1"/>
+          </a:effectRef>
+          <a:fontRef idx="minor">
+            <a:schemeClr val="lt1"/>
+          </a:fontRef>
+        </p:style>
+        <p:txBody>
+          <a:bodyPr rtlCol="0" anchor="ctr" wrap="square" lIns="45720" rIns="45720" tIns="18000" bIns="18000"/>
+          <a:lstStyle/>
+          <a:p>
+            <a:pPr algn="ctr"/>
+            <a:r>
+              <a:rPr sz="1000" b="1">
+                <a:solidFill>
+                  <a:srgbClr val="FFFFFF"/>
+                </a:solidFill>
+                <a:latin typeface="Calibri"/>
+              </a:rPr>
+              <a:t>JWT Auth</a:t>
+            </a:r>
+          </a:p>
+        </p:txBody>
+      </p:sp>
+      <p:sp>
+        <p:nvSpPr>
+          <p:cNvPr id="15" name="Rounded Rectangle 14"/>
+          <p:cNvSpPr/>
+          <p:nvPr/>
+        </p:nvSpPr>
+        <p:spPr>
+          <a:xfrm>
+            <a:off x="9648340" y="2217320"/>
+            <a:ext cx="1895980" cy="340000"/>
+          </a:xfrm>
+          <a:prstGeom prst="roundRect">
+            <a:avLst/>
+          </a:prstGeom>
+          <a:solidFill>
+            <a:srgbClr val="0E7C86"/>
+          </a:solidFill>
+          <a:ln>
+            <a:noFill/>
+          </a:ln>
+          <a:effectLst/>
+        </p:spPr>
+        <p:style>
+          <a:lnRef idx="1">
+            <a:schemeClr val="accent1"/>
+          </a:lnRef>
+          <a:fillRef idx="3">
+            <a:schemeClr val="accent1"/>
+          </a:fillRef>
+          <a:effectRef idx="2">
+            <a:schemeClr val="accent1"/>
+          </a:effectRef>
+          <a:fontRef idx="minor">
+            <a:schemeClr val="lt1"/>
+          </a:fontRef>
+        </p:style>
+        <p:txBody>
+          <a:bodyPr rtlCol="0" anchor="ctr" wrap="square" lIns="45720" rIns="45720" tIns="18000" bIns="18000"/>
+          <a:lstStyle/>
+          <a:p>
+            <a:pPr algn="ctr"/>
+            <a:r>
+              <a:rPr sz="1000" b="1">
+                <a:solidFill>
+                  <a:srgbClr val="FFFFFF"/>
+                </a:solidFill>
+                <a:latin typeface="Calibri"/>
+              </a:rPr>
+              <a:t>React 18</a:t>
+            </a:r>
+          </a:p>
+        </p:txBody>
+      </p:sp>
+      <p:sp>
+        <p:nvSpPr>
+          <p:cNvPr id="16" name="Rounded Rectangle 15"/>
+          <p:cNvSpPr/>
+          <p:nvPr/>
+        </p:nvSpPr>
+        <p:spPr>
+          <a:xfrm>
+            <a:off x="9648340" y="2637320"/>
+            <a:ext cx="1895980" cy="340000"/>
+          </a:xfrm>
+          <a:prstGeom prst="roundRect">
+            <a:avLst/>
+          </a:prstGeom>
+          <a:solidFill>
+            <a:srgbClr val="0E7C86"/>
+          </a:solidFill>
+          <a:ln>
+            <a:noFill/>
+          </a:ln>
+          <a:effectLst/>
+        </p:spPr>
+        <p:style>
+          <a:lnRef idx="1">
+            <a:schemeClr val="accent1"/>
+          </a:lnRef>
+          <a:fillRef idx="3">
+            <a:schemeClr val="accent1"/>
+          </a:fillRef>
+          <a:effectRef idx="2">
+            <a:schemeClr val="accent1"/>
+          </a:effectRef>
+          <a:fontRef idx="minor">
+            <a:schemeClr val="lt1"/>
+          </a:fontRef>
+        </p:style>
+        <p:txBody>
+          <a:bodyPr rtlCol="0" anchor="ctr" wrap="square" lIns="45720" rIns="45720" tIns="18000" bIns="18000"/>
+          <a:lstStyle/>
+          <a:p>
+            <a:pPr algn="ctr"/>
+            <a:r>
+              <a:rPr sz="1000" b="1">
+                <a:solidFill>
+                  <a:srgbClr val="FFFFFF"/>
+                </a:solidFill>
+                <a:latin typeface="Calibri"/>
+              </a:rPr>
+              <a:t>TypeScript</a:t>
+            </a:r>
+          </a:p>
+        </p:txBody>
+      </p:sp>
+      <p:sp>
+        <p:nvSpPr>
+          <p:cNvPr id="17" name="Rounded Rectangle 16"/>
+          <p:cNvSpPr/>
+          <p:nvPr/>
+        </p:nvSpPr>
+        <p:spPr>
+          <a:xfrm>
+            <a:off x="9648340" y="3057320"/>
+            <a:ext cx="1895980" cy="340000"/>
+          </a:xfrm>
+          <a:prstGeom prst="roundRect">
+            <a:avLst/>
+          </a:prstGeom>
+          <a:solidFill>
+            <a:srgbClr val="0E7C86"/>
+          </a:solidFill>
+          <a:ln>
+            <a:noFill/>
+          </a:ln>
+          <a:effectLst/>
+        </p:spPr>
+        <p:style>
+          <a:lnRef idx="1">
+            <a:schemeClr val="accent1"/>
+          </a:lnRef>
+          <a:fillRef idx="3">
+            <a:schemeClr val="accent1"/>
+          </a:fillRef>
+          <a:effectRef idx="2">
+            <a:schemeClr val="accent1"/>
+          </a:effectRef>
+          <a:fontRef idx="minor">
+            <a:schemeClr val="lt1"/>
+          </a:fontRef>
+        </p:style>
+        <p:txBody>
+          <a:bodyPr rtlCol="0" anchor="ctr" wrap="square" lIns="45720" rIns="45720" tIns="18000" bIns="18000"/>
+          <a:lstStyle/>
+          <a:p>
+            <a:pPr algn="ctr"/>
+            <a:r>
+              <a:rPr sz="1000" b="1">
+                <a:solidFill>
+                  <a:srgbClr val="FFFFFF"/>
+                </a:solidFill>
+                <a:latin typeface="Calibri"/>
+              </a:rPr>
+              <a:t>TailwindCSS</a:t>
+            </a:r>
+          </a:p>
+        </p:txBody>
+      </p:sp>
+      <p:sp>
+        <p:nvSpPr>
+          <p:cNvPr id="18" name="Rounded Rectangle 17"/>
+          <p:cNvSpPr/>
+          <p:nvPr/>
+        </p:nvSpPr>
+        <p:spPr>
+          <a:xfrm>
+            <a:off x="9648340" y="3477320"/>
+            <a:ext cx="1895980" cy="340000"/>
+          </a:xfrm>
+          <a:prstGeom prst="roundRect">
+            <a:avLst/>
+          </a:prstGeom>
+          <a:solidFill>
+            <a:srgbClr val="0E7C86"/>
+          </a:solidFill>
+          <a:ln>
+            <a:noFill/>
+          </a:ln>
+          <a:effectLst/>
+        </p:spPr>
+        <p:style>
+          <a:lnRef idx="1">
+            <a:schemeClr val="accent1"/>
+          </a:lnRef>
+          <a:fillRef idx="3">
+            <a:schemeClr val="accent1"/>
+          </a:fillRef>
+          <a:effectRef idx="2">
+            <a:schemeClr val="accent1"/>
+          </a:effectRef>
+          <a:fontRef idx="minor">
+            <a:schemeClr val="lt1"/>
+          </a:fontRef>
+        </p:style>
+        <p:txBody>
+          <a:bodyPr rtlCol="0" anchor="ctr" wrap="square" lIns="45720" rIns="45720" tIns="18000" bIns="18000"/>
+          <a:lstStyle/>
+          <a:p>
+            <a:pPr algn="ctr"/>
+            <a:r>
+              <a:rPr sz="1000" b="1">
+                <a:solidFill>
+                  <a:srgbClr val="FFFFFF"/>
+                </a:solidFill>
+                <a:latin typeface="Calibri"/>
+              </a:rPr>
+              <a:t>React Query</a:t>
+            </a:r>
+          </a:p>
+        </p:txBody>
+      </p:sp>
+      <p:sp>
+        <p:nvSpPr>
+          <p:cNvPr id="19" name="Rounded Rectangle 18"/>
+          <p:cNvSpPr/>
+          <p:nvPr/>
+        </p:nvSpPr>
+        <p:spPr>
+          <a:xfrm>
+            <a:off x="9648340" y="3897320"/>
+            <a:ext cx="1895980" cy="340000"/>
+          </a:xfrm>
+          <a:prstGeom prst="roundRect">
+            <a:avLst/>
+          </a:prstGeom>
+          <a:solidFill>
+            <a:srgbClr val="0E7C86"/>
+          </a:solidFill>
+          <a:ln>
+            <a:noFill/>
+          </a:ln>
+          <a:effectLst/>
+        </p:spPr>
+        <p:style>
+          <a:lnRef idx="1">
+            <a:schemeClr val="accent1"/>
+          </a:lnRef>
+          <a:fillRef idx="3">
+            <a:schemeClr val="accent1"/>
+          </a:fillRef>
+          <a:effectRef idx="2">
+            <a:schemeClr val="accent1"/>
+          </a:effectRef>
+          <a:fontRef idx="minor">
+            <a:schemeClr val="lt1"/>
+          </a:fontRef>
+        </p:style>
+        <p:txBody>
+          <a:bodyPr rtlCol="0" anchor="ctr" wrap="square" lIns="45720" rIns="45720" tIns="18000" bIns="18000"/>
+          <a:lstStyle/>
+          <a:p>
+            <a:pPr algn="ctr"/>
+            <a:r>
+              <a:rPr sz="1000" b="1">
+                <a:solidFill>
+                  <a:srgbClr val="FFFFFF"/>
+                </a:solidFill>
+                <a:latin typeface="Calibri"/>
+              </a:rPr>
+              <a:t>Axios</a:t>
             </a:r>
           </a:p>
         </p:txBody>
@@ -12596,83 +17120,325 @@
                 </a:solidFill>
               </a:defRPr>
             </a:pPr>
-            <a:r>
-              <a:t>📷  Recommended Screenshot</a:t>
-            </a:r>
-          </a:p>
-          <a:p>
-            <a:pPr>
-              <a:spcAft>
-                <a:spcPts val="200"/>
-              </a:spcAft>
-              <a:defRPr sz="1250">
-                <a:solidFill>
-                  <a:srgbClr val="5A4A1E"/>
-                </a:solidFill>
-              </a:defRPr>
-            </a:pPr>
-            <a:r>
-              <a:t>None — architecture is best shown as a diagram, not a screenshot.</a:t>
-            </a:r>
-          </a:p>
-          <a:p>
-            <a:pPr>
-              <a:spcBef>
-                <a:spcPts val="1400"/>
-              </a:spcBef>
-              <a:defRPr b="1" sz="1300">
-                <a:solidFill>
-                  <a:srgbClr val="0E7C86"/>
-                </a:solidFill>
-              </a:defRPr>
-            </a:pPr>
-            <a:r>
-              <a:t>🗺  Diagram Suggestion</a:t>
-            </a:r>
-          </a:p>
-          <a:p>
-            <a:pPr>
-              <a:spcAft>
-                <a:spcPts val="200"/>
-              </a:spcAft>
-              <a:defRPr sz="1250">
-                <a:solidFill>
-                  <a:srgbClr val="5A4A1E"/>
-                </a:solidFill>
-              </a:defRPr>
-            </a:pPr>
-            <a:r>
-              <a:t>Layered box diagram: Browser (SPA) → HTTPS → API Gateway/FastAPI → [Router | Service | Repository] stacked boxes → PostgreSQL cylinder. Arrows only flow downward through the layers.</a:t>
-            </a:r>
-          </a:p>
-          <a:p>
-            <a:pPr>
-              <a:spcBef>
-                <a:spcPts val="1400"/>
-              </a:spcBef>
-              <a:defRPr b="1" sz="1300">
-                <a:solidFill>
-                  <a:srgbClr val="0E7C86"/>
-                </a:solidFill>
-              </a:defRPr>
-            </a:pPr>
-            <a:r>
-              <a:t>✨  Animation</a:t>
-            </a:r>
-          </a:p>
-          <a:p>
-            <a:pPr>
-              <a:spcAft>
-                <a:spcPts val="200"/>
-              </a:spcAft>
-              <a:defRPr sz="1250">
-                <a:solidFill>
-                  <a:srgbClr val="5A4A1E"/>
-                </a:solidFill>
-              </a:defRPr>
-            </a:pPr>
-            <a:r>
-              <a:t>Build the diagram layer by layer (top to bottom) using 'Appear' triggered by click, so each layer is explained before revealing the next.</a:t>
+          </a:p>
+        </p:txBody>
+      </p:sp>
+      <p:sp>
+        <p:nvSpPr>
+          <p:cNvPr id="7" name="Rounded Rectangle 6"/>
+          <p:cNvSpPr/>
+          <p:nvPr/>
+        </p:nvSpPr>
+        <p:spPr>
+          <a:xfrm>
+            <a:off x="7612360" y="1577320"/>
+            <a:ext cx="3931960" cy="1049080"/>
+          </a:xfrm>
+          <a:prstGeom prst="roundRect">
+            <a:avLst/>
+          </a:prstGeom>
+          <a:solidFill>
+            <a:srgbClr val="0E7C86"/>
+          </a:solidFill>
+          <a:ln>
+            <a:noFill/>
+          </a:ln>
+          <a:effectLst/>
+        </p:spPr>
+        <p:style>
+          <a:lnRef idx="1">
+            <a:schemeClr val="accent1"/>
+          </a:lnRef>
+          <a:fillRef idx="3">
+            <a:schemeClr val="accent1"/>
+          </a:fillRef>
+          <a:effectRef idx="2">
+            <a:schemeClr val="accent1"/>
+          </a:effectRef>
+          <a:fontRef idx="minor">
+            <a:schemeClr val="lt1"/>
+          </a:fontRef>
+        </p:style>
+        <p:txBody>
+          <a:bodyPr rtlCol="0" anchor="ctr" wrap="square" lIns="45720" rIns="45720" tIns="18000" bIns="18000"/>
+          <a:lstStyle/>
+          <a:p>
+            <a:pPr algn="ctr"/>
+            <a:r>
+              <a:rPr sz="1050" b="1">
+                <a:solidFill>
+                  <a:srgbClr val="FFFFFF"/>
+                </a:solidFill>
+                <a:latin typeface="Calibri"/>
+              </a:rPr>
+              <a:t>Browser (React SPA)</a:t>
+            </a:r>
+          </a:p>
+        </p:txBody>
+      </p:sp>
+      <p:cxnSp>
+        <p:nvCxnSpPr>
+          <p:cNvPr id="8" name="Connector 7"/>
+          <p:cNvCxnSpPr/>
+          <p:nvPr/>
+        </p:nvCxnSpPr>
+        <p:spPr>
+          <a:xfrm>
+            <a:off x="9578340" y="2626400"/>
+            <a:ext cx="0" cy="110000"/>
+          </a:xfrm>
+          <a:prstGeom prst="line">
+            <a:avLst/>
+          </a:prstGeom>
+          <a:ln w="19050">
+            <a:solidFill>
+              <a:srgbClr val="D8CEA8"/>
+            </a:solidFill>
+            <a:tailEnd type="triangle" w="med" len="med"/>
+          </a:ln>
+        </p:spPr>
+        <p:style>
+          <a:lnRef idx="2">
+            <a:schemeClr val="accent1"/>
+          </a:lnRef>
+          <a:fillRef idx="0">
+            <a:schemeClr val="accent1"/>
+          </a:fillRef>
+          <a:effectRef idx="1">
+            <a:schemeClr val="accent1"/>
+          </a:effectRef>
+          <a:fontRef idx="minor">
+            <a:schemeClr val="tx1"/>
+          </a:fontRef>
+        </p:style>
+      </p:cxnSp>
+      <p:sp>
+        <p:nvSpPr>
+          <p:cNvPr id="9" name="Rounded Rectangle 8"/>
+          <p:cNvSpPr/>
+          <p:nvPr/>
+        </p:nvSpPr>
+        <p:spPr>
+          <a:xfrm>
+            <a:off x="7612360" y="2736400"/>
+            <a:ext cx="3931960" cy="1049080"/>
+          </a:xfrm>
+          <a:prstGeom prst="roundRect">
+            <a:avLst/>
+          </a:prstGeom>
+          <a:solidFill>
+            <a:srgbClr val="0F2442"/>
+          </a:solidFill>
+          <a:ln>
+            <a:noFill/>
+          </a:ln>
+          <a:effectLst/>
+        </p:spPr>
+        <p:style>
+          <a:lnRef idx="1">
+            <a:schemeClr val="accent1"/>
+          </a:lnRef>
+          <a:fillRef idx="3">
+            <a:schemeClr val="accent1"/>
+          </a:fillRef>
+          <a:effectRef idx="2">
+            <a:schemeClr val="accent1"/>
+          </a:effectRef>
+          <a:fontRef idx="minor">
+            <a:schemeClr val="lt1"/>
+          </a:fontRef>
+        </p:style>
+        <p:txBody>
+          <a:bodyPr rtlCol="0" anchor="ctr" wrap="square" lIns="45720" rIns="45720" tIns="18000" bIns="18000"/>
+          <a:lstStyle/>
+          <a:p>
+            <a:pPr algn="ctr"/>
+            <a:r>
+              <a:rPr sz="1050" b="1">
+                <a:solidFill>
+                  <a:srgbClr val="FFFFFF"/>
+                </a:solidFill>
+                <a:latin typeface="Calibri"/>
+              </a:rPr>
+              <a:t>REST API — FastAPI (/api/v1)</a:t>
+            </a:r>
+          </a:p>
+        </p:txBody>
+      </p:sp>
+      <p:cxnSp>
+        <p:nvCxnSpPr>
+          <p:cNvPr id="10" name="Connector 9"/>
+          <p:cNvCxnSpPr/>
+          <p:nvPr/>
+        </p:nvCxnSpPr>
+        <p:spPr>
+          <a:xfrm>
+            <a:off x="9578340" y="3785480"/>
+            <a:ext cx="0" cy="110000"/>
+          </a:xfrm>
+          <a:prstGeom prst="line">
+            <a:avLst/>
+          </a:prstGeom>
+          <a:ln w="19050">
+            <a:solidFill>
+              <a:srgbClr val="D8CEA8"/>
+            </a:solidFill>
+            <a:tailEnd type="triangle" w="med" len="med"/>
+          </a:ln>
+        </p:spPr>
+        <p:style>
+          <a:lnRef idx="2">
+            <a:schemeClr val="accent1"/>
+          </a:lnRef>
+          <a:fillRef idx="0">
+            <a:schemeClr val="accent1"/>
+          </a:fillRef>
+          <a:effectRef idx="1">
+            <a:schemeClr val="accent1"/>
+          </a:effectRef>
+          <a:fontRef idx="minor">
+            <a:schemeClr val="tx1"/>
+          </a:fontRef>
+        </p:style>
+      </p:cxnSp>
+      <p:sp>
+        <p:nvSpPr>
+          <p:cNvPr id="11" name="Rounded Rectangle 10"/>
+          <p:cNvSpPr/>
+          <p:nvPr/>
+        </p:nvSpPr>
+        <p:spPr>
+          <a:xfrm>
+            <a:off x="7612360" y="3895480"/>
+            <a:ext cx="3931960" cy="1049080"/>
+          </a:xfrm>
+          <a:prstGeom prst="roundRect">
+            <a:avLst/>
+          </a:prstGeom>
+          <a:solidFill>
+            <a:srgbClr val="5A4A1E"/>
+          </a:solidFill>
+          <a:ln>
+            <a:noFill/>
+          </a:ln>
+          <a:effectLst/>
+        </p:spPr>
+        <p:style>
+          <a:lnRef idx="1">
+            <a:schemeClr val="accent1"/>
+          </a:lnRef>
+          <a:fillRef idx="3">
+            <a:schemeClr val="accent1"/>
+          </a:fillRef>
+          <a:effectRef idx="2">
+            <a:schemeClr val="accent1"/>
+          </a:effectRef>
+          <a:fontRef idx="minor">
+            <a:schemeClr val="lt1"/>
+          </a:fontRef>
+        </p:style>
+        <p:txBody>
+          <a:bodyPr rtlCol="0" anchor="ctr" wrap="square" lIns="45720" rIns="45720" tIns="18000" bIns="18000"/>
+          <a:lstStyle/>
+          <a:p>
+            <a:pPr algn="ctr"/>
+            <a:r>
+              <a:rPr sz="1050" b="1">
+                <a:solidFill>
+                  <a:srgbClr val="FFFFFF"/>
+                </a:solidFill>
+                <a:latin typeface="Calibri"/>
+              </a:rPr>
+              <a:t>Router  →  Service  →  Repository</a:t>
+            </a:r>
+          </a:p>
+        </p:txBody>
+      </p:sp>
+      <p:cxnSp>
+        <p:nvCxnSpPr>
+          <p:cNvPr id="12" name="Connector 11"/>
+          <p:cNvCxnSpPr/>
+          <p:nvPr/>
+        </p:nvCxnSpPr>
+        <p:spPr>
+          <a:xfrm>
+            <a:off x="9578340" y="4944560"/>
+            <a:ext cx="0" cy="110000"/>
+          </a:xfrm>
+          <a:prstGeom prst="line">
+            <a:avLst/>
+          </a:prstGeom>
+          <a:ln w="19050">
+            <a:solidFill>
+              <a:srgbClr val="D8CEA8"/>
+            </a:solidFill>
+            <a:tailEnd type="triangle" w="med" len="med"/>
+          </a:ln>
+        </p:spPr>
+        <p:style>
+          <a:lnRef idx="2">
+            <a:schemeClr val="accent1"/>
+          </a:lnRef>
+          <a:fillRef idx="0">
+            <a:schemeClr val="accent1"/>
+          </a:fillRef>
+          <a:effectRef idx="1">
+            <a:schemeClr val="accent1"/>
+          </a:effectRef>
+          <a:fontRef idx="minor">
+            <a:schemeClr val="tx1"/>
+          </a:fontRef>
+        </p:style>
+      </p:cxnSp>
+      <p:sp>
+        <p:nvSpPr>
+          <p:cNvPr id="13" name="Rounded Rectangle 12"/>
+          <p:cNvSpPr/>
+          <p:nvPr/>
+        </p:nvSpPr>
+        <p:spPr>
+          <a:xfrm>
+            <a:off x="7612360" y="5054560"/>
+            <a:ext cx="3931960" cy="1049080"/>
+          </a:xfrm>
+          <a:prstGeom prst="roundRect">
+            <a:avLst/>
+          </a:prstGeom>
+          <a:solidFill>
+            <a:srgbClr val="0F2442"/>
+          </a:solidFill>
+          <a:ln>
+            <a:noFill/>
+          </a:ln>
+          <a:effectLst/>
+        </p:spPr>
+        <p:style>
+          <a:lnRef idx="1">
+            <a:schemeClr val="accent1"/>
+          </a:lnRef>
+          <a:fillRef idx="3">
+            <a:schemeClr val="accent1"/>
+          </a:fillRef>
+          <a:effectRef idx="2">
+            <a:schemeClr val="accent1"/>
+          </a:effectRef>
+          <a:fontRef idx="minor">
+            <a:schemeClr val="lt1"/>
+          </a:fontRef>
+        </p:style>
+        <p:txBody>
+          <a:bodyPr rtlCol="0" anchor="ctr" wrap="square" lIns="45720" rIns="45720" tIns="18000" bIns="18000"/>
+          <a:lstStyle/>
+          <a:p>
+            <a:pPr algn="ctr"/>
+            <a:r>
+              <a:rPr sz="1050" b="1">
+                <a:solidFill>
+                  <a:srgbClr val="FFFFFF"/>
+                </a:solidFill>
+                <a:latin typeface="Calibri"/>
+              </a:rPr>
+              <a:t>PostgreSQL</a:t>
             </a:r>
           </a:p>
         </p:txBody>
@@ -13019,83 +17785,69 @@
                 </a:solidFill>
               </a:defRPr>
             </a:pPr>
-            <a:r>
-              <a:t>📷  Recommended Screenshot</a:t>
-            </a:r>
-          </a:p>
-          <a:p>
-            <a:pPr>
-              <a:spcAft>
-                <a:spcPts val="200"/>
-              </a:spcAft>
-              <a:defRPr sz="1250">
-                <a:solidFill>
-                  <a:srgbClr val="5A4A1E"/>
-                </a:solidFill>
-              </a:defRPr>
-            </a:pPr>
-            <a:r>
-              <a:t>A database client (pgAdmin/DBeaver) showing the full table list of the running database.</a:t>
-            </a:r>
-          </a:p>
-          <a:p>
-            <a:pPr>
-              <a:spcBef>
-                <a:spcPts val="1400"/>
-              </a:spcBef>
-              <a:defRPr b="1" sz="1300">
+          </a:p>
+        </p:txBody>
+      </p:sp>
+      <p:pic>
+        <p:nvPicPr>
+          <p:cNvPr id="7" name="Picture 6" descr="ER_Diagram.png"/>
+          <p:cNvPicPr>
+            <a:picLocks noChangeAspect="1"/>
+          </p:cNvPicPr>
+          <p:nvPr/>
+        </p:nvPicPr>
+        <p:blipFill>
+          <a:blip r:embed="rId3"/>
+          <a:stretch>
+            <a:fillRect/>
+          </a:stretch>
+        </p:blipFill>
+        <p:spPr>
+          <a:xfrm>
+            <a:off x="7953946" y="1577320"/>
+            <a:ext cx="3248788" cy="4070320"/>
+          </a:xfrm>
+          <a:prstGeom prst="rect">
+            <a:avLst/>
+          </a:prstGeom>
+          <a:ln w="9525">
+            <a:solidFill>
+              <a:srgbClr val="D8CEA8"/>
+            </a:solidFill>
+          </a:ln>
+        </p:spPr>
+      </p:pic>
+      <p:sp>
+        <p:nvSpPr>
+          <p:cNvPr id="8" name="TextBox 7"/>
+          <p:cNvSpPr txBox="1"/>
+          <p:nvPr/>
+        </p:nvSpPr>
+        <p:spPr>
+          <a:xfrm>
+            <a:off x="7612360" y="5683640"/>
+            <a:ext cx="3931960" cy="210000"/>
+          </a:xfrm>
+          <a:prstGeom prst="rect">
+            <a:avLst/>
+          </a:prstGeom>
+          <a:noFill/>
+        </p:spPr>
+        <p:txBody>
+          <a:bodyPr wrap="square" lIns="0" rIns="0" tIns="0" bIns="0">
+            <a:spAutoFit/>
+          </a:bodyPr>
+          <a:lstStyle/>
+          <a:p>
+            <a:pPr algn="ctr"/>
+            <a:r>
+              <a:rPr sz="900" b="1" i="0">
                 <a:solidFill>
                   <a:srgbClr val="0E7C86"/>
                 </a:solidFill>
-              </a:defRPr>
-            </a:pPr>
-            <a:r>
-              <a:t>🗺  Diagram Suggestion</a:t>
-            </a:r>
-          </a:p>
-          <a:p>
-            <a:pPr>
-              <a:spcAft>
-                <a:spcPts val="200"/>
-              </a:spcAft>
-              <a:defRPr sz="1250">
-                <a:solidFill>
-                  <a:srgbClr val="5A4A1E"/>
-                </a:solidFill>
-              </a:defRPr>
-            </a:pPr>
-            <a:r>
-              <a:t>Entity-Relationship Diagram (ERD) — full schema from Database_Design.md, with primary/foreign key relationships between user, student/teacher/parent, class_session, exam, result, fee_structure/invoice, attendance.</a:t>
-            </a:r>
-          </a:p>
-          <a:p>
-            <a:pPr>
-              <a:spcBef>
-                <a:spcPts val="1400"/>
-              </a:spcBef>
-              <a:defRPr b="1" sz="1300">
-                <a:solidFill>
-                  <a:srgbClr val="0E7C86"/>
-                </a:solidFill>
-              </a:defRPr>
-            </a:pPr>
-            <a:r>
-              <a:t>✨  Animation</a:t>
-            </a:r>
-          </a:p>
-          <a:p>
-            <a:pPr>
-              <a:spcAft>
-                <a:spcPts val="200"/>
-              </a:spcAft>
-              <a:defRPr sz="1250">
-                <a:solidFill>
-                  <a:srgbClr val="5A4A1E"/>
-                </a:solidFill>
-              </a:defRPr>
-            </a:pPr>
-            <a:r>
-              <a:t>Zoom into 2–3 key relationships (e.g. parent_student_link, exam → exam_submission → question_grade) after showing the full ERD, to avoid overwhelming the audience with all 26 tables at once.</a:t>
+                <a:latin typeface="Calibri"/>
+              </a:rPr>
+              <a:t>Entity-Relationship Diagram</a:t>
             </a:r>
           </a:p>
         </p:txBody>
@@ -13442,83 +18194,115 @@
                 </a:solidFill>
               </a:defRPr>
             </a:pPr>
-            <a:r>
-              <a:t>📷  Recommended Screenshot</a:t>
-            </a:r>
-          </a:p>
-          <a:p>
-            <a:pPr>
-              <a:spcAft>
-                <a:spcPts val="200"/>
-              </a:spcAft>
-              <a:defRPr sz="1250">
+          </a:p>
+        </p:txBody>
+      </p:sp>
+      <p:sp>
+        <p:nvSpPr>
+          <p:cNvPr id="7" name="Rounded Rectangle 6"/>
+          <p:cNvSpPr/>
+          <p:nvPr/>
+        </p:nvSpPr>
+        <p:spPr>
+          <a:xfrm>
+            <a:off x="7612360" y="1577320"/>
+            <a:ext cx="3931960" cy="4300320"/>
+          </a:xfrm>
+          <a:prstGeom prst="roundRect">
+            <a:avLst/>
+          </a:prstGeom>
+          <a:solidFill>
+            <a:srgbClr val="FFFFFF"/>
+          </a:solidFill>
+          <a:ln w="12700">
+            <a:solidFill>
+              <a:srgbClr val="D8CEA8"/>
+            </a:solidFill>
+            <a:prstDash val="dash"/>
+          </a:ln>
+          <a:effectLst/>
+        </p:spPr>
+        <p:style>
+          <a:lnRef idx="1">
+            <a:schemeClr val="accent1"/>
+          </a:lnRef>
+          <a:fillRef idx="3">
+            <a:schemeClr val="accent1"/>
+          </a:fillRef>
+          <a:effectRef idx="2">
+            <a:schemeClr val="accent1"/>
+          </a:effectRef>
+          <a:fontRef idx="minor">
+            <a:schemeClr val="lt1"/>
+          </a:fontRef>
+        </p:style>
+        <p:txBody>
+          <a:bodyPr rtlCol="0" anchor="ctr" wrap="square" lIns="45720" rIns="45720"/>
+          <a:lstStyle/>
+          <a:p>
+            <a:pPr algn="ctr"/>
+            <a:r>
+              <a:rPr sz="2400"/>
+              <a:t>📷</a:t>
+            </a:r>
+          </a:p>
+          <a:p>
+            <a:pPr algn="ctr"/>
+            <a:r>
+              <a:rPr sz="1050" b="1">
+                <a:solidFill>
+                  <a:srgbClr val="0E7C86"/>
+                </a:solidFill>
+                <a:latin typeface="Calibri"/>
+              </a:rPr>
+              <a:t>API Documentation (Swagger / OpenAPI) Screenshot</a:t>
+            </a:r>
+          </a:p>
+          <a:p>
+            <a:pPr algn="ctr"/>
+            <a:r>
+              <a:rPr sz="800" i="1">
                 <a:solidFill>
                   <a:srgbClr val="5A4A1E"/>
                 </a:solidFill>
-              </a:defRPr>
-            </a:pPr>
-            <a:r>
-              <a:t>Swagger/OpenAPI docs page (in a non-production environment) showing the grouped endpoint list by domain.</a:t>
-            </a:r>
-          </a:p>
-          <a:p>
-            <a:pPr>
-              <a:spcBef>
-                <a:spcPts val="1400"/>
-              </a:spcBef>
-              <a:defRPr b="1" sz="1300">
+                <a:latin typeface="Calibri"/>
+              </a:rPr>
+              <a:t>screenshot placeholder</a:t>
+            </a:r>
+          </a:p>
+        </p:txBody>
+      </p:sp>
+      <p:sp>
+        <p:nvSpPr>
+          <p:cNvPr id="8" name="TextBox 7"/>
+          <p:cNvSpPr txBox="1"/>
+          <p:nvPr/>
+        </p:nvSpPr>
+        <p:spPr>
+          <a:xfrm>
+            <a:off x="7612360" y="5913640"/>
+            <a:ext cx="3931960" cy="210000"/>
+          </a:xfrm>
+          <a:prstGeom prst="rect">
+            <a:avLst/>
+          </a:prstGeom>
+          <a:noFill/>
+        </p:spPr>
+        <p:txBody>
+          <a:bodyPr wrap="square" lIns="0" rIns="0" tIns="0" bIns="0">
+            <a:spAutoFit/>
+          </a:bodyPr>
+          <a:lstStyle/>
+          <a:p>
+            <a:pPr algn="ctr"/>
+            <a:r>
+              <a:rPr sz="900" b="1" i="0">
                 <a:solidFill>
                   <a:srgbClr val="0E7C86"/>
                 </a:solidFill>
-              </a:defRPr>
-            </a:pPr>
-            <a:r>
-              <a:t>🗺  Diagram Suggestion</a:t>
-            </a:r>
-          </a:p>
-          <a:p>
-            <a:pPr>
-              <a:spcAft>
-                <a:spcPts val="200"/>
-              </a:spcAft>
-              <a:defRPr sz="1250">
-                <a:solidFill>
-                  <a:srgbClr val="5A4A1E"/>
-                </a:solidFill>
-              </a:defRPr>
-            </a:pPr>
-            <a:r>
-              <a:t>Folder-tree diagram of backend/app/{core,db,models,schemas,routers,services,repositories,notifications,pdf,excel}, annotated with a one-line responsibility per folder.</a:t>
-            </a:r>
-          </a:p>
-          <a:p>
-            <a:pPr>
-              <a:spcBef>
-                <a:spcPts val="1400"/>
-              </a:spcBef>
-              <a:defRPr b="1" sz="1300">
-                <a:solidFill>
-                  <a:srgbClr val="0E7C86"/>
-                </a:solidFill>
-              </a:defRPr>
-            </a:pPr>
-            <a:r>
-              <a:t>✨  Animation</a:t>
-            </a:r>
-          </a:p>
-          <a:p>
-            <a:pPr>
-              <a:spcAft>
-                <a:spcPts val="200"/>
-              </a:spcAft>
-              <a:defRPr sz="1250">
-                <a:solidFill>
-                  <a:srgbClr val="5A4A1E"/>
-                </a:solidFill>
-              </a:defRPr>
-            </a:pPr>
-            <a:r>
-              <a:t>Highlight one folder at a time in the tree diagram as it's mentioned (color-fade the current folder, dim the rest).</a:t>
+                <a:latin typeface="Calibri"/>
+              </a:rPr>
+              <a:t>GET /docs — grouped endpoint list by domain</a:t>
             </a:r>
           </a:p>
         </p:txBody>
@@ -13865,83 +18649,192 @@
                 </a:solidFill>
               </a:defRPr>
             </a:pPr>
-            <a:r>
-              <a:t>📷  Recommended Screenshot</a:t>
-            </a:r>
-          </a:p>
-          <a:p>
-            <a:pPr>
-              <a:spcAft>
-                <a:spcPts val="200"/>
-              </a:spcAft>
-              <a:defRPr sz="1250">
-                <a:solidFill>
-                  <a:srgbClr val="5A4A1E"/>
-                </a:solidFill>
-              </a:defRPr>
-            </a:pPr>
-            <a:r>
-              <a:t>VS Code sidebar showing the frontend/src folder tree expanded (pages, features, components, auth).</a:t>
-            </a:r>
-          </a:p>
-          <a:p>
-            <a:pPr>
-              <a:spcBef>
-                <a:spcPts val="1400"/>
-              </a:spcBef>
-              <a:defRPr b="1" sz="1300">
+          </a:p>
+        </p:txBody>
+      </p:sp>
+      <p:sp>
+        <p:nvSpPr>
+          <p:cNvPr id="7" name="Rounded Rectangle 6"/>
+          <p:cNvSpPr/>
+          <p:nvPr/>
+        </p:nvSpPr>
+        <p:spPr>
+          <a:xfrm>
+            <a:off x="7612360" y="1577320"/>
+            <a:ext cx="3931960" cy="4526320"/>
+          </a:xfrm>
+          <a:prstGeom prst="roundRect">
+            <a:avLst/>
+          </a:prstGeom>
+          <a:solidFill>
+            <a:srgbClr val="0B1622"/>
+          </a:solidFill>
+          <a:ln>
+            <a:noFill/>
+          </a:ln>
+          <a:effectLst/>
+        </p:spPr>
+        <p:style>
+          <a:lnRef idx="1">
+            <a:schemeClr val="accent1"/>
+          </a:lnRef>
+          <a:fillRef idx="3">
+            <a:schemeClr val="accent1"/>
+          </a:fillRef>
+          <a:effectRef idx="2">
+            <a:schemeClr val="accent1"/>
+          </a:effectRef>
+          <a:fontRef idx="minor">
+            <a:schemeClr val="lt1"/>
+          </a:fontRef>
+        </p:style>
+        <p:txBody>
+          <a:bodyPr rtlCol="0" anchor="t" wrap="square" lIns="140000" rIns="80000" tIns="120000"/>
+          <a:lstStyle/>
+          <a:p>
+            <a:pPr algn="ctr"/>
+            <a:r>
+              <a:rPr sz="1100" b="1">
+                <a:solidFill>
+                  <a:srgbClr val="4CD97B"/>
+                </a:solidFill>
+                <a:latin typeface="Consolas"/>
+              </a:rPr>
+              <a:t>📁 frontend/src/</a:t>
+            </a:r>
+          </a:p>
+          <a:p>
+            <a:r>
+              <a:rPr sz="950" b="0">
+                <a:solidFill>
+                  <a:srgbClr val="FFFFFF"/>
+                </a:solidFill>
+                <a:latin typeface="Consolas"/>
+              </a:rPr>
+              <a:t>    └─ pages/          # one page per screen</a:t>
+            </a:r>
+          </a:p>
+          <a:p>
+            <a:r>
+              <a:rPr sz="950" b="0">
+                <a:solidFill>
+                  <a:srgbClr val="FFFFFF"/>
+                </a:solidFill>
+                <a:latin typeface="Consolas"/>
+              </a:rPr>
+              <a:t>    └─ features/       # useExams, useAttendance ...</a:t>
+            </a:r>
+          </a:p>
+          <a:p>
+            <a:r>
+              <a:rPr sz="950" b="0">
+                <a:solidFill>
+                  <a:srgbClr val="FFFFFF"/>
+                </a:solidFill>
+                <a:latin typeface="Consolas"/>
+              </a:rPr>
+              <a:t>    └─ components/     # Card, Table, Modal, Toast</a:t>
+            </a:r>
+          </a:p>
+          <a:p>
+            <a:r>
+              <a:rPr sz="950" b="0">
+                <a:solidFill>
+                  <a:srgbClr val="FFFFFF"/>
+                </a:solidFill>
+                <a:latin typeface="Consolas"/>
+              </a:rPr>
+              <a:t>    └─ auth/           # token + route guarding</a:t>
+            </a:r>
+          </a:p>
+          <a:p>
+            <a:r>
+              <a:rPr sz="1100" b="1">
+                <a:solidFill>
+                  <a:srgbClr val="4CD97B"/>
+                </a:solidFill>
+                <a:latin typeface="Consolas"/>
+              </a:rPr>
+              <a:t>📁 backend/app/</a:t>
+            </a:r>
+          </a:p>
+          <a:p>
+            <a:r>
+              <a:rPr sz="950" b="0">
+                <a:solidFill>
+                  <a:srgbClr val="FFFFFF"/>
+                </a:solidFill>
+                <a:latin typeface="Consolas"/>
+              </a:rPr>
+              <a:t>    └─ routers/        # request / response only</a:t>
+            </a:r>
+          </a:p>
+          <a:p>
+            <a:r>
+              <a:rPr sz="950" b="0">
+                <a:solidFill>
+                  <a:srgbClr val="FFFFFF"/>
+                </a:solidFill>
+                <a:latin typeface="Consolas"/>
+              </a:rPr>
+              <a:t>    └─ services/       # business rules</a:t>
+            </a:r>
+          </a:p>
+          <a:p>
+            <a:r>
+              <a:rPr sz="950" b="0">
+                <a:solidFill>
+                  <a:srgbClr val="FFFFFF"/>
+                </a:solidFill>
+                <a:latin typeface="Consolas"/>
+              </a:rPr>
+              <a:t>    └─ repositories/   # SQLAlchemy queries</a:t>
+            </a:r>
+          </a:p>
+          <a:p>
+            <a:r>
+              <a:rPr sz="950" b="0">
+                <a:solidFill>
+                  <a:srgbClr val="FFFFFF"/>
+                </a:solidFill>
+                <a:latin typeface="Consolas"/>
+              </a:rPr>
+              <a:t>    └─ models/  schemas/  notifications/  pdf/</a:t>
+            </a:r>
+          </a:p>
+        </p:txBody>
+      </p:sp>
+      <p:sp>
+        <p:nvSpPr>
+          <p:cNvPr id="8" name="TextBox 7"/>
+          <p:cNvSpPr txBox="1"/>
+          <p:nvPr/>
+        </p:nvSpPr>
+        <p:spPr>
+          <a:xfrm>
+            <a:off x="7612360" y="6143640"/>
+            <a:ext cx="3931960" cy="210000"/>
+          </a:xfrm>
+          <a:prstGeom prst="rect">
+            <a:avLst/>
+          </a:prstGeom>
+          <a:noFill/>
+        </p:spPr>
+        <p:txBody>
+          <a:bodyPr wrap="square" lIns="0" rIns="0" tIns="0" bIns="0">
+            <a:spAutoFit/>
+          </a:bodyPr>
+          <a:lstStyle/>
+          <a:p>
+            <a:pPr algn="ctr"/>
+            <a:r>
+              <a:rPr sz="950" b="1" i="0">
                 <a:solidFill>
                   <a:srgbClr val="0E7C86"/>
                 </a:solidFill>
-              </a:defRPr>
-            </a:pPr>
-            <a:r>
-              <a:t>🗺  Diagram Suggestion</a:t>
-            </a:r>
-          </a:p>
-          <a:p>
-            <a:pPr>
-              <a:spcAft>
-                <a:spcPts val="200"/>
-              </a:spcAft>
-              <a:defRPr sz="1250">
-                <a:solidFill>
-                  <a:srgbClr val="5A4A1E"/>
-                </a:solidFill>
-              </a:defRPr>
-            </a:pPr>
-            <a:r>
-              <a:t>Data-flow diagram: Component → useX() hook (React Query) → apiClient (Axios) → REST API, with a side arrow showing the token-refresh interceptor in auth/.</a:t>
-            </a:r>
-          </a:p>
-          <a:p>
-            <a:pPr>
-              <a:spcBef>
-                <a:spcPts val="1400"/>
-              </a:spcBef>
-              <a:defRPr b="1" sz="1300">
-                <a:solidFill>
-                  <a:srgbClr val="0E7C86"/>
-                </a:solidFill>
-              </a:defRPr>
-            </a:pPr>
-            <a:r>
-              <a:t>✨  Animation</a:t>
-            </a:r>
-          </a:p>
-          <a:p>
-            <a:pPr>
-              <a:spcAft>
-                <a:spcPts val="200"/>
-              </a:spcAft>
-              <a:defRPr sz="1250">
-                <a:solidFill>
-                  <a:srgbClr val="5A4A1E"/>
-                </a:solidFill>
-              </a:defRPr>
-            </a:pPr>
-            <a:r>
-              <a:t>Animate the data-flow diagram left-to-right as an arrow sequence (Component → Hook → API Client → Server) to visually explain 'no direct fetch calls'.</a:t>
+                <a:latin typeface="Calibri"/>
+              </a:rPr>
+              <a:t>Project Folder Structure</a:t>
             </a:r>
           </a:p>
         </p:txBody>
